--- a/artifacts/speaking-portfolio-expanded/decks/product-engineering-30min-handout.pptx
+++ b/artifacts/speaking-portfolio-expanded/decks/product-engineering-30min-handout.pptx
@@ -21,6 +21,8 @@
     <p:sldId id="266" r:id="rIdSlide11"/>
     <p:sldId id="267" r:id="rIdSlide12"/>
     <p:sldId id="268" r:id="rIdSlide13"/>
+    <p:sldId id="269" r:id="rIdSlide14"/>
+    <p:sldId id="270" r:id="rIdSlide15"/>
   </p:sldIdLst>
   <p:sldSz cx="10058400" cy="7772400" type="custom"/>
   <p:notesSz cx="6858000" cy="9144000"/>
@@ -105,7 +107,7 @@
                 <a:ea typeface="Arial"/>
                 <a:cs typeface="Arial"/>
               </a:rPr>
-              <a:t xml:space="preserve">40 minutes. Timings include the exercises and delivery pauses, without Q&amp;A. Sources checked 6 September 2026. Story prompts belong in speaker notes and require Dan’s own records before delivery.</a:t>
+              <a:t xml:space="preserve">40 minutes, 17 slides. Timings include the exercises and delivery pauses, without Q&amp;A. Sources checked 6 September 2026. Story prompts belong in speaker notes and require Dan’s own records before delivery. Slides 14 and 15 are labelled predictions, once, on slide 14; everything before them is the operating model as it stands.</a:t>
             </a:r>
             <a:endParaRPr lang="en-US" sz="1200"/>
           </a:p>
@@ -218,7 +220,7 @@
                 <a:ea typeface="Arial"/>
                 <a:cs typeface="Arial"/>
               </a:rPr>
-              <a:t xml:space="preserve">Source slide 11. 17:00 to 22:00</a:t>
+              <a:t xml:space="preserve">Source slide 11. 16:30 to 21:00</a:t>
             </a:r>
             <a:endParaRPr lang="en-US" sz="1200"/>
           </a:p>
@@ -632,7 +634,7 @@
                 <a:ea typeface="Arial"/>
                 <a:cs typeface="Arial"/>
               </a:rPr>
-              <a:t xml:space="preserve">Five minutes in the 40/30 routes, 3:30 in the 15. Begin with only this slide, never the answer-labelled kit. After the vote open the kit and map B to Pressure copy, C to Clearer first step. Follow economics-product/demo.md. Allow 45 seconds to write the rule.</a:t>
+              <a:t xml:space="preserve">Four and a half minutes in the 40/30 routes, 3:30 in the 15. Begin with only this slide, never the answer-labelled kit. After the vote open the kit and map B to Pressure copy, C to Clearer first step. Follow economics-product/demo.md. Allow 45 seconds to write the rule.</a:t>
             </a:r>
             <a:endParaRPr lang="en-US" sz="1200"/>
           </a:p>
@@ -791,7 +793,7 @@
                 <a:ea typeface="Arial"/>
                 <a:cs typeface="Arial"/>
               </a:rPr>
-              <a:t xml:space="preserve">Source slide 12. 22:00 to 25:00</a:t>
+              <a:t xml:space="preserve">Source slide 12. 21:00 to 23:30</a:t>
             </a:r>
             <a:endParaRPr lang="en-US" sz="1200"/>
           </a:p>
@@ -1021,145 +1023,145 @@
                 <a:ea typeface="Arial"/>
                 <a:cs typeface="Arial"/>
               </a:rPr>
-              <a:t xml:space="preserve">Then add the two missing from the old list. Sending a message to a real customer. Deleting their records. Those are consequences for another person, even when the API call costs a fraction of a cent. A person approves them. The system must enforce that permission, not merely mention it in the prompt.</a:t>
-            </a:r>
-            <a:endParaRPr lang="en-US" sz="1200"/>
-          </a:p>
-          <a:p>
-            <a:pPr marL="0" indent="0">
-              <a:lnSpc>
-                <a:spcPts val="1560"/>
-              </a:lnSpc>
-              <a:spcAft>
-                <a:spcPts val="0"/>
-              </a:spcAft>
-              <a:buNone/>
-            </a:pPr>
-            <a:r>
-              <a:rPr lang="en-US" sz="1200" b="0">
-                <a:solidFill>
-                  <a:srgbClr val="202b33"/>
-                </a:solidFill>
-                <a:latin typeface="Arial"/>
-                <a:ea typeface="Arial"/>
-                <a:cs typeface="Arial"/>
-              </a:rPr>
-              <a:t xml:space="preserve"/>
-            </a:r>
-            <a:endParaRPr lang="en-US" sz="1200"/>
-          </a:p>
-          <a:p>
-            <a:pPr marL="0" indent="0">
-              <a:lnSpc>
-                <a:spcPts val="1560"/>
-              </a:lnSpc>
-              <a:spcAft>
-                <a:spcPts val="0"/>
-              </a:spcAft>
-              <a:buNone/>
-            </a:pPr>
-            <a:r>
-              <a:rPr lang="en-US" sz="1200" b="0">
-                <a:solidFill>
-                  <a:srgbClr val="202b33"/>
-                </a:solidFill>
-                <a:latin typeface="Arial"/>
-                <a:ea typeface="Arial"/>
-                <a:cs typeface="Arial"/>
-              </a:rPr>
-              <a:t xml:space="preserve"/>
-            </a:r>
-            <a:endParaRPr lang="en-US" sz="1200"/>
-          </a:p>
-          <a:p>
-            <a:pPr marL="0" indent="0">
-              <a:lnSpc>
-                <a:spcPts val="1560"/>
-              </a:lnSpc>
-              <a:spcAft>
-                <a:spcPts val="0"/>
-              </a:spcAft>
-              <a:buNone/>
-            </a:pPr>
-            <a:r>
-              <a:rPr lang="en-US" sz="1200" b="0">
-                <a:solidFill>
-                  <a:srgbClr val="202b33"/>
-                </a:solidFill>
-                <a:latin typeface="Arial"/>
-                <a:ea typeface="Arial"/>
-                <a:cs typeface="Arial"/>
-              </a:rPr>
-              <a:t xml:space="preserve"/>
-            </a:r>
-            <a:endParaRPr lang="en-US" sz="1200"/>
-          </a:p>
-          <a:p>
-            <a:pPr marL="0" indent="0">
-              <a:lnSpc>
-                <a:spcPts val="1560"/>
-              </a:lnSpc>
-              <a:spcAft>
-                <a:spcPts val="0"/>
-              </a:spcAft>
-              <a:buNone/>
-            </a:pPr>
-            <a:r>
-              <a:rPr lang="en-US" sz="1200" b="0">
-                <a:solidFill>
-                  <a:srgbClr val="202b33"/>
-                </a:solidFill>
-                <a:latin typeface="Arial"/>
-                <a:ea typeface="Arial"/>
-                <a:cs typeface="Arial"/>
-              </a:rPr>
-              <a:t xml:space="preserve"/>
-            </a:r>
-            <a:endParaRPr lang="en-US" sz="1200"/>
-          </a:p>
-          <a:p>
-            <a:pPr marL="0" indent="0">
-              <a:lnSpc>
-                <a:spcPts val="1560"/>
-              </a:lnSpc>
-              <a:spcAft>
-                <a:spcPts val="0"/>
-              </a:spcAft>
-              <a:buNone/>
-            </a:pPr>
-            <a:r>
-              <a:rPr lang="en-US" sz="1200" b="0">
-                <a:solidFill>
-                  <a:srgbClr val="202b33"/>
-                </a:solidFill>
-                <a:latin typeface="Arial"/>
-                <a:ea typeface="Arial"/>
-                <a:cs typeface="Arial"/>
-              </a:rPr>
-              <a:t xml:space="preserve"/>
-            </a:r>
-            <a:endParaRPr lang="en-US" sz="1200"/>
-          </a:p>
-          <a:p>
-            <a:pPr marL="0" indent="0">
-              <a:lnSpc>
-                <a:spcPts val="1560"/>
-              </a:lnSpc>
-              <a:spcAft>
-                <a:spcPts val="0"/>
-              </a:spcAft>
-              <a:buNone/>
-            </a:pPr>
-            <a:r>
-              <a:rPr lang="en-US" sz="1200" b="0">
-                <a:solidFill>
-                  <a:srgbClr val="202b33"/>
-                </a:solidFill>
-                <a:latin typeface="Arial"/>
-                <a:ea typeface="Arial"/>
-                <a:cs typeface="Arial"/>
-              </a:rPr>
-              <a:t xml:space="preserve">Bridge: Graicunas counted 222 possible relationships at six reports; this is a warning about interfaces, not a staffing ratio. Bainbridge asks who still gets recovery practice. Every experiment needs a hypothesis and a report.</a:t>
+              <a:t xml:space="preserve">Then add the two missing from the old list. Sending a message to a real customer. Deleting their records. Those are consequences for another person, even when the API call costs a fraction of a cent. A person approves them, and the system enforces that permission rather than mentioning it in a prompt.</a:t>
+            </a:r>
+            <a:endParaRPr lang="en-US" sz="1200"/>
+          </a:p>
+          <a:p>
+            <a:pPr marL="0" indent="0">
+              <a:lnSpc>
+                <a:spcPts val="1560"/>
+              </a:lnSpc>
+              <a:spcAft>
+                <a:spcPts val="0"/>
+              </a:spcAft>
+              <a:buNone/>
+            </a:pPr>
+            <a:r>
+              <a:rPr lang="en-US" sz="1200" b="0">
+                <a:solidFill>
+                  <a:srgbClr val="202b33"/>
+                </a:solidFill>
+                <a:latin typeface="Arial"/>
+                <a:ea typeface="Arial"/>
+                <a:cs typeface="Arial"/>
+              </a:rPr>
+              <a:t xml:space="preserve"/>
+            </a:r>
+            <a:endParaRPr lang="en-US" sz="1200"/>
+          </a:p>
+          <a:p>
+            <a:pPr marL="0" indent="0">
+              <a:lnSpc>
+                <a:spcPts val="1560"/>
+              </a:lnSpc>
+              <a:spcAft>
+                <a:spcPts val="0"/>
+              </a:spcAft>
+              <a:buNone/>
+            </a:pPr>
+            <a:r>
+              <a:rPr lang="en-US" sz="1200" b="0">
+                <a:solidFill>
+                  <a:srgbClr val="202b33"/>
+                </a:solidFill>
+                <a:latin typeface="Arial"/>
+                <a:ea typeface="Arial"/>
+                <a:cs typeface="Arial"/>
+              </a:rPr>
+              <a:t xml:space="preserve"/>
+            </a:r>
+            <a:endParaRPr lang="en-US" sz="1200"/>
+          </a:p>
+          <a:p>
+            <a:pPr marL="0" indent="0">
+              <a:lnSpc>
+                <a:spcPts val="1560"/>
+              </a:lnSpc>
+              <a:spcAft>
+                <a:spcPts val="0"/>
+              </a:spcAft>
+              <a:buNone/>
+            </a:pPr>
+            <a:r>
+              <a:rPr lang="en-US" sz="1200" b="0">
+                <a:solidFill>
+                  <a:srgbClr val="202b33"/>
+                </a:solidFill>
+                <a:latin typeface="Arial"/>
+                <a:ea typeface="Arial"/>
+                <a:cs typeface="Arial"/>
+              </a:rPr>
+              <a:t xml:space="preserve"/>
+            </a:r>
+            <a:endParaRPr lang="en-US" sz="1200"/>
+          </a:p>
+          <a:p>
+            <a:pPr marL="0" indent="0">
+              <a:lnSpc>
+                <a:spcPts val="1560"/>
+              </a:lnSpc>
+              <a:spcAft>
+                <a:spcPts val="0"/>
+              </a:spcAft>
+              <a:buNone/>
+            </a:pPr>
+            <a:r>
+              <a:rPr lang="en-US" sz="1200" b="0">
+                <a:solidFill>
+                  <a:srgbClr val="202b33"/>
+                </a:solidFill>
+                <a:latin typeface="Arial"/>
+                <a:ea typeface="Arial"/>
+                <a:cs typeface="Arial"/>
+              </a:rPr>
+              <a:t xml:space="preserve"/>
+            </a:r>
+            <a:endParaRPr lang="en-US" sz="1200"/>
+          </a:p>
+          <a:p>
+            <a:pPr marL="0" indent="0">
+              <a:lnSpc>
+                <a:spcPts val="1560"/>
+              </a:lnSpc>
+              <a:spcAft>
+                <a:spcPts val="0"/>
+              </a:spcAft>
+              <a:buNone/>
+            </a:pPr>
+            <a:r>
+              <a:rPr lang="en-US" sz="1200" b="0">
+                <a:solidFill>
+                  <a:srgbClr val="202b33"/>
+                </a:solidFill>
+                <a:latin typeface="Arial"/>
+                <a:ea typeface="Arial"/>
+                <a:cs typeface="Arial"/>
+              </a:rPr>
+              <a:t xml:space="preserve"/>
+            </a:r>
+            <a:endParaRPr lang="en-US" sz="1200"/>
+          </a:p>
+          <a:p>
+            <a:pPr marL="0" indent="0">
+              <a:lnSpc>
+                <a:spcPts val="1560"/>
+              </a:lnSpc>
+              <a:spcAft>
+                <a:spcPts val="0"/>
+              </a:spcAft>
+              <a:buNone/>
+            </a:pPr>
+            <a:r>
+              <a:rPr lang="en-US" sz="1200" b="0">
+                <a:solidFill>
+                  <a:srgbClr val="202b33"/>
+                </a:solidFill>
+                <a:latin typeface="Arial"/>
+                <a:ea typeface="Arial"/>
+                <a:cs typeface="Arial"/>
+              </a:rPr>
+              <a:t xml:space="preserve">Bridge: Graicunas counted 222 possible relationships at six reports, which is a warning about interfaces rather than a staffing ratio, and Bainbridge asks who still gets recovery practice. One more ownership line for the years ahead: tokens stop being a build cost and become fuel, defensive agents run forever, and somebody owns that meter.</a:t>
             </a:r>
             <a:endParaRPr lang="en-US" sz="1200"/>
           </a:p>
@@ -1272,375 +1274,467 @@
                 <a:ea typeface="Arial"/>
                 <a:cs typeface="Arial"/>
               </a:rPr>
-              <a:t xml:space="preserve">Source slide 15. 25:00 to 30:00</a:t>
-            </a:r>
-            <a:endParaRPr lang="en-US" sz="1200"/>
-          </a:p>
-          <a:p>
-            <a:pPr marL="0" indent="0">
-              <a:lnSpc>
-                <a:spcPts val="1560"/>
-              </a:lnSpc>
-              <a:spcAft>
-                <a:spcPts val="0"/>
-              </a:spcAft>
-              <a:buNone/>
-            </a:pPr>
-            <a:r>
-              <a:rPr lang="en-US" sz="1200" b="0">
-                <a:solidFill>
-                  <a:srgbClr val="202b33"/>
-                </a:solidFill>
-                <a:latin typeface="Arial"/>
-                <a:ea typeface="Arial"/>
-                <a:cs typeface="Arial"/>
-              </a:rPr>
-              <a:t xml:space="preserve"/>
-            </a:r>
-            <a:endParaRPr lang="en-US" sz="1200"/>
-          </a:p>
-          <a:p>
-            <a:pPr marL="0" indent="0">
-              <a:lnSpc>
-                <a:spcPts val="1560"/>
-              </a:lnSpc>
-              <a:spcAft>
-                <a:spcPts val="0"/>
-              </a:spcAft>
-              <a:buNone/>
-            </a:pPr>
-            <a:r>
-              <a:rPr lang="en-US" sz="1200" b="0">
-                <a:solidFill>
-                  <a:srgbClr val="202b33"/>
-                </a:solidFill>
-                <a:latin typeface="Arial"/>
-                <a:ea typeface="Arial"/>
-                <a:cs typeface="Arial"/>
-              </a:rPr>
-              <a:t xml:space="preserve">Reprice the handoffs. Draw the interfaces.</a:t>
-            </a:r>
-            <a:endParaRPr lang="en-US" sz="1200"/>
-          </a:p>
-          <a:p>
-            <a:pPr marL="0" indent="0">
-              <a:lnSpc>
-                <a:spcPts val="1560"/>
-              </a:lnSpc>
-              <a:spcAft>
-                <a:spcPts val="0"/>
-              </a:spcAft>
-              <a:buNone/>
-            </a:pPr>
-            <a:r>
-              <a:rPr lang="en-US" sz="1200" b="0">
-                <a:solidFill>
-                  <a:srgbClr val="202b33"/>
-                </a:solidFill>
-                <a:latin typeface="Arial"/>
-                <a:ea typeface="Arial"/>
-                <a:cs typeface="Arial"/>
-              </a:rPr>
-              <a:t xml:space="preserve"/>
-            </a:r>
-            <a:endParaRPr lang="en-US" sz="1200"/>
-          </a:p>
-          <a:p>
-            <a:pPr marL="0" indent="0">
-              <a:lnSpc>
-                <a:spcPts val="1560"/>
-              </a:lnSpc>
-              <a:spcAft>
-                <a:spcPts val="0"/>
-              </a:spcAft>
-              <a:buNone/>
-            </a:pPr>
-            <a:r>
-              <a:rPr lang="en-US" sz="1200" b="0">
-                <a:solidFill>
-                  <a:srgbClr val="202b33"/>
-                </a:solidFill>
-                <a:latin typeface="Arial"/>
-                <a:ea typeface="Arial"/>
-                <a:cs typeface="Arial"/>
-              </a:rPr>
-              <a:t xml:space="preserve">Automate the right things. Keep the taste.</a:t>
-            </a:r>
-            <a:endParaRPr lang="en-US" sz="1200"/>
-          </a:p>
-          <a:p>
-            <a:pPr marL="0" indent="0">
-              <a:lnSpc>
-                <a:spcPts val="1560"/>
-              </a:lnSpc>
-              <a:spcAft>
-                <a:spcPts val="0"/>
-              </a:spcAft>
-              <a:buNone/>
-            </a:pPr>
-            <a:r>
-              <a:rPr lang="en-US" sz="1200" b="0">
-                <a:solidFill>
-                  <a:srgbClr val="202b33"/>
-                </a:solidFill>
-                <a:latin typeface="Arial"/>
-                <a:ea typeface="Arial"/>
-                <a:cs typeface="Arial"/>
-              </a:rPr>
-              <a:t xml:space="preserve"/>
-            </a:r>
-            <a:endParaRPr lang="en-US" sz="1200"/>
-          </a:p>
-          <a:p>
-            <a:pPr marL="0" indent="0">
-              <a:lnSpc>
-                <a:spcPts val="1560"/>
-              </a:lnSpc>
-              <a:spcAft>
-                <a:spcPts val="0"/>
-              </a:spcAft>
-              <a:buNone/>
-            </a:pPr>
-            <a:r>
-              <a:rPr lang="en-US" sz="1200" b="0">
-                <a:solidFill>
-                  <a:srgbClr val="202b33"/>
-                </a:solidFill>
-                <a:latin typeface="Arial"/>
-                <a:ea typeface="Arial"/>
-                <a:cs typeface="Arial"/>
-              </a:rPr>
-              <a:t xml:space="preserve">Back to the org chart. Some of those boundaries exist because the work really is different. Some exist because the person with the spreadsheet sat in another department. We should know which before teaching agents to repeat them.</a:t>
-            </a:r>
-            <a:endParaRPr lang="en-US" sz="1200"/>
-          </a:p>
-          <a:p>
-            <a:pPr marL="0" indent="0">
-              <a:lnSpc>
-                <a:spcPts val="1560"/>
-              </a:lnSpc>
-              <a:spcAft>
-                <a:spcPts val="0"/>
-              </a:spcAft>
-              <a:buNone/>
-            </a:pPr>
-            <a:r>
-              <a:rPr lang="en-US" sz="1200" b="0">
-                <a:solidFill>
-                  <a:srgbClr val="202b33"/>
-                </a:solidFill>
-                <a:latin typeface="Arial"/>
-                <a:ea typeface="Arial"/>
-                <a:cs typeface="Arial"/>
-              </a:rPr>
-              <a:t xml:space="preserve"/>
-            </a:r>
-            <a:endParaRPr lang="en-US" sz="1200"/>
-          </a:p>
-          <a:p>
-            <a:pPr marL="0" indent="0">
-              <a:lnSpc>
-                <a:spcPts val="1560"/>
-              </a:lnSpc>
-              <a:spcAft>
-                <a:spcPts val="0"/>
-              </a:spcAft>
-              <a:buNone/>
-            </a:pPr>
-            <a:r>
-              <a:rPr lang="en-US" sz="1200" b="0">
-                <a:solidFill>
-                  <a:srgbClr val="202b33"/>
-                </a:solidFill>
-                <a:latin typeface="Arial"/>
-                <a:ea typeface="Arial"/>
-                <a:cs typeface="Arial"/>
-              </a:rPr>
-              <a:t xml:space="preserve">Take one boundary. What arrives, what leaves, who decides, and what did it cost last week? Make collection cheaper without erasing the disagreement that the handoff used to expose. Keep the product review where the evidence conflicts. Give the resulting decision a durable artifact so the next agent does not have to guess.</a:t>
-            </a:r>
-            <a:endParaRPr lang="en-US" sz="1200"/>
-          </a:p>
-          <a:p>
-            <a:pPr marL="0" indent="0">
-              <a:lnSpc>
-                <a:spcPts val="1560"/>
-              </a:lnSpc>
-              <a:spcAft>
-                <a:spcPts val="0"/>
-              </a:spcAft>
-              <a:buNone/>
-            </a:pPr>
-            <a:r>
-              <a:rPr lang="en-US" sz="1200" b="0">
-                <a:solidFill>
-                  <a:srgbClr val="202b33"/>
-                </a:solidFill>
-                <a:latin typeface="Arial"/>
-                <a:ea typeface="Arial"/>
-                <a:cs typeface="Arial"/>
-              </a:rPr>
-              <a:t xml:space="preserve"/>
-            </a:r>
-            <a:endParaRPr lang="en-US" sz="1200"/>
-          </a:p>
-          <a:p>
-            <a:pPr marL="0" indent="0">
-              <a:lnSpc>
-                <a:spcPts val="1560"/>
-              </a:lnSpc>
-              <a:spcAft>
-                <a:spcPts val="0"/>
-              </a:spcAft>
-              <a:buNone/>
-            </a:pPr>
-            <a:r>
-              <a:rPr lang="en-US" sz="1200" b="0">
-                <a:solidFill>
-                  <a:srgbClr val="202b33"/>
-                </a:solidFill>
-                <a:latin typeface="Arial"/>
-                <a:ea typeface="Arial"/>
-                <a:cs typeface="Arial"/>
-              </a:rPr>
-              <a:t xml:space="preserve">Then price ownership. Six agents do not become free because one person has their names in a config file. Reserve the person's attention and practise the exceptional work. Put permission before customer consequences.</a:t>
-            </a:r>
-            <a:endParaRPr lang="en-US" sz="1200"/>
-          </a:p>
-          <a:p>
-            <a:pPr marL="0" indent="0">
-              <a:lnSpc>
-                <a:spcPts val="1560"/>
-              </a:lnSpc>
-              <a:spcAft>
-                <a:spcPts val="0"/>
-              </a:spcAft>
-              <a:buNone/>
-            </a:pPr>
-            <a:r>
-              <a:rPr lang="en-US" sz="1200" b="0">
-                <a:solidFill>
-                  <a:srgbClr val="202b33"/>
-                </a:solidFill>
-                <a:latin typeface="Arial"/>
-                <a:ea typeface="Arial"/>
-                <a:cs typeface="Arial"/>
-              </a:rPr>
-              <a:t xml:space="preserve"/>
-            </a:r>
-            <a:endParaRPr lang="en-US" sz="1200"/>
-          </a:p>
-          <a:p>
-            <a:pPr marL="0" indent="0">
-              <a:lnSpc>
-                <a:spcPts val="1560"/>
-              </a:lnSpc>
-              <a:spcAft>
-                <a:spcPts val="0"/>
-              </a:spcAft>
-              <a:buNone/>
-            </a:pPr>
-            <a:r>
-              <a:rPr lang="en-US" sz="1200" b="0">
-                <a:solidFill>
-                  <a:srgbClr val="202b33"/>
-                </a:solidFill>
-                <a:latin typeface="Arial"/>
-                <a:ea typeface="Arial"/>
-                <a:cs typeface="Arial"/>
-              </a:rPr>
-              <a:t xml:space="preserve">The org chart is a record of earlier tradeoffs. You are allowed to make new ones. Automate the right things. Keep the taste.</a:t>
-            </a:r>
-            <a:endParaRPr lang="en-US" sz="1200"/>
-          </a:p>
-          <a:p>
-            <a:pPr marL="0" indent="0">
-              <a:lnSpc>
-                <a:spcPts val="1560"/>
-              </a:lnSpc>
-              <a:spcAft>
-                <a:spcPts val="0"/>
-              </a:spcAft>
-              <a:buNone/>
-            </a:pPr>
-            <a:r>
-              <a:rPr lang="en-US" sz="1200" b="0">
-                <a:solidFill>
-                  <a:srgbClr val="202b33"/>
-                </a:solidFill>
-                <a:latin typeface="Arial"/>
-                <a:ea typeface="Arial"/>
-                <a:cs typeface="Arial"/>
-              </a:rPr>
-              <a:t xml:space="preserve"/>
-            </a:r>
-            <a:endParaRPr lang="en-US" sz="1200"/>
-          </a:p>
-          <a:p>
-            <a:pPr marL="0" indent="0">
-              <a:lnSpc>
-                <a:spcPts val="1560"/>
-              </a:lnSpc>
-              <a:spcAft>
-                <a:spcPts val="0"/>
-              </a:spcAft>
-              <a:buNone/>
-            </a:pPr>
-            <a:r>
-              <a:rPr lang="en-US" sz="1200" b="0">
-                <a:solidFill>
-                  <a:srgbClr val="202b33"/>
-                </a:solidFill>
-                <a:latin typeface="Arial"/>
-                <a:ea typeface="Arial"/>
-                <a:cs typeface="Arial"/>
-              </a:rPr>
-              <a:t xml:space="preserve"/>
-            </a:r>
-            <a:endParaRPr lang="en-US" sz="1200"/>
-          </a:p>
-          <a:p>
-            <a:pPr marL="0" indent="0">
-              <a:lnSpc>
-                <a:spcPts val="1560"/>
-              </a:lnSpc>
-              <a:spcAft>
-                <a:spcPts val="0"/>
-              </a:spcAft>
-              <a:buNone/>
-            </a:pPr>
-            <a:r>
-              <a:rPr lang="en-US" sz="1200" b="0">
-                <a:solidFill>
-                  <a:srgbClr val="202b33"/>
-                </a:solidFill>
-                <a:latin typeface="Arial"/>
-                <a:ea typeface="Arial"/>
-                <a:cs typeface="Arial"/>
-              </a:rPr>
-              <a:t xml:space="preserve"/>
-            </a:r>
-            <a:endParaRPr lang="en-US" sz="1200"/>
-          </a:p>
-          <a:p>
-            <a:pPr marL="0" indent="0">
-              <a:lnSpc>
-                <a:spcPts val="1560"/>
-              </a:lnSpc>
-              <a:spcAft>
-                <a:spcPts val="0"/>
-              </a:spcAft>
-              <a:buNone/>
-            </a:pPr>
-            <a:r>
-              <a:rPr lang="en-US" sz="1200" b="0">
-                <a:solidFill>
-                  <a:srgbClr val="202b33"/>
-                </a:solidFill>
-                <a:latin typeface="Arial"/>
-                <a:ea typeface="Arial"/>
-                <a:cs typeface="Arial"/>
-              </a:rPr>
-              <a:t xml:space="preserve"/>
+              <a:t xml:space="preserve">Source slide 15. 23:30 to 26:30</a:t>
+            </a:r>
+            <a:endParaRPr lang="en-US" sz="1200"/>
+          </a:p>
+          <a:p>
+            <a:pPr marL="0" indent="0">
+              <a:lnSpc>
+                <a:spcPts val="1560"/>
+              </a:lnSpc>
+              <a:spcAft>
+                <a:spcPts val="0"/>
+              </a:spcAft>
+              <a:buNone/>
+            </a:pPr>
+            <a:r>
+              <a:rPr lang="en-US" sz="1200" b="0">
+                <a:solidFill>
+                  <a:srgbClr val="202b33"/>
+                </a:solidFill>
+                <a:latin typeface="Arial"/>
+                <a:ea typeface="Arial"/>
+                <a:cs typeface="Arial"/>
+              </a:rPr>
+              <a:t xml:space="preserve"/>
+            </a:r>
+            <a:endParaRPr lang="en-US" sz="1200"/>
+          </a:p>
+          <a:p>
+            <a:pPr marL="0" indent="0">
+              <a:lnSpc>
+                <a:spcPts val="1560"/>
+              </a:lnSpc>
+              <a:spcAft>
+                <a:spcPts val="0"/>
+              </a:spcAft>
+              <a:buNone/>
+            </a:pPr>
+            <a:r>
+              <a:rPr lang="en-US" sz="1200" b="0">
+                <a:solidFill>
+                  <a:srgbClr val="202b33"/>
+                </a:solidFill>
+                <a:latin typeface="Arial"/>
+                <a:ea typeface="Arial"/>
+                <a:cs typeface="Arial"/>
+              </a:rPr>
+              <a:t xml:space="preserve">Generated UI, adapting in real time, per person</a:t>
+            </a:r>
+            <a:endParaRPr lang="en-US" sz="1200"/>
+          </a:p>
+          <a:p>
+            <a:pPr marL="0" indent="0">
+              <a:lnSpc>
+                <a:spcPts val="1560"/>
+              </a:lnSpc>
+              <a:spcAft>
+                <a:spcPts val="0"/>
+              </a:spcAft>
+              <a:buNone/>
+            </a:pPr>
+            <a:r>
+              <a:rPr lang="en-US" sz="1200" b="0">
+                <a:solidFill>
+                  <a:srgbClr val="202b33"/>
+                </a:solidFill>
+                <a:latin typeface="Arial"/>
+                <a:ea typeface="Arial"/>
+                <a:cs typeface="Arial"/>
+              </a:rPr>
+              <a:t xml:space="preserve"/>
+            </a:r>
+            <a:endParaRPr lang="en-US" sz="1200"/>
+          </a:p>
+          <a:p>
+            <a:pPr marL="0" indent="0">
+              <a:lnSpc>
+                <a:spcPts val="1560"/>
+              </a:lnSpc>
+              <a:spcAft>
+                <a:spcPts val="0"/>
+              </a:spcAft>
+              <a:buNone/>
+            </a:pPr>
+            <a:r>
+              <a:rPr lang="en-US" sz="1200" b="0">
+                <a:solidFill>
+                  <a:srgbClr val="202b33"/>
+                </a:solidFill>
+                <a:latin typeface="Arial"/>
+                <a:ea typeface="Arial"/>
+                <a:cs typeface="Arial"/>
+              </a:rPr>
+              <a:t xml:space="preserve">Yes, the software you mastered is going away. As you know it.</a:t>
+            </a:r>
+            <a:endParaRPr lang="en-US" sz="1200"/>
+          </a:p>
+          <a:p>
+            <a:pPr marL="0" indent="0">
+              <a:lnSpc>
+                <a:spcPts val="1560"/>
+              </a:lnSpc>
+              <a:spcAft>
+                <a:spcPts val="0"/>
+              </a:spcAft>
+              <a:buNone/>
+            </a:pPr>
+            <a:r>
+              <a:rPr lang="en-US" sz="1200" b="0">
+                <a:solidFill>
+                  <a:srgbClr val="202b33"/>
+                </a:solidFill>
+                <a:latin typeface="Arial"/>
+                <a:ea typeface="Arial"/>
+                <a:cs typeface="Arial"/>
+              </a:rPr>
+              <a:t xml:space="preserve"/>
+            </a:r>
+            <a:endParaRPr lang="en-US" sz="1200"/>
+          </a:p>
+          <a:p>
+            <a:pPr marL="0" indent="0">
+              <a:lnSpc>
+                <a:spcPts val="1560"/>
+              </a:lnSpc>
+              <a:spcAft>
+                <a:spcPts val="0"/>
+              </a:spcAft>
+              <a:buNone/>
+            </a:pPr>
+            <a:r>
+              <a:rPr lang="en-US" sz="1200" b="0">
+                <a:solidFill>
+                  <a:srgbClr val="202b33"/>
+                </a:solidFill>
+                <a:latin typeface="Arial"/>
+                <a:ea typeface="Arial"/>
+                <a:cs typeface="Arial"/>
+              </a:rPr>
+              <a:t xml:space="preserve">The channel is not spoken for.</a:t>
+            </a:r>
+            <a:endParaRPr lang="en-US" sz="1200"/>
+          </a:p>
+          <a:p>
+            <a:pPr marL="0" indent="0">
+              <a:lnSpc>
+                <a:spcPts val="1560"/>
+              </a:lnSpc>
+              <a:spcAft>
+                <a:spcPts val="0"/>
+              </a:spcAft>
+              <a:buNone/>
+            </a:pPr>
+            <a:r>
+              <a:rPr lang="en-US" sz="1200" b="0">
+                <a:solidFill>
+                  <a:srgbClr val="202b33"/>
+                </a:solidFill>
+                <a:latin typeface="Arial"/>
+                <a:ea typeface="Arial"/>
+                <a:cs typeface="Arial"/>
+              </a:rPr>
+              <a:t xml:space="preserve"/>
+            </a:r>
+            <a:endParaRPr lang="en-US" sz="1200"/>
+          </a:p>
+          <a:p>
+            <a:pPr marL="0" indent="0">
+              <a:lnSpc>
+                <a:spcPts val="1560"/>
+              </a:lnSpc>
+              <a:spcAft>
+                <a:spcPts val="0"/>
+              </a:spcAft>
+              <a:buNone/>
+            </a:pPr>
+            <a:r>
+              <a:rPr lang="en-US" sz="1200" b="0">
+                <a:solidFill>
+                  <a:srgbClr val="202b33"/>
+                </a:solidFill>
+                <a:latin typeface="Arial"/>
+                <a:ea typeface="Arial"/>
+                <a:cs typeface="Arial"/>
+              </a:rPr>
+              <a:t xml:space="preserve">Second prediction, and this one is less comfortable. AI does not magically make software work. Well-understood software still gets harder to operate as the world moves under it: you outgrow a performance envelope, you accumulate features, somebody deprecates your dependency. Generation makes the first version cheap. It does not make the tenth year cheap.</a:t>
+            </a:r>
+            <a:endParaRPr lang="en-US" sz="1200"/>
+          </a:p>
+          <a:p>
+            <a:pPr marL="0" indent="0">
+              <a:lnSpc>
+                <a:spcPts val="1560"/>
+              </a:lnSpc>
+              <a:spcAft>
+                <a:spcPts val="0"/>
+              </a:spcAft>
+              <a:buNone/>
+            </a:pPr>
+            <a:r>
+              <a:rPr lang="en-US" sz="1200" b="0">
+                <a:solidFill>
+                  <a:srgbClr val="202b33"/>
+                </a:solidFill>
+                <a:latin typeface="Arial"/>
+                <a:ea typeface="Arial"/>
+                <a:cs typeface="Arial"/>
+              </a:rPr>
+              <a:t xml:space="preserve"/>
+            </a:r>
+            <a:endParaRPr lang="en-US" sz="1200"/>
+          </a:p>
+          <a:p>
+            <a:pPr marL="0" indent="0">
+              <a:lnSpc>
+                <a:spcPts val="1560"/>
+              </a:lnSpc>
+              <a:spcAft>
+                <a:spcPts val="0"/>
+              </a:spcAft>
+              <a:buNone/>
+            </a:pPr>
+            <a:r>
+              <a:rPr lang="en-US" sz="1200" b="0">
+                <a:solidFill>
+                  <a:srgbClr val="202b33"/>
+                </a:solidFill>
+                <a:latin typeface="Arial"/>
+                <a:ea typeface="Arial"/>
+                <a:cs typeface="Arial"/>
+              </a:rPr>
+              <a:t xml:space="preserve">And throwaway software is a taste most of this room has and most of the world does not. We are early adopters; we are delighted to regenerate a tool rather than maintain it. Normal people are not turned on by the idea of vibe coding their own recipe tracker, never mind a Slack replacement. What they will accept is an interface generated for them, adapting in real time, that they never had to choose from a menu of products.</a:t>
+            </a:r>
+            <a:endParaRPr lang="en-US" sz="1200"/>
+          </a:p>
+          <a:p>
+            <a:pPr marL="0" indent="0">
+              <a:lnSpc>
+                <a:spcPts val="1560"/>
+              </a:lnSpc>
+              <a:spcAft>
+                <a:spcPts val="0"/>
+              </a:spcAft>
+              <a:buNone/>
+            </a:pPr>
+            <a:r>
+              <a:rPr lang="en-US" sz="1200" b="0">
+                <a:solidFill>
+                  <a:srgbClr val="202b33"/>
+                </a:solidFill>
+                <a:latin typeface="Arial"/>
+                <a:ea typeface="Arial"/>
+                <a:cs typeface="Arial"/>
+              </a:rPr>
+              <a:t xml:space="preserve"/>
+            </a:r>
+            <a:endParaRPr lang="en-US" sz="1200"/>
+          </a:p>
+          <a:p>
+            <a:pPr marL="0" indent="0">
+              <a:lnSpc>
+                <a:spcPts val="1560"/>
+              </a:lnSpc>
+              <a:spcAft>
+                <a:spcPts val="0"/>
+              </a:spcAft>
+              <a:buNone/>
+            </a:pPr>
+            <a:r>
+              <a:rPr lang="en-US" sz="1200" b="0">
+                <a:solidFill>
+                  <a:srgbClr val="202b33"/>
+                </a:solidFill>
+                <a:latin typeface="Arial"/>
+                <a:ea typeface="Arial"/>
+                <a:cs typeface="Arial"/>
+              </a:rPr>
+              <a:t xml:space="preserve">Which raises the question this room should actually be arguing about. Should OpenAI and Anthropic end up owning every software channel? Watch what happens when the assistants ship real-time collaboration: who spends less time in email, Slack and Google Docs then? I can already make and edit images and video in ways that make me less likely to open Photoshop or DaVinci. If I need a jingle for the company, I ask Suno and it is done. So is everything you spent a lifetime learning, mastering and fighting with about to be irrelevant? Yes. At least as you know it.</a:t>
+            </a:r>
+            <a:endParaRPr lang="en-US" sz="1200"/>
+          </a:p>
+          <a:p>
+            <a:pPr marL="0" indent="0">
+              <a:lnSpc>
+                <a:spcPts val="1560"/>
+              </a:lnSpc>
+              <a:spcAft>
+                <a:spcPts val="0"/>
+              </a:spcAft>
+              <a:buNone/>
+            </a:pPr>
+            <a:r>
+              <a:rPr lang="en-US" sz="1200" b="0">
+                <a:solidFill>
+                  <a:srgbClr val="202b33"/>
+                </a:solidFill>
+                <a:latin typeface="Arial"/>
+                <a:ea typeface="Arial"/>
+                <a:cs typeface="Arial"/>
+              </a:rPr>
+              <a:t xml:space="preserve"/>
+            </a:r>
+            <a:endParaRPr lang="en-US" sz="1200"/>
+          </a:p>
+          <a:p>
+            <a:pPr marL="0" indent="0">
+              <a:lnSpc>
+                <a:spcPts val="1560"/>
+              </a:lnSpc>
+              <a:spcAft>
+                <a:spcPts val="0"/>
+              </a:spcAft>
+              <a:buNone/>
+            </a:pPr>
+            <a:r>
+              <a:rPr lang="en-US" sz="1200" b="0">
+                <a:solidFill>
+                  <a:srgbClr val="202b33"/>
+                </a:solidFill>
+                <a:latin typeface="Arial"/>
+                <a:ea typeface="Arial"/>
+                <a:cs typeface="Arial"/>
+              </a:rPr>
+              <a:t xml:space="preserve">What replaces it looks less like a grid of apps and more like Minority Report, with a surprise revival of the terminal. Which is a Matrix ending when you think about it. Thanks, AI. Skynet is not so bad if I get to keep my CLIs.</a:t>
+            </a:r>
+            <a:endParaRPr lang="en-US" sz="1200"/>
+          </a:p>
+          <a:p>
+            <a:pPr marL="0" indent="0">
+              <a:lnSpc>
+                <a:spcPts val="1560"/>
+              </a:lnSpc>
+              <a:spcAft>
+                <a:spcPts val="0"/>
+              </a:spcAft>
+              <a:buNone/>
+            </a:pPr>
+            <a:r>
+              <a:rPr lang="en-US" sz="1200" b="0">
+                <a:solidFill>
+                  <a:srgbClr val="202b33"/>
+                </a:solidFill>
+                <a:latin typeface="Arial"/>
+                <a:ea typeface="Arial"/>
+                <a:cs typeface="Arial"/>
+              </a:rPr>
+              <a:t xml:space="preserve"/>
+            </a:r>
+            <a:endParaRPr lang="en-US" sz="1200"/>
+          </a:p>
+          <a:p>
+            <a:pPr marL="0" indent="0">
+              <a:lnSpc>
+                <a:spcPts val="1560"/>
+              </a:lnSpc>
+              <a:spcAft>
+                <a:spcPts val="0"/>
+              </a:spcAft>
+              <a:buNone/>
+            </a:pPr>
+            <a:r>
+              <a:rPr lang="en-US" sz="1200" b="0">
+                <a:solidFill>
+                  <a:srgbClr val="202b33"/>
+                </a:solidFill>
+                <a:latin typeface="Arial"/>
+                <a:ea typeface="Arial"/>
+                <a:cs typeface="Arial"/>
+              </a:rPr>
+              <a:t xml:space="preserve">Here is the part I want you to leave with. That future is not spoken for. GPT image being pretty good does not mean the story of image creation belongs to the big players, and the same is true in whichever industry you work in. Those of us who do not work at a frontier lab, the organic agents in the room, get to rethink any and every app as an AI-native system from the boundary up. That is this whole talk one level higher: do not photocopy today's product categories onto tomorrow's substrate either.</a:t>
+            </a:r>
+            <a:endParaRPr lang="en-US" sz="1200"/>
+          </a:p>
+          <a:p>
+            <a:pPr marL="0" indent="0">
+              <a:lnSpc>
+                <a:spcPts val="1560"/>
+              </a:lnSpc>
+              <a:spcAft>
+                <a:spcPts val="0"/>
+              </a:spcAft>
+              <a:buNone/>
+            </a:pPr>
+            <a:r>
+              <a:rPr lang="en-US" sz="1200" b="0">
+                <a:solidFill>
+                  <a:srgbClr val="202b33"/>
+                </a:solidFill>
+                <a:latin typeface="Arial"/>
+                <a:ea typeface="Arial"/>
+                <a:cs typeface="Arial"/>
+              </a:rPr>
+              <a:t xml:space="preserve"/>
+            </a:r>
+            <a:endParaRPr lang="en-US" sz="1200"/>
+          </a:p>
+          <a:p>
+            <a:pPr marL="0" indent="0">
+              <a:lnSpc>
+                <a:spcPts val="1560"/>
+              </a:lnSpc>
+              <a:spcAft>
+                <a:spcPts val="0"/>
+              </a:spcAft>
+              <a:buNone/>
+            </a:pPr>
+            <a:r>
+              <a:rPr lang="en-US" sz="1200" b="0">
+                <a:solidFill>
+                  <a:srgbClr val="202b33"/>
+                </a:solidFill>
+                <a:latin typeface="Arial"/>
+                <a:ea typeface="Arial"/>
+                <a:cs typeface="Arial"/>
+              </a:rPr>
+              <a:t xml:space="preserve"/>
+            </a:r>
+            <a:endParaRPr lang="en-US" sz="1200"/>
+          </a:p>
+          <a:p>
+            <a:pPr marL="0" indent="0">
+              <a:lnSpc>
+                <a:spcPts val="1560"/>
+              </a:lnSpc>
+              <a:spcAft>
+                <a:spcPts val="0"/>
+              </a:spcAft>
+              <a:buNone/>
+            </a:pPr>
+            <a:r>
+              <a:rPr lang="en-US" sz="1200" b="0">
+                <a:solidFill>
+                  <a:srgbClr val="202b33"/>
+                </a:solidFill>
+                <a:latin typeface="Arial"/>
+                <a:ea typeface="Arial"/>
+                <a:cs typeface="Arial"/>
+              </a:rPr>
+              <a:t xml:space="preserve"/>
+            </a:r>
+            <a:endParaRPr lang="en-US" sz="1200"/>
+          </a:p>
+          <a:p>
+            <a:pPr marL="0" indent="0">
+              <a:lnSpc>
+                <a:spcPts val="1560"/>
+              </a:lnSpc>
+              <a:spcAft>
+                <a:spcPts val="0"/>
+              </a:spcAft>
+              <a:buNone/>
+            </a:pPr>
+            <a:r>
+              <a:rPr lang="en-US" sz="1200" b="0">
+                <a:solidFill>
+                  <a:srgbClr val="202b33"/>
+                </a:solidFill>
+                <a:latin typeface="Arial"/>
+                <a:ea typeface="Arial"/>
+                <a:cs typeface="Arial"/>
+              </a:rPr>
+              <a:t xml:space="preserve">Ask which product they use daily that would not survive somebody else rebuilding it AI-native. Take one answer. Do not resolve it.</a:t>
             </a:r>
             <a:endParaRPr lang="en-US" sz="1200"/>
           </a:p>
@@ -1753,6 +1847,1152 @@
                 <a:ea typeface="Arial"/>
                 <a:cs typeface="Arial"/>
               </a:rPr>
+              <a:t xml:space="preserve">The Future of Product Engineering: Break the Mirror on Purpose</a:t>
+            </a:r>
+            <a:endParaRPr lang="en-US" sz="1200"/>
+          </a:p>
+          <a:p>
+            <a:pPr marL="0" indent="0">
+              <a:lnSpc>
+                <a:spcPts val="1560"/>
+              </a:lnSpc>
+              <a:spcAft>
+                <a:spcPts val="0"/>
+              </a:spcAft>
+              <a:buNone/>
+            </a:pPr>
+            <a:r>
+              <a:rPr lang="en-US" sz="1200" b="0">
+                <a:solidFill>
+                  <a:srgbClr val="202b33"/>
+                </a:solidFill>
+                <a:latin typeface="Arial"/>
+                <a:ea typeface="Arial"/>
+                <a:cs typeface="Arial"/>
+              </a:rPr>
+              <a:t xml:space="preserve"/>
+            </a:r>
+            <a:endParaRPr lang="en-US" sz="1200"/>
+          </a:p>
+          <a:p>
+            <a:pPr marL="0" indent="0">
+              <a:lnSpc>
+                <a:spcPts val="1560"/>
+              </a:lnSpc>
+              <a:spcAft>
+                <a:spcPts val="0"/>
+              </a:spcAft>
+              <a:buNone/>
+            </a:pPr>
+            <a:r>
+              <a:rPr lang="en-US" sz="1200" b="0">
+                <a:solidFill>
+                  <a:srgbClr val="202b33"/>
+                </a:solidFill>
+                <a:latin typeface="Arial"/>
+                <a:ea typeface="Arial"/>
+                <a:cs typeface="Arial"/>
+              </a:rPr>
+              <a:t xml:space="preserve">Source slide 15. 23:30 to 26:30</a:t>
+            </a:r>
+            <a:endParaRPr lang="en-US" sz="1200"/>
+          </a:p>
+          <a:p>
+            <a:pPr marL="0" indent="0">
+              <a:lnSpc>
+                <a:spcPts val="1560"/>
+              </a:lnSpc>
+              <a:spcAft>
+                <a:spcPts val="0"/>
+              </a:spcAft>
+              <a:buNone/>
+            </a:pPr>
+            <a:r>
+              <a:rPr lang="en-US" sz="1200" b="0">
+                <a:solidFill>
+                  <a:srgbClr val="202b33"/>
+                </a:solidFill>
+                <a:latin typeface="Arial"/>
+                <a:ea typeface="Arial"/>
+                <a:cs typeface="Arial"/>
+              </a:rPr>
+              <a:t xml:space="preserve"/>
+            </a:r>
+            <a:endParaRPr lang="en-US" sz="1200"/>
+          </a:p>
+          <a:p>
+            <a:pPr marL="0" indent="0">
+              <a:lnSpc>
+                <a:spcPts val="1560"/>
+              </a:lnSpc>
+              <a:spcAft>
+                <a:spcPts val="0"/>
+              </a:spcAft>
+              <a:buNone/>
+            </a:pPr>
+            <a:r>
+              <a:rPr lang="en-US" sz="1200" b="0">
+                <a:solidFill>
+                  <a:srgbClr val="202b33"/>
+                </a:solidFill>
+                <a:latin typeface="Arial"/>
+                <a:ea typeface="Arial"/>
+                <a:cs typeface="Arial"/>
+              </a:rPr>
+              <a:t xml:space="preserve">Generated UI, adapting in real time, per person</a:t>
+            </a:r>
+            <a:endParaRPr lang="en-US" sz="1200"/>
+          </a:p>
+          <a:p>
+            <a:pPr marL="0" indent="0">
+              <a:lnSpc>
+                <a:spcPts val="1560"/>
+              </a:lnSpc>
+              <a:spcAft>
+                <a:spcPts val="0"/>
+              </a:spcAft>
+              <a:buNone/>
+            </a:pPr>
+            <a:r>
+              <a:rPr lang="en-US" sz="1200" b="0">
+                <a:solidFill>
+                  <a:srgbClr val="202b33"/>
+                </a:solidFill>
+                <a:latin typeface="Arial"/>
+                <a:ea typeface="Arial"/>
+                <a:cs typeface="Arial"/>
+              </a:rPr>
+              <a:t xml:space="preserve"/>
+            </a:r>
+            <a:endParaRPr lang="en-US" sz="1200"/>
+          </a:p>
+          <a:p>
+            <a:pPr marL="0" indent="0">
+              <a:lnSpc>
+                <a:spcPts val="1560"/>
+              </a:lnSpc>
+              <a:spcAft>
+                <a:spcPts val="0"/>
+              </a:spcAft>
+              <a:buNone/>
+            </a:pPr>
+            <a:r>
+              <a:rPr lang="en-US" sz="1200" b="0">
+                <a:solidFill>
+                  <a:srgbClr val="202b33"/>
+                </a:solidFill>
+                <a:latin typeface="Arial"/>
+                <a:ea typeface="Arial"/>
+                <a:cs typeface="Arial"/>
+              </a:rPr>
+              <a:t xml:space="preserve">Yes, the software you mastered is going away. As you know it.</a:t>
+            </a:r>
+            <a:endParaRPr lang="en-US" sz="1200"/>
+          </a:p>
+          <a:p>
+            <a:pPr marL="0" indent="0">
+              <a:lnSpc>
+                <a:spcPts val="1560"/>
+              </a:lnSpc>
+              <a:spcAft>
+                <a:spcPts val="0"/>
+              </a:spcAft>
+              <a:buNone/>
+            </a:pPr>
+            <a:r>
+              <a:rPr lang="en-US" sz="1200" b="0">
+                <a:solidFill>
+                  <a:srgbClr val="202b33"/>
+                </a:solidFill>
+                <a:latin typeface="Arial"/>
+                <a:ea typeface="Arial"/>
+                <a:cs typeface="Arial"/>
+              </a:rPr>
+              <a:t xml:space="preserve"/>
+            </a:r>
+            <a:endParaRPr lang="en-US" sz="1200"/>
+          </a:p>
+          <a:p>
+            <a:pPr marL="0" indent="0">
+              <a:lnSpc>
+                <a:spcPts val="1560"/>
+              </a:lnSpc>
+              <a:spcAft>
+                <a:spcPts val="0"/>
+              </a:spcAft>
+              <a:buNone/>
+            </a:pPr>
+            <a:r>
+              <a:rPr lang="en-US" sz="1200" b="0">
+                <a:solidFill>
+                  <a:srgbClr val="202b33"/>
+                </a:solidFill>
+                <a:latin typeface="Arial"/>
+                <a:ea typeface="Arial"/>
+                <a:cs typeface="Arial"/>
+              </a:rPr>
+              <a:t xml:space="preserve">The channel is not spoken for.</a:t>
+            </a:r>
+            <a:endParaRPr lang="en-US" sz="1200"/>
+          </a:p>
+          <a:p>
+            <a:pPr marL="0" indent="0">
+              <a:lnSpc>
+                <a:spcPts val="1560"/>
+              </a:lnSpc>
+              <a:spcAft>
+                <a:spcPts val="0"/>
+              </a:spcAft>
+              <a:buNone/>
+            </a:pPr>
+            <a:r>
+              <a:rPr lang="en-US" sz="1200" b="0">
+                <a:solidFill>
+                  <a:srgbClr val="202b33"/>
+                </a:solidFill>
+                <a:latin typeface="Arial"/>
+                <a:ea typeface="Arial"/>
+                <a:cs typeface="Arial"/>
+              </a:rPr>
+              <a:t xml:space="preserve"/>
+            </a:r>
+            <a:endParaRPr lang="en-US" sz="1200"/>
+          </a:p>
+          <a:p>
+            <a:pPr marL="0" indent="0">
+              <a:lnSpc>
+                <a:spcPts val="1560"/>
+              </a:lnSpc>
+              <a:spcAft>
+                <a:spcPts val="0"/>
+              </a:spcAft>
+              <a:buNone/>
+            </a:pPr>
+            <a:r>
+              <a:rPr lang="en-US" sz="1200" b="0">
+                <a:solidFill>
+                  <a:srgbClr val="202b33"/>
+                </a:solidFill>
+                <a:latin typeface="Arial"/>
+                <a:ea typeface="Arial"/>
+                <a:cs typeface="Arial"/>
+              </a:rPr>
+              <a:t xml:space="preserve">Second prediction, and this one is less comfortable. AI does not magically make software work. Well-understood software still gets harder to operate as the world moves under it: you outgrow a performance envelope, you accumulate features, somebody deprecates your dependency. Generation makes the first version cheap. It does not make the tenth year cheap.</a:t>
+            </a:r>
+            <a:endParaRPr lang="en-US" sz="1200"/>
+          </a:p>
+          <a:p>
+            <a:pPr marL="0" indent="0">
+              <a:lnSpc>
+                <a:spcPts val="1560"/>
+              </a:lnSpc>
+              <a:spcAft>
+                <a:spcPts val="0"/>
+              </a:spcAft>
+              <a:buNone/>
+            </a:pPr>
+            <a:r>
+              <a:rPr lang="en-US" sz="1200" b="0">
+                <a:solidFill>
+                  <a:srgbClr val="202b33"/>
+                </a:solidFill>
+                <a:latin typeface="Arial"/>
+                <a:ea typeface="Arial"/>
+                <a:cs typeface="Arial"/>
+              </a:rPr>
+              <a:t xml:space="preserve"/>
+            </a:r>
+            <a:endParaRPr lang="en-US" sz="1200"/>
+          </a:p>
+          <a:p>
+            <a:pPr marL="0" indent="0">
+              <a:lnSpc>
+                <a:spcPts val="1560"/>
+              </a:lnSpc>
+              <a:spcAft>
+                <a:spcPts val="0"/>
+              </a:spcAft>
+              <a:buNone/>
+            </a:pPr>
+            <a:r>
+              <a:rPr lang="en-US" sz="1200" b="0">
+                <a:solidFill>
+                  <a:srgbClr val="202b33"/>
+                </a:solidFill>
+                <a:latin typeface="Arial"/>
+                <a:ea typeface="Arial"/>
+                <a:cs typeface="Arial"/>
+              </a:rPr>
+              <a:t xml:space="preserve">And throwaway software is a taste most of this room has and most of the world does not. We are early adopters; we are delighted to regenerate a tool rather than maintain it. Normal people are not turned on by the idea of vibe coding their own recipe tracker, never mind a Slack replacement. What they will accept is an interface generated for them, adapting in real time, that they never had to choose from a menu of products.</a:t>
+            </a:r>
+            <a:endParaRPr lang="en-US" sz="1200"/>
+          </a:p>
+          <a:p>
+            <a:pPr marL="0" indent="0">
+              <a:lnSpc>
+                <a:spcPts val="1560"/>
+              </a:lnSpc>
+              <a:spcAft>
+                <a:spcPts val="0"/>
+              </a:spcAft>
+              <a:buNone/>
+            </a:pPr>
+            <a:r>
+              <a:rPr lang="en-US" sz="1200" b="0">
+                <a:solidFill>
+                  <a:srgbClr val="202b33"/>
+                </a:solidFill>
+                <a:latin typeface="Arial"/>
+                <a:ea typeface="Arial"/>
+                <a:cs typeface="Arial"/>
+              </a:rPr>
+              <a:t xml:space="preserve"/>
+            </a:r>
+            <a:endParaRPr lang="en-US" sz="1200"/>
+          </a:p>
+          <a:p>
+            <a:pPr marL="0" indent="0">
+              <a:lnSpc>
+                <a:spcPts val="1560"/>
+              </a:lnSpc>
+              <a:spcAft>
+                <a:spcPts val="0"/>
+              </a:spcAft>
+              <a:buNone/>
+            </a:pPr>
+            <a:r>
+              <a:rPr lang="en-US" sz="1200" b="0">
+                <a:solidFill>
+                  <a:srgbClr val="202b33"/>
+                </a:solidFill>
+                <a:latin typeface="Arial"/>
+                <a:ea typeface="Arial"/>
+                <a:cs typeface="Arial"/>
+              </a:rPr>
+              <a:t xml:space="preserve">Which raises the question this room should actually be arguing about. Should OpenAI and Anthropic end up owning every software channel? Watch what happens when the assistants ship real-time collaboration: who spends less time in email, Slack and Google Docs then? I can already make and edit images and video in ways that make me less likely to open Photoshop or DaVinci. If I need a jingle for the company, I ask Suno and it is done. So is everything you spent a lifetime learning, mastering and fighting with about to be irrelevant? Yes. At least as you know it.</a:t>
+            </a:r>
+            <a:endParaRPr lang="en-US" sz="1200"/>
+          </a:p>
+          <a:p>
+            <a:pPr marL="0" indent="0">
+              <a:lnSpc>
+                <a:spcPts val="1560"/>
+              </a:lnSpc>
+              <a:spcAft>
+                <a:spcPts val="0"/>
+              </a:spcAft>
+              <a:buNone/>
+            </a:pPr>
+            <a:r>
+              <a:rPr lang="en-US" sz="1200" b="0">
+                <a:solidFill>
+                  <a:srgbClr val="202b33"/>
+                </a:solidFill>
+                <a:latin typeface="Arial"/>
+                <a:ea typeface="Arial"/>
+                <a:cs typeface="Arial"/>
+              </a:rPr>
+              <a:t xml:space="preserve"/>
+            </a:r>
+            <a:endParaRPr lang="en-US" sz="1200"/>
+          </a:p>
+          <a:p>
+            <a:pPr marL="0" indent="0">
+              <a:lnSpc>
+                <a:spcPts val="1560"/>
+              </a:lnSpc>
+              <a:spcAft>
+                <a:spcPts val="0"/>
+              </a:spcAft>
+              <a:buNone/>
+            </a:pPr>
+            <a:r>
+              <a:rPr lang="en-US" sz="1200" b="0">
+                <a:solidFill>
+                  <a:srgbClr val="202b33"/>
+                </a:solidFill>
+                <a:latin typeface="Arial"/>
+                <a:ea typeface="Arial"/>
+                <a:cs typeface="Arial"/>
+              </a:rPr>
+              <a:t xml:space="preserve">What replaces it looks less like a grid of apps and more like Minority Report, with a surprise revival of the terminal. Which is a Matrix ending when you think about it. Thanks, AI. Skynet is not so bad if I get to keep my CLIs.</a:t>
+            </a:r>
+            <a:endParaRPr lang="en-US" sz="1200"/>
+          </a:p>
+          <a:p>
+            <a:pPr marL="0" indent="0">
+              <a:lnSpc>
+                <a:spcPts val="1560"/>
+              </a:lnSpc>
+              <a:spcAft>
+                <a:spcPts val="0"/>
+              </a:spcAft>
+              <a:buNone/>
+            </a:pPr>
+            <a:r>
+              <a:rPr lang="en-US" sz="1200" b="0">
+                <a:solidFill>
+                  <a:srgbClr val="202b33"/>
+                </a:solidFill>
+                <a:latin typeface="Arial"/>
+                <a:ea typeface="Arial"/>
+                <a:cs typeface="Arial"/>
+              </a:rPr>
+              <a:t xml:space="preserve"/>
+            </a:r>
+            <a:endParaRPr lang="en-US" sz="1200"/>
+          </a:p>
+          <a:p>
+            <a:pPr marL="0" indent="0">
+              <a:lnSpc>
+                <a:spcPts val="1560"/>
+              </a:lnSpc>
+              <a:spcAft>
+                <a:spcPts val="0"/>
+              </a:spcAft>
+              <a:buNone/>
+            </a:pPr>
+            <a:r>
+              <a:rPr lang="en-US" sz="1200" b="0">
+                <a:solidFill>
+                  <a:srgbClr val="202b33"/>
+                </a:solidFill>
+                <a:latin typeface="Arial"/>
+                <a:ea typeface="Arial"/>
+                <a:cs typeface="Arial"/>
+              </a:rPr>
+              <a:t xml:space="preserve">Here is the part I want you to leave with. That future is not spoken for. GPT image being pretty good does not mean the story of image creation belongs to the big players, and the same is true in whichever industry you work in. Those of us who do not work at a frontier lab, the organic agents in the room, get to rethink any and every app as an AI-native system from the boundary up. That is this whole talk one level higher: do not photocopy today's product categories onto tomorrow's substrate either.</a:t>
+            </a:r>
+            <a:endParaRPr lang="en-US" sz="1200"/>
+          </a:p>
+          <a:p>
+            <a:pPr marL="0" indent="0">
+              <a:lnSpc>
+                <a:spcPts val="1560"/>
+              </a:lnSpc>
+              <a:spcAft>
+                <a:spcPts val="0"/>
+              </a:spcAft>
+              <a:buNone/>
+            </a:pPr>
+            <a:r>
+              <a:rPr lang="en-US" sz="1200" b="0">
+                <a:solidFill>
+                  <a:srgbClr val="202b33"/>
+                </a:solidFill>
+                <a:latin typeface="Arial"/>
+                <a:ea typeface="Arial"/>
+                <a:cs typeface="Arial"/>
+              </a:rPr>
+              <a:t xml:space="preserve"/>
+            </a:r>
+            <a:endParaRPr lang="en-US" sz="1200"/>
+          </a:p>
+          <a:p>
+            <a:pPr marL="0" indent="0">
+              <a:lnSpc>
+                <a:spcPts val="1560"/>
+              </a:lnSpc>
+              <a:spcAft>
+                <a:spcPts val="0"/>
+              </a:spcAft>
+              <a:buNone/>
+            </a:pPr>
+            <a:r>
+              <a:rPr lang="en-US" sz="1200" b="0">
+                <a:solidFill>
+                  <a:srgbClr val="202b33"/>
+                </a:solidFill>
+                <a:latin typeface="Arial"/>
+                <a:ea typeface="Arial"/>
+                <a:cs typeface="Arial"/>
+              </a:rPr>
+              <a:t xml:space="preserve"/>
+            </a:r>
+            <a:endParaRPr lang="en-US" sz="1200"/>
+          </a:p>
+          <a:p>
+            <a:pPr marL="0" indent="0">
+              <a:lnSpc>
+                <a:spcPts val="1560"/>
+              </a:lnSpc>
+              <a:spcAft>
+                <a:spcPts val="0"/>
+              </a:spcAft>
+              <a:buNone/>
+            </a:pPr>
+            <a:r>
+              <a:rPr lang="en-US" sz="1200" b="0">
+                <a:solidFill>
+                  <a:srgbClr val="202b33"/>
+                </a:solidFill>
+                <a:latin typeface="Arial"/>
+                <a:ea typeface="Arial"/>
+                <a:cs typeface="Arial"/>
+              </a:rPr>
+              <a:t xml:space="preserve"/>
+            </a:r>
+            <a:endParaRPr lang="en-US" sz="1200"/>
+          </a:p>
+          <a:p>
+            <a:pPr marL="0" indent="0">
+              <a:lnSpc>
+                <a:spcPts val="1560"/>
+              </a:lnSpc>
+              <a:spcAft>
+                <a:spcPts val="0"/>
+              </a:spcAft>
+              <a:buNone/>
+            </a:pPr>
+            <a:r>
+              <a:rPr lang="en-US" sz="1200" b="0">
+                <a:solidFill>
+                  <a:srgbClr val="202b33"/>
+                </a:solidFill>
+                <a:latin typeface="Arial"/>
+                <a:ea typeface="Arial"/>
+                <a:cs typeface="Arial"/>
+              </a:rPr>
+              <a:t xml:space="preserve">Ask which product they use daily that would not survive somebody else rebuilding it AI-native. Take one answer. Do not resolve it.</a:t>
+            </a:r>
+            <a:endParaRPr lang="en-US" sz="1200"/>
+          </a:p>
+          <a:p>
+            <a:pPr marL="0" indent="0">
+              <a:lnSpc>
+                <a:spcPts val="1560"/>
+              </a:lnSpc>
+              <a:spcAft>
+                <a:spcPts val="0"/>
+              </a:spcAft>
+              <a:buNone/>
+            </a:pPr>
+            <a:r>
+              <a:rPr lang="en-US" sz="1200" b="0">
+                <a:solidFill>
+                  <a:srgbClr val="202b33"/>
+                </a:solidFill>
+                <a:latin typeface="Arial"/>
+                <a:ea typeface="Arial"/>
+                <a:cs typeface="Arial"/>
+              </a:rPr>
+              <a:t xml:space="preserve"/>
+            </a:r>
+            <a:endParaRPr lang="en-US" sz="1200"/>
+          </a:p>
+          <a:p>
+            <a:pPr marL="0" indent="0">
+              <a:lnSpc>
+                <a:spcPts val="1560"/>
+              </a:lnSpc>
+              <a:spcAft>
+                <a:spcPts val="0"/>
+              </a:spcAft>
+              <a:buNone/>
+            </a:pPr>
+            <a:r>
+              <a:rPr lang="en-US" sz="1200" b="0">
+                <a:solidFill>
+                  <a:srgbClr val="202b33"/>
+                </a:solidFill>
+                <a:latin typeface="Arial"/>
+                <a:ea typeface="Arial"/>
+                <a:cs typeface="Arial"/>
+              </a:rPr>
+              <a:t xml:space="preserve"/>
+            </a:r>
+            <a:endParaRPr lang="en-US" sz="1200"/>
+          </a:p>
+        </p:txBody>
+      </p:sp>
+    </p:spTree>
+  </p:cSld>
+  <p:clrMapOvr>
+    <a:masterClrMapping/>
+  </p:clrMapOvr>
+</p:notes>
+</file>
+
+<file path=ppt/notesSlides/notesSlide14.xml><?xml version="1.0" encoding="utf-8"?>
+<p:notes xmlns:a="http://schemas.openxmlformats.org/drawingml/2006/main" xmlns:r="http://schemas.openxmlformats.org/officeDocument/2006/relationships" xmlns:p="http://schemas.openxmlformats.org/presentationml/2006/main">
+  <p:cSld>
+    <p:spTree>
+      <p:nvGrpSpPr>
+        <p:cNvPr id="1" name=""/>
+        <p:cNvGrpSpPr/>
+        <p:nvPr/>
+      </p:nvGrpSpPr>
+      <p:grpSpPr>
+        <a:xfrm>
+          <a:off x="0" y="0"/>
+          <a:ext cx="0" cy="0"/>
+          <a:chOff x="0" y="0"/>
+          <a:chExt cx="0" cy="0"/>
+        </a:xfrm>
+      </p:grpSpPr>
+      <p:sp>
+        <p:nvSpPr>
+          <p:cNvPr id="2" name="Presenter notes"/>
+          <p:cNvSpPr txBox="1"/>
+          <p:nvPr>
+            <p:ph type="body" idx="1"/>
+          </p:nvPr>
+        </p:nvSpPr>
+        <p:spPr>
+          <a:xfrm>
+            <a:off x="457200" y="1428750"/>
+            <a:ext cx="5715000" cy="6667500"/>
+          </a:xfrm>
+        </p:spPr>
+        <p:txBody>
+          <a:bodyPr/>
+          <a:lstStyle/>
+          <a:p>
+            <a:pPr marL="0" indent="0">
+              <a:lnSpc>
+                <a:spcPts val="1560"/>
+              </a:lnSpc>
+              <a:spcAft>
+                <a:spcPts val="0"/>
+              </a:spcAft>
+              <a:buNone/>
+            </a:pPr>
+            <a:r>
+              <a:rPr lang="en-US" sz="1200" b="0">
+                <a:solidFill>
+                  <a:srgbClr val="202b33"/>
+                </a:solidFill>
+                <a:latin typeface="Arial"/>
+                <a:ea typeface="Arial"/>
+                <a:cs typeface="Arial"/>
+              </a:rPr>
+              <a:t xml:space="preserve">The Future of Product Engineering: Break the Mirror on Purpose</a:t>
+            </a:r>
+            <a:endParaRPr lang="en-US" sz="1200"/>
+          </a:p>
+          <a:p>
+            <a:pPr marL="0" indent="0">
+              <a:lnSpc>
+                <a:spcPts val="1560"/>
+              </a:lnSpc>
+              <a:spcAft>
+                <a:spcPts val="0"/>
+              </a:spcAft>
+              <a:buNone/>
+            </a:pPr>
+            <a:r>
+              <a:rPr lang="en-US" sz="1200" b="0">
+                <a:solidFill>
+                  <a:srgbClr val="202b33"/>
+                </a:solidFill>
+                <a:latin typeface="Arial"/>
+                <a:ea typeface="Arial"/>
+                <a:cs typeface="Arial"/>
+              </a:rPr>
+              <a:t xml:space="preserve"/>
+            </a:r>
+            <a:endParaRPr lang="en-US" sz="1200"/>
+          </a:p>
+          <a:p>
+            <a:pPr marL="0" indent="0">
+              <a:lnSpc>
+                <a:spcPts val="1560"/>
+              </a:lnSpc>
+              <a:spcAft>
+                <a:spcPts val="0"/>
+              </a:spcAft>
+              <a:buNone/>
+            </a:pPr>
+            <a:r>
+              <a:rPr lang="en-US" sz="1200" b="0">
+                <a:solidFill>
+                  <a:srgbClr val="202b33"/>
+                </a:solidFill>
+                <a:latin typeface="Arial"/>
+                <a:ea typeface="Arial"/>
+                <a:cs typeface="Arial"/>
+              </a:rPr>
+              <a:t xml:space="preserve">Source slide 17. 26:30 to 30:00</a:t>
+            </a:r>
+            <a:endParaRPr lang="en-US" sz="1200"/>
+          </a:p>
+          <a:p>
+            <a:pPr marL="0" indent="0">
+              <a:lnSpc>
+                <a:spcPts val="1560"/>
+              </a:lnSpc>
+              <a:spcAft>
+                <a:spcPts val="0"/>
+              </a:spcAft>
+              <a:buNone/>
+            </a:pPr>
+            <a:r>
+              <a:rPr lang="en-US" sz="1200" b="0">
+                <a:solidFill>
+                  <a:srgbClr val="202b33"/>
+                </a:solidFill>
+                <a:latin typeface="Arial"/>
+                <a:ea typeface="Arial"/>
+                <a:cs typeface="Arial"/>
+              </a:rPr>
+              <a:t xml:space="preserve"/>
+            </a:r>
+            <a:endParaRPr lang="en-US" sz="1200"/>
+          </a:p>
+          <a:p>
+            <a:pPr marL="0" indent="0">
+              <a:lnSpc>
+                <a:spcPts val="1560"/>
+              </a:lnSpc>
+              <a:spcAft>
+                <a:spcPts val="0"/>
+              </a:spcAft>
+              <a:buNone/>
+            </a:pPr>
+            <a:r>
+              <a:rPr lang="en-US" sz="1200" b="0">
+                <a:solidFill>
+                  <a:srgbClr val="202b33"/>
+                </a:solidFill>
+                <a:latin typeface="Arial"/>
+                <a:ea typeface="Arial"/>
+                <a:cs typeface="Arial"/>
+              </a:rPr>
+              <a:t xml:space="preserve">Reprice the handoffs. Draw the interfaces.</a:t>
+            </a:r>
+            <a:endParaRPr lang="en-US" sz="1200"/>
+          </a:p>
+          <a:p>
+            <a:pPr marL="0" indent="0">
+              <a:lnSpc>
+                <a:spcPts val="1560"/>
+              </a:lnSpc>
+              <a:spcAft>
+                <a:spcPts val="0"/>
+              </a:spcAft>
+              <a:buNone/>
+            </a:pPr>
+            <a:r>
+              <a:rPr lang="en-US" sz="1200" b="0">
+                <a:solidFill>
+                  <a:srgbClr val="202b33"/>
+                </a:solidFill>
+                <a:latin typeface="Arial"/>
+                <a:ea typeface="Arial"/>
+                <a:cs typeface="Arial"/>
+              </a:rPr>
+              <a:t xml:space="preserve"/>
+            </a:r>
+            <a:endParaRPr lang="en-US" sz="1200"/>
+          </a:p>
+          <a:p>
+            <a:pPr marL="0" indent="0">
+              <a:lnSpc>
+                <a:spcPts val="1560"/>
+              </a:lnSpc>
+              <a:spcAft>
+                <a:spcPts val="0"/>
+              </a:spcAft>
+              <a:buNone/>
+            </a:pPr>
+            <a:r>
+              <a:rPr lang="en-US" sz="1200" b="0">
+                <a:solidFill>
+                  <a:srgbClr val="202b33"/>
+                </a:solidFill>
+                <a:latin typeface="Arial"/>
+                <a:ea typeface="Arial"/>
+                <a:cs typeface="Arial"/>
+              </a:rPr>
+              <a:t xml:space="preserve">Automate the right things. Keep the taste.</a:t>
+            </a:r>
+            <a:endParaRPr lang="en-US" sz="1200"/>
+          </a:p>
+          <a:p>
+            <a:pPr marL="0" indent="0">
+              <a:lnSpc>
+                <a:spcPts val="1560"/>
+              </a:lnSpc>
+              <a:spcAft>
+                <a:spcPts val="0"/>
+              </a:spcAft>
+              <a:buNone/>
+            </a:pPr>
+            <a:r>
+              <a:rPr lang="en-US" sz="1200" b="0">
+                <a:solidFill>
+                  <a:srgbClr val="202b33"/>
+                </a:solidFill>
+                <a:latin typeface="Arial"/>
+                <a:ea typeface="Arial"/>
+                <a:cs typeface="Arial"/>
+              </a:rPr>
+              <a:t xml:space="preserve"/>
+            </a:r>
+            <a:endParaRPr lang="en-US" sz="1200"/>
+          </a:p>
+          <a:p>
+            <a:pPr marL="0" indent="0">
+              <a:lnSpc>
+                <a:spcPts val="1560"/>
+              </a:lnSpc>
+              <a:spcAft>
+                <a:spcPts val="0"/>
+              </a:spcAft>
+              <a:buNone/>
+            </a:pPr>
+            <a:r>
+              <a:rPr lang="en-US" sz="1200" b="0">
+                <a:solidFill>
+                  <a:srgbClr val="202b33"/>
+                </a:solidFill>
+                <a:latin typeface="Arial"/>
+                <a:ea typeface="Arial"/>
+                <a:cs typeface="Arial"/>
+              </a:rPr>
+              <a:t xml:space="preserve">Back to the org chart. Some of those boundaries exist because the work really is different. Some exist because the person with the spreadsheet sat in another department. We should know which before teaching agents to repeat them.</a:t>
+            </a:r>
+            <a:endParaRPr lang="en-US" sz="1200"/>
+          </a:p>
+          <a:p>
+            <a:pPr marL="0" indent="0">
+              <a:lnSpc>
+                <a:spcPts val="1560"/>
+              </a:lnSpc>
+              <a:spcAft>
+                <a:spcPts val="0"/>
+              </a:spcAft>
+              <a:buNone/>
+            </a:pPr>
+            <a:r>
+              <a:rPr lang="en-US" sz="1200" b="0">
+                <a:solidFill>
+                  <a:srgbClr val="202b33"/>
+                </a:solidFill>
+                <a:latin typeface="Arial"/>
+                <a:ea typeface="Arial"/>
+                <a:cs typeface="Arial"/>
+              </a:rPr>
+              <a:t xml:space="preserve"/>
+            </a:r>
+            <a:endParaRPr lang="en-US" sz="1200"/>
+          </a:p>
+          <a:p>
+            <a:pPr marL="0" indent="0">
+              <a:lnSpc>
+                <a:spcPts val="1560"/>
+              </a:lnSpc>
+              <a:spcAft>
+                <a:spcPts val="0"/>
+              </a:spcAft>
+              <a:buNone/>
+            </a:pPr>
+            <a:r>
+              <a:rPr lang="en-US" sz="1200" b="0">
+                <a:solidFill>
+                  <a:srgbClr val="202b33"/>
+                </a:solidFill>
+                <a:latin typeface="Arial"/>
+                <a:ea typeface="Arial"/>
+                <a:cs typeface="Arial"/>
+              </a:rPr>
+              <a:t xml:space="preserve">Take one boundary. What arrives, what leaves, who decides, and what did it cost last week? Make collection cheaper without erasing the disagreement the handoff used to expose. Keep the product review where the evidence conflicts, and give the decision a durable artifact so the next agent does not have to guess.</a:t>
+            </a:r>
+            <a:endParaRPr lang="en-US" sz="1200"/>
+          </a:p>
+          <a:p>
+            <a:pPr marL="0" indent="0">
+              <a:lnSpc>
+                <a:spcPts val="1560"/>
+              </a:lnSpc>
+              <a:spcAft>
+                <a:spcPts val="0"/>
+              </a:spcAft>
+              <a:buNone/>
+            </a:pPr>
+            <a:r>
+              <a:rPr lang="en-US" sz="1200" b="0">
+                <a:solidFill>
+                  <a:srgbClr val="202b33"/>
+                </a:solidFill>
+                <a:latin typeface="Arial"/>
+                <a:ea typeface="Arial"/>
+                <a:cs typeface="Arial"/>
+              </a:rPr>
+              <a:t xml:space="preserve"/>
+            </a:r>
+            <a:endParaRPr lang="en-US" sz="1200"/>
+          </a:p>
+          <a:p>
+            <a:pPr marL="0" indent="0">
+              <a:lnSpc>
+                <a:spcPts val="1560"/>
+              </a:lnSpc>
+              <a:spcAft>
+                <a:spcPts val="0"/>
+              </a:spcAft>
+              <a:buNone/>
+            </a:pPr>
+            <a:r>
+              <a:rPr lang="en-US" sz="1200" b="0">
+                <a:solidFill>
+                  <a:srgbClr val="202b33"/>
+                </a:solidFill>
+                <a:latin typeface="Arial"/>
+                <a:ea typeface="Arial"/>
+                <a:cs typeface="Arial"/>
+              </a:rPr>
+              <a:t xml:space="preserve">Then price ownership, and price the fuel. Six agents do not become free because one person has their names in a config file, and neither does the burn that keeps them running. Put permission before customer consequences.</a:t>
+            </a:r>
+            <a:endParaRPr lang="en-US" sz="1200"/>
+          </a:p>
+          <a:p>
+            <a:pPr marL="0" indent="0">
+              <a:lnSpc>
+                <a:spcPts val="1560"/>
+              </a:lnSpc>
+              <a:spcAft>
+                <a:spcPts val="0"/>
+              </a:spcAft>
+              <a:buNone/>
+            </a:pPr>
+            <a:r>
+              <a:rPr lang="en-US" sz="1200" b="0">
+                <a:solidFill>
+                  <a:srgbClr val="202b33"/>
+                </a:solidFill>
+                <a:latin typeface="Arial"/>
+                <a:ea typeface="Arial"/>
+                <a:cs typeface="Arial"/>
+              </a:rPr>
+              <a:t xml:space="preserve"/>
+            </a:r>
+            <a:endParaRPr lang="en-US" sz="1200"/>
+          </a:p>
+          <a:p>
+            <a:pPr marL="0" indent="0">
+              <a:lnSpc>
+                <a:spcPts val="1560"/>
+              </a:lnSpc>
+              <a:spcAft>
+                <a:spcPts val="0"/>
+              </a:spcAft>
+              <a:buNone/>
+            </a:pPr>
+            <a:r>
+              <a:rPr lang="en-US" sz="1200" b="0">
+                <a:solidFill>
+                  <a:srgbClr val="202b33"/>
+                </a:solidFill>
+                <a:latin typeface="Arial"/>
+                <a:ea typeface="Arial"/>
+                <a:cs typeface="Arial"/>
+              </a:rPr>
+              <a:t xml:space="preserve">And then do the larger version of the same move. The org chart is a record of earlier tradeoffs; so is the product category you are working inside. You are allowed to make new ones, and the channel is not spoken for yet. Break the mirror on purpose. Automate the right things. Keep the taste.</a:t>
+            </a:r>
+            <a:endParaRPr lang="en-US" sz="1200"/>
+          </a:p>
+          <a:p>
+            <a:pPr marL="0" indent="0">
+              <a:lnSpc>
+                <a:spcPts val="1560"/>
+              </a:lnSpc>
+              <a:spcAft>
+                <a:spcPts val="0"/>
+              </a:spcAft>
+              <a:buNone/>
+            </a:pPr>
+            <a:r>
+              <a:rPr lang="en-US" sz="1200" b="0">
+                <a:solidFill>
+                  <a:srgbClr val="202b33"/>
+                </a:solidFill>
+                <a:latin typeface="Arial"/>
+                <a:ea typeface="Arial"/>
+                <a:cs typeface="Arial"/>
+              </a:rPr>
+              <a:t xml:space="preserve"/>
+            </a:r>
+            <a:endParaRPr lang="en-US" sz="1200"/>
+          </a:p>
+          <a:p>
+            <a:pPr marL="0" indent="0">
+              <a:lnSpc>
+                <a:spcPts val="1560"/>
+              </a:lnSpc>
+              <a:spcAft>
+                <a:spcPts val="0"/>
+              </a:spcAft>
+              <a:buNone/>
+            </a:pPr>
+            <a:r>
+              <a:rPr lang="en-US" sz="1200" b="0">
+                <a:solidFill>
+                  <a:srgbClr val="202b33"/>
+                </a:solidFill>
+                <a:latin typeface="Arial"/>
+                <a:ea typeface="Arial"/>
+                <a:cs typeface="Arial"/>
+              </a:rPr>
+              <a:t xml:space="preserve"/>
+            </a:r>
+            <a:endParaRPr lang="en-US" sz="1200"/>
+          </a:p>
+          <a:p>
+            <a:pPr marL="0" indent="0">
+              <a:lnSpc>
+                <a:spcPts val="1560"/>
+              </a:lnSpc>
+              <a:spcAft>
+                <a:spcPts val="0"/>
+              </a:spcAft>
+              <a:buNone/>
+            </a:pPr>
+            <a:r>
+              <a:rPr lang="en-US" sz="1200" b="0">
+                <a:solidFill>
+                  <a:srgbClr val="202b33"/>
+                </a:solidFill>
+                <a:latin typeface="Arial"/>
+                <a:ea typeface="Arial"/>
+                <a:cs typeface="Arial"/>
+              </a:rPr>
+              <a:t xml:space="preserve"/>
+            </a:r>
+            <a:endParaRPr lang="en-US" sz="1200"/>
+          </a:p>
+          <a:p>
+            <a:pPr marL="0" indent="0">
+              <a:lnSpc>
+                <a:spcPts val="1560"/>
+              </a:lnSpc>
+              <a:spcAft>
+                <a:spcPts val="0"/>
+              </a:spcAft>
+              <a:buNone/>
+            </a:pPr>
+            <a:r>
+              <a:rPr lang="en-US" sz="1200" b="0">
+                <a:solidFill>
+                  <a:srgbClr val="202b33"/>
+                </a:solidFill>
+                <a:latin typeface="Arial"/>
+                <a:ea typeface="Arial"/>
+                <a:cs typeface="Arial"/>
+              </a:rPr>
+              <a:t xml:space="preserve"/>
+            </a:r>
+            <a:endParaRPr lang="en-US" sz="1200"/>
+          </a:p>
+          <a:p>
+            <a:pPr marL="0" indent="0">
+              <a:lnSpc>
+                <a:spcPts val="1560"/>
+              </a:lnSpc>
+              <a:spcAft>
+                <a:spcPts val="0"/>
+              </a:spcAft>
+              <a:buNone/>
+            </a:pPr>
+            <a:r>
+              <a:rPr lang="en-US" sz="1200" b="0">
+                <a:solidFill>
+                  <a:srgbClr val="202b33"/>
+                </a:solidFill>
+                <a:latin typeface="Arial"/>
+                <a:ea typeface="Arial"/>
+                <a:cs typeface="Arial"/>
+              </a:rPr>
+              <a:t xml:space="preserve"/>
+            </a:r>
+            <a:endParaRPr lang="en-US" sz="1200"/>
+          </a:p>
+          <a:p>
+            <a:pPr marL="0" indent="0">
+              <a:lnSpc>
+                <a:spcPts val="1560"/>
+              </a:lnSpc>
+              <a:spcAft>
+                <a:spcPts val="0"/>
+              </a:spcAft>
+              <a:buNone/>
+            </a:pPr>
+            <a:r>
+              <a:rPr lang="en-US" sz="1200" b="0">
+                <a:solidFill>
+                  <a:srgbClr val="202b33"/>
+                </a:solidFill>
+                <a:latin typeface="Arial"/>
+                <a:ea typeface="Arial"/>
+                <a:cs typeface="Arial"/>
+              </a:rPr>
+              <a:t xml:space="preserve"/>
+            </a:r>
+            <a:endParaRPr lang="en-US" sz="1200"/>
+          </a:p>
+        </p:txBody>
+      </p:sp>
+    </p:spTree>
+  </p:cSld>
+  <p:clrMapOvr>
+    <a:masterClrMapping/>
+  </p:clrMapOvr>
+</p:notes>
+</file>
+
+<file path=ppt/notesSlides/notesSlide15.xml><?xml version="1.0" encoding="utf-8"?>
+<p:notes xmlns:a="http://schemas.openxmlformats.org/drawingml/2006/main" xmlns:r="http://schemas.openxmlformats.org/officeDocument/2006/relationships" xmlns:p="http://schemas.openxmlformats.org/presentationml/2006/main">
+  <p:cSld>
+    <p:spTree>
+      <p:nvGrpSpPr>
+        <p:cNvPr id="1" name=""/>
+        <p:cNvGrpSpPr/>
+        <p:nvPr/>
+      </p:nvGrpSpPr>
+      <p:grpSpPr>
+        <a:xfrm>
+          <a:off x="0" y="0"/>
+          <a:ext cx="0" cy="0"/>
+          <a:chOff x="0" y="0"/>
+          <a:chExt cx="0" cy="0"/>
+        </a:xfrm>
+      </p:grpSpPr>
+      <p:sp>
+        <p:nvSpPr>
+          <p:cNvPr id="2" name="Presenter notes"/>
+          <p:cNvSpPr txBox="1"/>
+          <p:nvPr>
+            <p:ph type="body" idx="1"/>
+          </p:nvPr>
+        </p:nvSpPr>
+        <p:spPr>
+          <a:xfrm>
+            <a:off x="457200" y="1428750"/>
+            <a:ext cx="5715000" cy="6667500"/>
+          </a:xfrm>
+        </p:spPr>
+        <p:txBody>
+          <a:bodyPr/>
+          <a:lstStyle/>
+          <a:p>
+            <a:pPr marL="0" indent="0">
+              <a:lnSpc>
+                <a:spcPts val="1560"/>
+              </a:lnSpc>
+              <a:spcAft>
+                <a:spcPts val="0"/>
+              </a:spcAft>
+              <a:buNone/>
+            </a:pPr>
+            <a:r>
+              <a:rPr lang="en-US" sz="1200" b="0">
+                <a:solidFill>
+                  <a:srgbClr val="202b33"/>
+                </a:solidFill>
+                <a:latin typeface="Arial"/>
+                <a:ea typeface="Arial"/>
+                <a:cs typeface="Arial"/>
+              </a:rPr>
               <a:t xml:space="preserve">Melvin E. Conway (1968), [How Do Committees Invent?](https://melconway.com/Home/pdf/committees.pdf), Datamation, April, 28–31.</a:t>
             </a:r>
             <a:endParaRPr lang="en-US" sz="1200"/>
@@ -3380,7 +4620,7 @@
                 <a:ea typeface="Arial"/>
                 <a:cs typeface="Arial"/>
               </a:rPr>
-              <a:t xml:space="preserve">Take 30 seconds: where is your team on the spectrum, and what is its heaviest handoff? Keep the answers for slide 14.</a:t>
+              <a:t xml:space="preserve">Take 30 seconds: where is your team on the spectrum, and what is its heaviest handoff? Keep the answers for the close.</a:t>
             </a:r>
             <a:endParaRPr lang="en-US" sz="1200"/>
           </a:p>
@@ -4112,7 +5352,7 @@
                 <a:ea typeface="Arial"/>
                 <a:cs typeface="Arial"/>
               </a:rPr>
-              <a:t xml:space="preserve">Source slide 6. 09:00 to 11:30</a:t>
+              <a:t xml:space="preserve">Source slide 6. 09:00 to 11:00</a:t>
             </a:r>
             <a:endParaRPr lang="en-US" sz="1200"/>
           </a:p>
@@ -4342,7 +5582,7 @@
                 <a:ea typeface="Arial"/>
                 <a:cs typeface="Arial"/>
               </a:rPr>
-              <a:t xml:space="preserve">Keep the review where somebody opens the source material and argues about what belongs at the top. It is the integrating interface in this system. Taste gets exercised in public there. A standing brief is useful; a dashboard nobody opens is just another place to store the mistake.</a:t>
+              <a:t xml:space="preserve">Keep the review where somebody opens the source material and argues about what belongs at the top. It is the integrating interface in this system. Taste gets exercised in public there.</a:t>
             </a:r>
             <a:endParaRPr lang="en-US" sz="1200"/>
           </a:p>
@@ -4593,7 +5833,7 @@
                 <a:ea typeface="Arial"/>
                 <a:cs typeface="Arial"/>
               </a:rPr>
-              <a:t xml:space="preserve">Source slide 7. 11:30 to 13:00</a:t>
+              <a:t xml:space="preserve">Source slide 7. 11:00 to 12:30</a:t>
             </a:r>
             <a:endParaRPr lang="en-US" sz="1200"/>
           </a:p>
@@ -4777,52 +6017,6 @@
                 <a:ea typeface="Arial"/>
                 <a:cs typeface="Arial"/>
               </a:rPr>
-              <a:t xml:space="preserve">Who estimated a ticket last week? Keep your hands up long enough to count. That is this room, not an industry survey. If half the room did it yesterday, then effort has left some rubrics and is alive in others.</a:t>
-            </a:r>
-            <a:endParaRPr lang="en-US" sz="1200"/>
-          </a:p>
-          <a:p>
-            <a:pPr marL="0" indent="0">
-              <a:lnSpc>
-                <a:spcPts val="1560"/>
-              </a:lnSpc>
-              <a:spcAft>
-                <a:spcPts val="0"/>
-              </a:spcAft>
-              <a:buNone/>
-            </a:pPr>
-            <a:r>
-              <a:rPr lang="en-US" sz="1200" b="0">
-                <a:solidFill>
-                  <a:srgbClr val="202b33"/>
-                </a:solidFill>
-                <a:latin typeface="Arial"/>
-                <a:ea typeface="Arial"/>
-                <a:cs typeface="Arial"/>
-              </a:rPr>
-              <a:t xml:space="preserve"/>
-            </a:r>
-            <a:endParaRPr lang="en-US" sz="1200"/>
-          </a:p>
-          <a:p>
-            <a:pPr marL="0" indent="0">
-              <a:lnSpc>
-                <a:spcPts val="1560"/>
-              </a:lnSpc>
-              <a:spcAft>
-                <a:spcPts val="0"/>
-              </a:spcAft>
-              <a:buNone/>
-            </a:pPr>
-            <a:r>
-              <a:rPr lang="en-US" sz="1200" b="0">
-                <a:solidFill>
-                  <a:srgbClr val="202b33"/>
-                </a:solidFill>
-                <a:latin typeface="Arial"/>
-                <a:ea typeface="Arial"/>
-                <a:cs typeface="Arial"/>
-              </a:rPr>
               <a:t xml:space="preserve">We still have to choose what to ship. Even when the first implementation is cheap, rollout, review, customer support, and maintenance have costs. Put those beside evidence for the idea. Do not replace story points with a model's confidence and call that prioritization.</a:t>
             </a:r>
             <a:endParaRPr lang="en-US" sz="1200"/>
@@ -4915,7 +6109,7 @@
                 <a:ea typeface="Arial"/>
                 <a:cs typeface="Arial"/>
               </a:rPr>
-              <a:t xml:space="preserve">Count the hands and say the count without inventing a denominator. Confirm the first-person observation with Dan before delivery; if it no longer holds, start with the audience question.</a:t>
+              <a:t xml:space="preserve">Ask who estimated a ticket last week, take the show of hands, and say the count without inventing a denominator. Confirm the first-person observation with Dan before delivery; if it no longer holds, open with the question instead.</a:t>
             </a:r>
             <a:endParaRPr lang="en-US" sz="1200"/>
           </a:p>
@@ -5074,7 +6268,7 @@
                 <a:ea typeface="Arial"/>
                 <a:cs typeface="Arial"/>
               </a:rPr>
-              <a:t xml:space="preserve">Source slide 9. 13:00 to 15:00</a:t>
+              <a:t xml:space="preserve">Source slide 9. 12:30 to 14:30</a:t>
             </a:r>
             <a:endParaRPr lang="en-US" sz="1200"/>
           </a:p>
@@ -5258,7 +6452,7 @@
                 <a:ea typeface="Arial"/>
                 <a:cs typeface="Arial"/>
               </a:rPr>
-              <a:t xml:space="preserve">The invitation explains what changes, that it is a beta, and how to turn it off. A person approves the message and recipients. Acceptance enrolls the customer behind a flag. Narrow feedback tells us what to try next; it does not automatically establish a causal improvement.</a:t>
+              <a:t xml:space="preserve">The invitation explains what changes, that it is a beta, and how to turn it off. A person approves the message and the recipients. Narrow feedback tells us what to try next; it does not establish a causal improvement.</a:t>
             </a:r>
             <a:endParaRPr lang="en-US" sz="1200"/>
           </a:p>
@@ -5555,7 +6749,7 @@
                 <a:ea typeface="Arial"/>
                 <a:cs typeface="Arial"/>
               </a:rPr>
-              <a:t xml:space="preserve">Source slide 10. 15:00 to 17:00</a:t>
+              <a:t xml:space="preserve">Source slide 10. 14:30 to 16:30</a:t>
             </a:r>
             <a:endParaRPr lang="en-US" sz="1200"/>
           </a:p>
@@ -6277,7 +7471,7 @@
                 <a:ea typeface="Arial"/>
                 <a:cs typeface="Arial"/>
               </a:rPr>
-              <a:t xml:space="preserve">11 source sections</a:t>
+              <a:t xml:space="preserve">12 source sections</a:t>
             </a:r>
             <a:endParaRPr lang="en-US" sz="1575"/>
           </a:p>
@@ -6480,7 +7674,7 @@
                 <a:ea typeface="Arial"/>
                 <a:cs typeface="Arial"/>
               </a:rPr>
-              <a:t xml:space="preserve">09 / 11    SOURCE SLIDE 11</a:t>
+              <a:t xml:space="preserve">09 / 12    SOURCE SLIDE 11</a:t>
             </a:r>
             <a:endParaRPr lang="en-US" sz="1050"/>
           </a:p>
@@ -7405,7 +8599,7 @@
                 <a:ea typeface="Arial"/>
                 <a:cs typeface="Arial"/>
               </a:rPr>
-              <a:t xml:space="preserve">10 / 11    SOURCE SLIDE 12</a:t>
+              <a:t xml:space="preserve">10 / 12    SOURCE SLIDE 12</a:t>
             </a:r>
             <a:endParaRPr lang="en-US" sz="1050"/>
           </a:p>
@@ -8035,53 +9229,53 @@
                 <a:ea typeface="Arial"/>
                 <a:cs typeface="Arial"/>
               </a:rPr>
-              <a:t xml:space="preserve">person approves them. The system must</a:t>
-            </a:r>
-            <a:endParaRPr lang="en-US" sz="1500"/>
-          </a:p>
-          <a:p>
-            <a:pPr marL="0" indent="0">
-              <a:lnSpc>
-                <a:spcPts val="1950"/>
-              </a:lnSpc>
-              <a:spcAft>
-                <a:spcPts val="0"/>
-              </a:spcAft>
-              <a:buNone/>
-            </a:pPr>
-            <a:r>
-              <a:rPr lang="en-US" sz="1500" b="0">
-                <a:solidFill>
-                  <a:srgbClr val="202B33"/>
-                </a:solidFill>
-                <a:latin typeface="Arial"/>
-                <a:ea typeface="Arial"/>
-                <a:cs typeface="Arial"/>
-              </a:rPr>
-              <a:t xml:space="preserve">enforce that permission, not merely mention</a:t>
-            </a:r>
-            <a:endParaRPr lang="en-US" sz="1500"/>
-          </a:p>
-          <a:p>
-            <a:pPr marL="0" indent="0">
-              <a:lnSpc>
-                <a:spcPts val="1950"/>
-              </a:lnSpc>
-              <a:spcAft>
-                <a:spcPts val="0"/>
-              </a:spcAft>
-              <a:buNone/>
-            </a:pPr>
-            <a:r>
-              <a:rPr lang="en-US" sz="1500" b="0">
-                <a:solidFill>
-                  <a:srgbClr val="202B33"/>
-                </a:solidFill>
-                <a:latin typeface="Arial"/>
-                <a:ea typeface="Arial"/>
-                <a:cs typeface="Arial"/>
-              </a:rPr>
-              <a:t xml:space="preserve">it in the prompt.</a:t>
+              <a:t xml:space="preserve">person approves them, and the system</a:t>
+            </a:r>
+            <a:endParaRPr lang="en-US" sz="1500"/>
+          </a:p>
+          <a:p>
+            <a:pPr marL="0" indent="0">
+              <a:lnSpc>
+                <a:spcPts val="1950"/>
+              </a:lnSpc>
+              <a:spcAft>
+                <a:spcPts val="0"/>
+              </a:spcAft>
+              <a:buNone/>
+            </a:pPr>
+            <a:r>
+              <a:rPr lang="en-US" sz="1500" b="0">
+                <a:solidFill>
+                  <a:srgbClr val="202B33"/>
+                </a:solidFill>
+                <a:latin typeface="Arial"/>
+                <a:ea typeface="Arial"/>
+                <a:cs typeface="Arial"/>
+              </a:rPr>
+              <a:t xml:space="preserve">enforces that permission rather than</a:t>
+            </a:r>
+            <a:endParaRPr lang="en-US" sz="1500"/>
+          </a:p>
+          <a:p>
+            <a:pPr marL="0" indent="0">
+              <a:lnSpc>
+                <a:spcPts val="1950"/>
+              </a:lnSpc>
+              <a:spcAft>
+                <a:spcPts val="0"/>
+              </a:spcAft>
+              <a:buNone/>
+            </a:pPr>
+            <a:r>
+              <a:rPr lang="en-US" sz="1500" b="0">
+                <a:solidFill>
+                  <a:srgbClr val="202B33"/>
+                </a:solidFill>
+                <a:latin typeface="Arial"/>
+                <a:ea typeface="Arial"/>
+                <a:cs typeface="Arial"/>
+              </a:rPr>
+              <a:t xml:space="preserve">mentioning it in a prompt.</a:t>
             </a:r>
             <a:endParaRPr lang="en-US" sz="1500"/>
           </a:p>
@@ -8261,7 +9455,7 @@
                 <a:ea typeface="Arial"/>
                 <a:cs typeface="Arial"/>
               </a:rPr>
-              <a:t xml:space="preserve">11 / 11    SOURCE SLIDE 15</a:t>
+              <a:t xml:space="preserve">11 / 12    SOURCE SLIDE 15</a:t>
             </a:r>
             <a:endParaRPr lang="en-US" sz="1050"/>
           </a:p>
@@ -8310,7 +9504,7 @@
                 <a:ea typeface="Arial"/>
                 <a:cs typeface="Arial"/>
               </a:rPr>
-              <a:t xml:space="preserve">Break the mirror on purpose</a:t>
+              <a:t xml:space="preserve">Minority Report, With Terminals</a:t>
             </a:r>
             <a:endParaRPr lang="en-US" sz="2550"/>
           </a:p>
@@ -8359,352 +9553,329 @@
                 <a:ea typeface="Arial"/>
                 <a:cs typeface="Arial"/>
               </a:rPr>
-              <a:t xml:space="preserve">Reprice the handoffs. Draw the interfaces.</a:t>
-            </a:r>
-            <a:endParaRPr lang="en-US" sz="1500"/>
-          </a:p>
-          <a:p>
-            <a:pPr marL="0" indent="0">
-              <a:lnSpc>
-                <a:spcPts val="1950"/>
-              </a:lnSpc>
-              <a:spcAft>
-                <a:spcPts val="0"/>
-              </a:spcAft>
-              <a:buNone/>
-            </a:pPr>
-            <a:r>
-              <a:rPr lang="en-US" sz="1500" b="0">
-                <a:solidFill>
-                  <a:srgbClr val="202B33"/>
-                </a:solidFill>
-                <a:latin typeface="Arial"/>
-                <a:ea typeface="Arial"/>
-                <a:cs typeface="Arial"/>
-              </a:rPr>
-              <a:t xml:space="preserve"/>
-            </a:r>
-            <a:endParaRPr lang="en-US" sz="1500"/>
-          </a:p>
-          <a:p>
-            <a:pPr marL="0" indent="0">
-              <a:lnSpc>
-                <a:spcPts val="1950"/>
-              </a:lnSpc>
-              <a:spcAft>
-                <a:spcPts val="0"/>
-              </a:spcAft>
-              <a:buNone/>
-            </a:pPr>
-            <a:r>
-              <a:rPr lang="en-US" sz="1500" b="0">
-                <a:solidFill>
-                  <a:srgbClr val="202B33"/>
-                </a:solidFill>
-                <a:latin typeface="Arial"/>
-                <a:ea typeface="Arial"/>
-                <a:cs typeface="Arial"/>
-              </a:rPr>
-              <a:t xml:space="preserve">Automate the right things. Keep the taste.</a:t>
-            </a:r>
-            <a:endParaRPr lang="en-US" sz="1500"/>
-          </a:p>
-          <a:p>
-            <a:pPr marL="0" indent="0">
-              <a:lnSpc>
-                <a:spcPts val="1950"/>
-              </a:lnSpc>
-              <a:spcAft>
-                <a:spcPts val="0"/>
-              </a:spcAft>
-              <a:buNone/>
-            </a:pPr>
-            <a:r>
-              <a:rPr lang="en-US" sz="1500" b="0">
-                <a:solidFill>
-                  <a:srgbClr val="202B33"/>
-                </a:solidFill>
-                <a:latin typeface="Arial"/>
-                <a:ea typeface="Arial"/>
-                <a:cs typeface="Arial"/>
-              </a:rPr>
-              <a:t xml:space="preserve"/>
-            </a:r>
-            <a:endParaRPr lang="en-US" sz="1500"/>
-          </a:p>
-          <a:p>
-            <a:pPr marL="0" indent="0">
-              <a:lnSpc>
-                <a:spcPts val="1950"/>
-              </a:lnSpc>
-              <a:spcAft>
-                <a:spcPts val="0"/>
-              </a:spcAft>
-              <a:buNone/>
-            </a:pPr>
-            <a:r>
-              <a:rPr lang="en-US" sz="1500" b="0">
-                <a:solidFill>
-                  <a:srgbClr val="202B33"/>
-                </a:solidFill>
-                <a:latin typeface="Arial"/>
-                <a:ea typeface="Arial"/>
-                <a:cs typeface="Arial"/>
-              </a:rPr>
-              <a:t xml:space="preserve">Back to the org chart. Some of those</a:t>
-            </a:r>
-            <a:endParaRPr lang="en-US" sz="1500"/>
-          </a:p>
-          <a:p>
-            <a:pPr marL="0" indent="0">
-              <a:lnSpc>
-                <a:spcPts val="1950"/>
-              </a:lnSpc>
-              <a:spcAft>
-                <a:spcPts val="0"/>
-              </a:spcAft>
-              <a:buNone/>
-            </a:pPr>
-            <a:r>
-              <a:rPr lang="en-US" sz="1500" b="0">
-                <a:solidFill>
-                  <a:srgbClr val="202B33"/>
-                </a:solidFill>
-                <a:latin typeface="Arial"/>
-                <a:ea typeface="Arial"/>
-                <a:cs typeface="Arial"/>
-              </a:rPr>
-              <a:t xml:space="preserve">boundaries exist because the work really is</a:t>
-            </a:r>
-            <a:endParaRPr lang="en-US" sz="1500"/>
-          </a:p>
-          <a:p>
-            <a:pPr marL="0" indent="0">
-              <a:lnSpc>
-                <a:spcPts val="1950"/>
-              </a:lnSpc>
-              <a:spcAft>
-                <a:spcPts val="0"/>
-              </a:spcAft>
-              <a:buNone/>
-            </a:pPr>
-            <a:r>
-              <a:rPr lang="en-US" sz="1500" b="0">
-                <a:solidFill>
-                  <a:srgbClr val="202B33"/>
-                </a:solidFill>
-                <a:latin typeface="Arial"/>
-                <a:ea typeface="Arial"/>
-                <a:cs typeface="Arial"/>
-              </a:rPr>
-              <a:t xml:space="preserve">different. Some exist because the person</a:t>
-            </a:r>
-            <a:endParaRPr lang="en-US" sz="1500"/>
-          </a:p>
-          <a:p>
-            <a:pPr marL="0" indent="0">
-              <a:lnSpc>
-                <a:spcPts val="1950"/>
-              </a:lnSpc>
-              <a:spcAft>
-                <a:spcPts val="0"/>
-              </a:spcAft>
-              <a:buNone/>
-            </a:pPr>
-            <a:r>
-              <a:rPr lang="en-US" sz="1500" b="0">
-                <a:solidFill>
-                  <a:srgbClr val="202B33"/>
-                </a:solidFill>
-                <a:latin typeface="Arial"/>
-                <a:ea typeface="Arial"/>
-                <a:cs typeface="Arial"/>
-              </a:rPr>
-              <a:t xml:space="preserve">with the spreadsheet sat in another</a:t>
-            </a:r>
-            <a:endParaRPr lang="en-US" sz="1500"/>
-          </a:p>
-          <a:p>
-            <a:pPr marL="0" indent="0">
-              <a:lnSpc>
-                <a:spcPts val="1950"/>
-              </a:lnSpc>
-              <a:spcAft>
-                <a:spcPts val="0"/>
-              </a:spcAft>
-              <a:buNone/>
-            </a:pPr>
-            <a:r>
-              <a:rPr lang="en-US" sz="1500" b="0">
-                <a:solidFill>
-                  <a:srgbClr val="202B33"/>
-                </a:solidFill>
-                <a:latin typeface="Arial"/>
-                <a:ea typeface="Arial"/>
-                <a:cs typeface="Arial"/>
-              </a:rPr>
-              <a:t xml:space="preserve">department. We should know which before</a:t>
-            </a:r>
-            <a:endParaRPr lang="en-US" sz="1500"/>
-          </a:p>
-          <a:p>
-            <a:pPr marL="0" indent="0">
-              <a:lnSpc>
-                <a:spcPts val="1950"/>
-              </a:lnSpc>
-              <a:spcAft>
-                <a:spcPts val="0"/>
-              </a:spcAft>
-              <a:buNone/>
-            </a:pPr>
-            <a:r>
-              <a:rPr lang="en-US" sz="1500" b="0">
-                <a:solidFill>
-                  <a:srgbClr val="202B33"/>
-                </a:solidFill>
-                <a:latin typeface="Arial"/>
-                <a:ea typeface="Arial"/>
-                <a:cs typeface="Arial"/>
-              </a:rPr>
-              <a:t xml:space="preserve">teaching agents to repeat them.</a:t>
-            </a:r>
-            <a:endParaRPr lang="en-US" sz="1500"/>
-          </a:p>
-          <a:p>
-            <a:pPr marL="0" indent="0">
-              <a:lnSpc>
-                <a:spcPts val="1950"/>
-              </a:lnSpc>
-              <a:spcAft>
-                <a:spcPts val="0"/>
-              </a:spcAft>
-              <a:buNone/>
-            </a:pPr>
-            <a:r>
-              <a:rPr lang="en-US" sz="1500" b="0">
-                <a:solidFill>
-                  <a:srgbClr val="202B33"/>
-                </a:solidFill>
-                <a:latin typeface="Arial"/>
-                <a:ea typeface="Arial"/>
-                <a:cs typeface="Arial"/>
-              </a:rPr>
-              <a:t xml:space="preserve"/>
-            </a:r>
-            <a:endParaRPr lang="en-US" sz="1500"/>
-          </a:p>
-          <a:p>
-            <a:pPr marL="0" indent="0">
-              <a:lnSpc>
-                <a:spcPts val="1950"/>
-              </a:lnSpc>
-              <a:spcAft>
-                <a:spcPts val="0"/>
-              </a:spcAft>
-              <a:buNone/>
-            </a:pPr>
-            <a:r>
-              <a:rPr lang="en-US" sz="1500" b="0">
-                <a:solidFill>
-                  <a:srgbClr val="202B33"/>
-                </a:solidFill>
-                <a:latin typeface="Arial"/>
-                <a:ea typeface="Arial"/>
-                <a:cs typeface="Arial"/>
-              </a:rPr>
-              <a:t xml:space="preserve">Take one boundary. What arrives, what</a:t>
-            </a:r>
-            <a:endParaRPr lang="en-US" sz="1500"/>
-          </a:p>
-          <a:p>
-            <a:pPr marL="0" indent="0">
-              <a:lnSpc>
-                <a:spcPts val="1950"/>
-              </a:lnSpc>
-              <a:spcAft>
-                <a:spcPts val="0"/>
-              </a:spcAft>
-              <a:buNone/>
-            </a:pPr>
-            <a:r>
-              <a:rPr lang="en-US" sz="1500" b="0">
-                <a:solidFill>
-                  <a:srgbClr val="202B33"/>
-                </a:solidFill>
-                <a:latin typeface="Arial"/>
-                <a:ea typeface="Arial"/>
-                <a:cs typeface="Arial"/>
-              </a:rPr>
-              <a:t xml:space="preserve">leaves, who decides, and what did it cost</a:t>
-            </a:r>
-            <a:endParaRPr lang="en-US" sz="1500"/>
-          </a:p>
-          <a:p>
-            <a:pPr marL="0" indent="0">
-              <a:lnSpc>
-                <a:spcPts val="1950"/>
-              </a:lnSpc>
-              <a:spcAft>
-                <a:spcPts val="0"/>
-              </a:spcAft>
-              <a:buNone/>
-            </a:pPr>
-            <a:r>
-              <a:rPr lang="en-US" sz="1500" b="0">
-                <a:solidFill>
-                  <a:srgbClr val="202B33"/>
-                </a:solidFill>
-                <a:latin typeface="Arial"/>
-                <a:ea typeface="Arial"/>
-                <a:cs typeface="Arial"/>
-              </a:rPr>
-              <a:t xml:space="preserve">last week? Make collection cheaper without</a:t>
-            </a:r>
-            <a:endParaRPr lang="en-US" sz="1500"/>
-          </a:p>
-          <a:p>
-            <a:pPr marL="0" indent="0">
-              <a:lnSpc>
-                <a:spcPts val="1950"/>
-              </a:lnSpc>
-              <a:spcAft>
-                <a:spcPts val="0"/>
-              </a:spcAft>
-              <a:buNone/>
-            </a:pPr>
-            <a:r>
-              <a:rPr lang="en-US" sz="1500" b="0">
-                <a:solidFill>
-                  <a:srgbClr val="202B33"/>
-                </a:solidFill>
-                <a:latin typeface="Arial"/>
-                <a:ea typeface="Arial"/>
-                <a:cs typeface="Arial"/>
-              </a:rPr>
-              <a:t xml:space="preserve">erasing the disagreement that the handoff</a:t>
-            </a:r>
-            <a:endParaRPr lang="en-US" sz="1500"/>
-          </a:p>
-          <a:p>
-            <a:pPr marL="0" indent="0">
-              <a:lnSpc>
-                <a:spcPts val="1950"/>
-              </a:lnSpc>
-              <a:spcAft>
-                <a:spcPts val="0"/>
-              </a:spcAft>
-              <a:buNone/>
-            </a:pPr>
-            <a:r>
-              <a:rPr lang="en-US" sz="1500" b="0">
-                <a:solidFill>
-                  <a:srgbClr val="202B33"/>
-                </a:solidFill>
-                <a:latin typeface="Arial"/>
-                <a:ea typeface="Arial"/>
-                <a:cs typeface="Arial"/>
-              </a:rPr>
-              <a:t xml:space="preserve">used to expose. Keep the product review</a:t>
+              <a:t xml:space="preserve">Generated UI, adapting in real time, per</a:t>
+            </a:r>
+            <a:endParaRPr lang="en-US" sz="1500"/>
+          </a:p>
+          <a:p>
+            <a:pPr marL="0" indent="0">
+              <a:lnSpc>
+                <a:spcPts val="1950"/>
+              </a:lnSpc>
+              <a:spcAft>
+                <a:spcPts val="0"/>
+              </a:spcAft>
+              <a:buNone/>
+            </a:pPr>
+            <a:r>
+              <a:rPr lang="en-US" sz="1500" b="0">
+                <a:solidFill>
+                  <a:srgbClr val="202B33"/>
+                </a:solidFill>
+                <a:latin typeface="Arial"/>
+                <a:ea typeface="Arial"/>
+                <a:cs typeface="Arial"/>
+              </a:rPr>
+              <a:t xml:space="preserve">person</a:t>
+            </a:r>
+            <a:endParaRPr lang="en-US" sz="1500"/>
+          </a:p>
+          <a:p>
+            <a:pPr marL="0" indent="0">
+              <a:lnSpc>
+                <a:spcPts val="1950"/>
+              </a:lnSpc>
+              <a:spcAft>
+                <a:spcPts val="0"/>
+              </a:spcAft>
+              <a:buNone/>
+            </a:pPr>
+            <a:r>
+              <a:rPr lang="en-US" sz="1500" b="0">
+                <a:solidFill>
+                  <a:srgbClr val="202B33"/>
+                </a:solidFill>
+                <a:latin typeface="Arial"/>
+                <a:ea typeface="Arial"/>
+                <a:cs typeface="Arial"/>
+              </a:rPr>
+              <a:t xml:space="preserve"/>
+            </a:r>
+            <a:endParaRPr lang="en-US" sz="1500"/>
+          </a:p>
+          <a:p>
+            <a:pPr marL="0" indent="0">
+              <a:lnSpc>
+                <a:spcPts val="1950"/>
+              </a:lnSpc>
+              <a:spcAft>
+                <a:spcPts val="0"/>
+              </a:spcAft>
+              <a:buNone/>
+            </a:pPr>
+            <a:r>
+              <a:rPr lang="en-US" sz="1500" b="0">
+                <a:solidFill>
+                  <a:srgbClr val="202B33"/>
+                </a:solidFill>
+                <a:latin typeface="Arial"/>
+                <a:ea typeface="Arial"/>
+                <a:cs typeface="Arial"/>
+              </a:rPr>
+              <a:t xml:space="preserve">Yes, the software you mastered is going</a:t>
+            </a:r>
+            <a:endParaRPr lang="en-US" sz="1500"/>
+          </a:p>
+          <a:p>
+            <a:pPr marL="0" indent="0">
+              <a:lnSpc>
+                <a:spcPts val="1950"/>
+              </a:lnSpc>
+              <a:spcAft>
+                <a:spcPts val="0"/>
+              </a:spcAft>
+              <a:buNone/>
+            </a:pPr>
+            <a:r>
+              <a:rPr lang="en-US" sz="1500" b="0">
+                <a:solidFill>
+                  <a:srgbClr val="202B33"/>
+                </a:solidFill>
+                <a:latin typeface="Arial"/>
+                <a:ea typeface="Arial"/>
+                <a:cs typeface="Arial"/>
+              </a:rPr>
+              <a:t xml:space="preserve">away. As you know it.</a:t>
+            </a:r>
+            <a:endParaRPr lang="en-US" sz="1500"/>
+          </a:p>
+          <a:p>
+            <a:pPr marL="0" indent="0">
+              <a:lnSpc>
+                <a:spcPts val="1950"/>
+              </a:lnSpc>
+              <a:spcAft>
+                <a:spcPts val="0"/>
+              </a:spcAft>
+              <a:buNone/>
+            </a:pPr>
+            <a:r>
+              <a:rPr lang="en-US" sz="1500" b="0">
+                <a:solidFill>
+                  <a:srgbClr val="202B33"/>
+                </a:solidFill>
+                <a:latin typeface="Arial"/>
+                <a:ea typeface="Arial"/>
+                <a:cs typeface="Arial"/>
+              </a:rPr>
+              <a:t xml:space="preserve"/>
+            </a:r>
+            <a:endParaRPr lang="en-US" sz="1500"/>
+          </a:p>
+          <a:p>
+            <a:pPr marL="0" indent="0">
+              <a:lnSpc>
+                <a:spcPts val="1950"/>
+              </a:lnSpc>
+              <a:spcAft>
+                <a:spcPts val="0"/>
+              </a:spcAft>
+              <a:buNone/>
+            </a:pPr>
+            <a:r>
+              <a:rPr lang="en-US" sz="1500" b="0">
+                <a:solidFill>
+                  <a:srgbClr val="202B33"/>
+                </a:solidFill>
+                <a:latin typeface="Arial"/>
+                <a:ea typeface="Arial"/>
+                <a:cs typeface="Arial"/>
+              </a:rPr>
+              <a:t xml:space="preserve">The channel is not spoken for.</a:t>
+            </a:r>
+            <a:endParaRPr lang="en-US" sz="1500"/>
+          </a:p>
+          <a:p>
+            <a:pPr marL="0" indent="0">
+              <a:lnSpc>
+                <a:spcPts val="1950"/>
+              </a:lnSpc>
+              <a:spcAft>
+                <a:spcPts val="0"/>
+              </a:spcAft>
+              <a:buNone/>
+            </a:pPr>
+            <a:r>
+              <a:rPr lang="en-US" sz="1500" b="0">
+                <a:solidFill>
+                  <a:srgbClr val="202B33"/>
+                </a:solidFill>
+                <a:latin typeface="Arial"/>
+                <a:ea typeface="Arial"/>
+                <a:cs typeface="Arial"/>
+              </a:rPr>
+              <a:t xml:space="preserve"/>
+            </a:r>
+            <a:endParaRPr lang="en-US" sz="1500"/>
+          </a:p>
+          <a:p>
+            <a:pPr marL="0" indent="0">
+              <a:lnSpc>
+                <a:spcPts val="1950"/>
+              </a:lnSpc>
+              <a:spcAft>
+                <a:spcPts val="0"/>
+              </a:spcAft>
+              <a:buNone/>
+            </a:pPr>
+            <a:r>
+              <a:rPr lang="en-US" sz="1500" b="0">
+                <a:solidFill>
+                  <a:srgbClr val="202B33"/>
+                </a:solidFill>
+                <a:latin typeface="Arial"/>
+                <a:ea typeface="Arial"/>
+                <a:cs typeface="Arial"/>
+              </a:rPr>
+              <a:t xml:space="preserve">Second prediction, and this one is less</a:t>
+            </a:r>
+            <a:endParaRPr lang="en-US" sz="1500"/>
+          </a:p>
+          <a:p>
+            <a:pPr marL="0" indent="0">
+              <a:lnSpc>
+                <a:spcPts val="1950"/>
+              </a:lnSpc>
+              <a:spcAft>
+                <a:spcPts val="0"/>
+              </a:spcAft>
+              <a:buNone/>
+            </a:pPr>
+            <a:r>
+              <a:rPr lang="en-US" sz="1500" b="0">
+                <a:solidFill>
+                  <a:srgbClr val="202B33"/>
+                </a:solidFill>
+                <a:latin typeface="Arial"/>
+                <a:ea typeface="Arial"/>
+                <a:cs typeface="Arial"/>
+              </a:rPr>
+              <a:t xml:space="preserve">comfortable. AI does not magically make</a:t>
+            </a:r>
+            <a:endParaRPr lang="en-US" sz="1500"/>
+          </a:p>
+          <a:p>
+            <a:pPr marL="0" indent="0">
+              <a:lnSpc>
+                <a:spcPts val="1950"/>
+              </a:lnSpc>
+              <a:spcAft>
+                <a:spcPts val="0"/>
+              </a:spcAft>
+              <a:buNone/>
+            </a:pPr>
+            <a:r>
+              <a:rPr lang="en-US" sz="1500" b="0">
+                <a:solidFill>
+                  <a:srgbClr val="202B33"/>
+                </a:solidFill>
+                <a:latin typeface="Arial"/>
+                <a:ea typeface="Arial"/>
+                <a:cs typeface="Arial"/>
+              </a:rPr>
+              <a:t xml:space="preserve">software work. Well-understood software</a:t>
+            </a:r>
+            <a:endParaRPr lang="en-US" sz="1500"/>
+          </a:p>
+          <a:p>
+            <a:pPr marL="0" indent="0">
+              <a:lnSpc>
+                <a:spcPts val="1950"/>
+              </a:lnSpc>
+              <a:spcAft>
+                <a:spcPts val="0"/>
+              </a:spcAft>
+              <a:buNone/>
+            </a:pPr>
+            <a:r>
+              <a:rPr lang="en-US" sz="1500" b="0">
+                <a:solidFill>
+                  <a:srgbClr val="202B33"/>
+                </a:solidFill>
+                <a:latin typeface="Arial"/>
+                <a:ea typeface="Arial"/>
+                <a:cs typeface="Arial"/>
+              </a:rPr>
+              <a:t xml:space="preserve">still gets harder to operate as the world</a:t>
+            </a:r>
+            <a:endParaRPr lang="en-US" sz="1500"/>
+          </a:p>
+          <a:p>
+            <a:pPr marL="0" indent="0">
+              <a:lnSpc>
+                <a:spcPts val="1950"/>
+              </a:lnSpc>
+              <a:spcAft>
+                <a:spcPts val="0"/>
+              </a:spcAft>
+              <a:buNone/>
+            </a:pPr>
+            <a:r>
+              <a:rPr lang="en-US" sz="1500" b="0">
+                <a:solidFill>
+                  <a:srgbClr val="202B33"/>
+                </a:solidFill>
+                <a:latin typeface="Arial"/>
+                <a:ea typeface="Arial"/>
+                <a:cs typeface="Arial"/>
+              </a:rPr>
+              <a:t xml:space="preserve">moves under it: you outgrow a performance</a:t>
+            </a:r>
+            <a:endParaRPr lang="en-US" sz="1500"/>
+          </a:p>
+          <a:p>
+            <a:pPr marL="0" indent="0">
+              <a:lnSpc>
+                <a:spcPts val="1950"/>
+              </a:lnSpc>
+              <a:spcAft>
+                <a:spcPts val="0"/>
+              </a:spcAft>
+              <a:buNone/>
+            </a:pPr>
+            <a:r>
+              <a:rPr lang="en-US" sz="1500" b="0">
+                <a:solidFill>
+                  <a:srgbClr val="202B33"/>
+                </a:solidFill>
+                <a:latin typeface="Arial"/>
+                <a:ea typeface="Arial"/>
+                <a:cs typeface="Arial"/>
+              </a:rPr>
+              <a:t xml:space="preserve">envelope, you accumulate features, somebody</a:t>
+            </a:r>
+            <a:endParaRPr lang="en-US" sz="1500"/>
+          </a:p>
+          <a:p>
+            <a:pPr marL="0" indent="0">
+              <a:lnSpc>
+                <a:spcPts val="1950"/>
+              </a:lnSpc>
+              <a:spcAft>
+                <a:spcPts val="0"/>
+              </a:spcAft>
+              <a:buNone/>
+            </a:pPr>
+            <a:r>
+              <a:rPr lang="en-US" sz="1500" b="0">
+                <a:solidFill>
+                  <a:srgbClr val="202B33"/>
+                </a:solidFill>
+                <a:latin typeface="Arial"/>
+                <a:ea typeface="Arial"/>
+                <a:cs typeface="Arial"/>
+              </a:rPr>
+              <a:t xml:space="preserve">deprecates your dependency. Generation</a:t>
             </a:r>
             <a:endParaRPr lang="en-US" sz="1500"/>
           </a:p>
@@ -8753,329 +9924,306 @@
                 <a:ea typeface="Arial"/>
                 <a:cs typeface="Arial"/>
               </a:rPr>
-              <a:t xml:space="preserve">where the evidence conflicts. Give the</a:t>
-            </a:r>
-            <a:endParaRPr lang="en-US" sz="1500"/>
-          </a:p>
-          <a:p>
-            <a:pPr marL="0" indent="0">
-              <a:lnSpc>
-                <a:spcPts val="1950"/>
-              </a:lnSpc>
-              <a:spcAft>
-                <a:spcPts val="0"/>
-              </a:spcAft>
-              <a:buNone/>
-            </a:pPr>
-            <a:r>
-              <a:rPr lang="en-US" sz="1500" b="0">
-                <a:solidFill>
-                  <a:srgbClr val="202B33"/>
-                </a:solidFill>
-                <a:latin typeface="Arial"/>
-                <a:ea typeface="Arial"/>
-                <a:cs typeface="Arial"/>
-              </a:rPr>
-              <a:t xml:space="preserve">resulting decision a durable artifact so</a:t>
-            </a:r>
-            <a:endParaRPr lang="en-US" sz="1500"/>
-          </a:p>
-          <a:p>
-            <a:pPr marL="0" indent="0">
-              <a:lnSpc>
-                <a:spcPts val="1950"/>
-              </a:lnSpc>
-              <a:spcAft>
-                <a:spcPts val="0"/>
-              </a:spcAft>
-              <a:buNone/>
-            </a:pPr>
-            <a:r>
-              <a:rPr lang="en-US" sz="1500" b="0">
-                <a:solidFill>
-                  <a:srgbClr val="202B33"/>
-                </a:solidFill>
-                <a:latin typeface="Arial"/>
-                <a:ea typeface="Arial"/>
-                <a:cs typeface="Arial"/>
-              </a:rPr>
-              <a:t xml:space="preserve">the next agent does not have to guess.</a:t>
-            </a:r>
-            <a:endParaRPr lang="en-US" sz="1500"/>
-          </a:p>
-          <a:p>
-            <a:pPr marL="0" indent="0">
-              <a:lnSpc>
-                <a:spcPts val="1950"/>
-              </a:lnSpc>
-              <a:spcAft>
-                <a:spcPts val="0"/>
-              </a:spcAft>
-              <a:buNone/>
-            </a:pPr>
-            <a:r>
-              <a:rPr lang="en-US" sz="1500" b="0">
-                <a:solidFill>
-                  <a:srgbClr val="202B33"/>
-                </a:solidFill>
-                <a:latin typeface="Arial"/>
-                <a:ea typeface="Arial"/>
-                <a:cs typeface="Arial"/>
-              </a:rPr>
-              <a:t xml:space="preserve"/>
-            </a:r>
-            <a:endParaRPr lang="en-US" sz="1500"/>
-          </a:p>
-          <a:p>
-            <a:pPr marL="0" indent="0">
-              <a:lnSpc>
-                <a:spcPts val="1950"/>
-              </a:lnSpc>
-              <a:spcAft>
-                <a:spcPts val="0"/>
-              </a:spcAft>
-              <a:buNone/>
-            </a:pPr>
-            <a:r>
-              <a:rPr lang="en-US" sz="1500" b="0">
-                <a:solidFill>
-                  <a:srgbClr val="202B33"/>
-                </a:solidFill>
-                <a:latin typeface="Arial"/>
-                <a:ea typeface="Arial"/>
-                <a:cs typeface="Arial"/>
-              </a:rPr>
-              <a:t xml:space="preserve">Then price ownership. Six agents do not</a:t>
-            </a:r>
-            <a:endParaRPr lang="en-US" sz="1500"/>
-          </a:p>
-          <a:p>
-            <a:pPr marL="0" indent="0">
-              <a:lnSpc>
-                <a:spcPts val="1950"/>
-              </a:lnSpc>
-              <a:spcAft>
-                <a:spcPts val="0"/>
-              </a:spcAft>
-              <a:buNone/>
-            </a:pPr>
-            <a:r>
-              <a:rPr lang="en-US" sz="1500" b="0">
-                <a:solidFill>
-                  <a:srgbClr val="202B33"/>
-                </a:solidFill>
-                <a:latin typeface="Arial"/>
-                <a:ea typeface="Arial"/>
-                <a:cs typeface="Arial"/>
-              </a:rPr>
-              <a:t xml:space="preserve">become free because one person has their</a:t>
-            </a:r>
-            <a:endParaRPr lang="en-US" sz="1500"/>
-          </a:p>
-          <a:p>
-            <a:pPr marL="0" indent="0">
-              <a:lnSpc>
-                <a:spcPts val="1950"/>
-              </a:lnSpc>
-              <a:spcAft>
-                <a:spcPts val="0"/>
-              </a:spcAft>
-              <a:buNone/>
-            </a:pPr>
-            <a:r>
-              <a:rPr lang="en-US" sz="1500" b="0">
-                <a:solidFill>
-                  <a:srgbClr val="202B33"/>
-                </a:solidFill>
-                <a:latin typeface="Arial"/>
-                <a:ea typeface="Arial"/>
-                <a:cs typeface="Arial"/>
-              </a:rPr>
-              <a:t xml:space="preserve">names in a config file. Reserve the</a:t>
-            </a:r>
-            <a:endParaRPr lang="en-US" sz="1500"/>
-          </a:p>
-          <a:p>
-            <a:pPr marL="0" indent="0">
-              <a:lnSpc>
-                <a:spcPts val="1950"/>
-              </a:lnSpc>
-              <a:spcAft>
-                <a:spcPts val="0"/>
-              </a:spcAft>
-              <a:buNone/>
-            </a:pPr>
-            <a:r>
-              <a:rPr lang="en-US" sz="1500" b="0">
-                <a:solidFill>
-                  <a:srgbClr val="202B33"/>
-                </a:solidFill>
-                <a:latin typeface="Arial"/>
-                <a:ea typeface="Arial"/>
-                <a:cs typeface="Arial"/>
-              </a:rPr>
-              <a:t xml:space="preserve">person's attention and practise the</a:t>
-            </a:r>
-            <a:endParaRPr lang="en-US" sz="1500"/>
-          </a:p>
-          <a:p>
-            <a:pPr marL="0" indent="0">
-              <a:lnSpc>
-                <a:spcPts val="1950"/>
-              </a:lnSpc>
-              <a:spcAft>
-                <a:spcPts val="0"/>
-              </a:spcAft>
-              <a:buNone/>
-            </a:pPr>
-            <a:r>
-              <a:rPr lang="en-US" sz="1500" b="0">
-                <a:solidFill>
-                  <a:srgbClr val="202B33"/>
-                </a:solidFill>
-                <a:latin typeface="Arial"/>
-                <a:ea typeface="Arial"/>
-                <a:cs typeface="Arial"/>
-              </a:rPr>
-              <a:t xml:space="preserve">exceptional work. Put permission before</a:t>
-            </a:r>
-            <a:endParaRPr lang="en-US" sz="1500"/>
-          </a:p>
-          <a:p>
-            <a:pPr marL="0" indent="0">
-              <a:lnSpc>
-                <a:spcPts val="1950"/>
-              </a:lnSpc>
-              <a:spcAft>
-                <a:spcPts val="0"/>
-              </a:spcAft>
-              <a:buNone/>
-            </a:pPr>
-            <a:r>
-              <a:rPr lang="en-US" sz="1500" b="0">
-                <a:solidFill>
-                  <a:srgbClr val="202B33"/>
-                </a:solidFill>
-                <a:latin typeface="Arial"/>
-                <a:ea typeface="Arial"/>
-                <a:cs typeface="Arial"/>
-              </a:rPr>
-              <a:t xml:space="preserve">customer consequences.</a:t>
-            </a:r>
-            <a:endParaRPr lang="en-US" sz="1500"/>
-          </a:p>
-          <a:p>
-            <a:pPr marL="0" indent="0">
-              <a:lnSpc>
-                <a:spcPts val="1950"/>
-              </a:lnSpc>
-              <a:spcAft>
-                <a:spcPts val="0"/>
-              </a:spcAft>
-              <a:buNone/>
-            </a:pPr>
-            <a:r>
-              <a:rPr lang="en-US" sz="1500" b="0">
-                <a:solidFill>
-                  <a:srgbClr val="202B33"/>
-                </a:solidFill>
-                <a:latin typeface="Arial"/>
-                <a:ea typeface="Arial"/>
-                <a:cs typeface="Arial"/>
-              </a:rPr>
-              <a:t xml:space="preserve"/>
-            </a:r>
-            <a:endParaRPr lang="en-US" sz="1500"/>
-          </a:p>
-          <a:p>
-            <a:pPr marL="0" indent="0">
-              <a:lnSpc>
-                <a:spcPts val="1950"/>
-              </a:lnSpc>
-              <a:spcAft>
-                <a:spcPts val="0"/>
-              </a:spcAft>
-              <a:buNone/>
-            </a:pPr>
-            <a:r>
-              <a:rPr lang="en-US" sz="1500" b="0">
-                <a:solidFill>
-                  <a:srgbClr val="202B33"/>
-                </a:solidFill>
-                <a:latin typeface="Arial"/>
-                <a:ea typeface="Arial"/>
-                <a:cs typeface="Arial"/>
-              </a:rPr>
-              <a:t xml:space="preserve">The org chart is a record of earlier</a:t>
-            </a:r>
-            <a:endParaRPr lang="en-US" sz="1500"/>
-          </a:p>
-          <a:p>
-            <a:pPr marL="0" indent="0">
-              <a:lnSpc>
-                <a:spcPts val="1950"/>
-              </a:lnSpc>
-              <a:spcAft>
-                <a:spcPts val="0"/>
-              </a:spcAft>
-              <a:buNone/>
-            </a:pPr>
-            <a:r>
-              <a:rPr lang="en-US" sz="1500" b="0">
-                <a:solidFill>
-                  <a:srgbClr val="202B33"/>
-                </a:solidFill>
-                <a:latin typeface="Arial"/>
-                <a:ea typeface="Arial"/>
-                <a:cs typeface="Arial"/>
-              </a:rPr>
-              <a:t xml:space="preserve">tradeoffs. You are allowed to make new</a:t>
-            </a:r>
-            <a:endParaRPr lang="en-US" sz="1500"/>
-          </a:p>
-          <a:p>
-            <a:pPr marL="0" indent="0">
-              <a:lnSpc>
-                <a:spcPts val="1950"/>
-              </a:lnSpc>
-              <a:spcAft>
-                <a:spcPts val="0"/>
-              </a:spcAft>
-              <a:buNone/>
-            </a:pPr>
-            <a:r>
-              <a:rPr lang="en-US" sz="1500" b="0">
-                <a:solidFill>
-                  <a:srgbClr val="202B33"/>
-                </a:solidFill>
-                <a:latin typeface="Arial"/>
-                <a:ea typeface="Arial"/>
-                <a:cs typeface="Arial"/>
-              </a:rPr>
-              <a:t xml:space="preserve">ones. Automate the right things. Keep the</a:t>
-            </a:r>
-            <a:endParaRPr lang="en-US" sz="1500"/>
-          </a:p>
-          <a:p>
-            <a:pPr marL="0" indent="0">
-              <a:lnSpc>
-                <a:spcPts val="1950"/>
-              </a:lnSpc>
-              <a:spcAft>
-                <a:spcPts val="0"/>
-              </a:spcAft>
-              <a:buNone/>
-            </a:pPr>
-            <a:r>
-              <a:rPr lang="en-US" sz="1500" b="0">
-                <a:solidFill>
-                  <a:srgbClr val="202B33"/>
-                </a:solidFill>
-                <a:latin typeface="Arial"/>
-                <a:ea typeface="Arial"/>
-                <a:cs typeface="Arial"/>
-              </a:rPr>
-              <a:t xml:space="preserve">taste.</a:t>
+              <a:t xml:space="preserve">makes the first version cheap. It does not</a:t>
+            </a:r>
+            <a:endParaRPr lang="en-US" sz="1500"/>
+          </a:p>
+          <a:p>
+            <a:pPr marL="0" indent="0">
+              <a:lnSpc>
+                <a:spcPts val="1950"/>
+              </a:lnSpc>
+              <a:spcAft>
+                <a:spcPts val="0"/>
+              </a:spcAft>
+              <a:buNone/>
+            </a:pPr>
+            <a:r>
+              <a:rPr lang="en-US" sz="1500" b="0">
+                <a:solidFill>
+                  <a:srgbClr val="202B33"/>
+                </a:solidFill>
+                <a:latin typeface="Arial"/>
+                <a:ea typeface="Arial"/>
+                <a:cs typeface="Arial"/>
+              </a:rPr>
+              <a:t xml:space="preserve">make the tenth year cheap.</a:t>
+            </a:r>
+            <a:endParaRPr lang="en-US" sz="1500"/>
+          </a:p>
+          <a:p>
+            <a:pPr marL="0" indent="0">
+              <a:lnSpc>
+                <a:spcPts val="1950"/>
+              </a:lnSpc>
+              <a:spcAft>
+                <a:spcPts val="0"/>
+              </a:spcAft>
+              <a:buNone/>
+            </a:pPr>
+            <a:r>
+              <a:rPr lang="en-US" sz="1500" b="0">
+                <a:solidFill>
+                  <a:srgbClr val="202B33"/>
+                </a:solidFill>
+                <a:latin typeface="Arial"/>
+                <a:ea typeface="Arial"/>
+                <a:cs typeface="Arial"/>
+              </a:rPr>
+              <a:t xml:space="preserve"/>
+            </a:r>
+            <a:endParaRPr lang="en-US" sz="1500"/>
+          </a:p>
+          <a:p>
+            <a:pPr marL="0" indent="0">
+              <a:lnSpc>
+                <a:spcPts val="1950"/>
+              </a:lnSpc>
+              <a:spcAft>
+                <a:spcPts val="0"/>
+              </a:spcAft>
+              <a:buNone/>
+            </a:pPr>
+            <a:r>
+              <a:rPr lang="en-US" sz="1500" b="0">
+                <a:solidFill>
+                  <a:srgbClr val="202B33"/>
+                </a:solidFill>
+                <a:latin typeface="Arial"/>
+                <a:ea typeface="Arial"/>
+                <a:cs typeface="Arial"/>
+              </a:rPr>
+              <a:t xml:space="preserve">And throwaway software is a taste most of</a:t>
+            </a:r>
+            <a:endParaRPr lang="en-US" sz="1500"/>
+          </a:p>
+          <a:p>
+            <a:pPr marL="0" indent="0">
+              <a:lnSpc>
+                <a:spcPts val="1950"/>
+              </a:lnSpc>
+              <a:spcAft>
+                <a:spcPts val="0"/>
+              </a:spcAft>
+              <a:buNone/>
+            </a:pPr>
+            <a:r>
+              <a:rPr lang="en-US" sz="1500" b="0">
+                <a:solidFill>
+                  <a:srgbClr val="202B33"/>
+                </a:solidFill>
+                <a:latin typeface="Arial"/>
+                <a:ea typeface="Arial"/>
+                <a:cs typeface="Arial"/>
+              </a:rPr>
+              <a:t xml:space="preserve">this room has and most of the world does</a:t>
+            </a:r>
+            <a:endParaRPr lang="en-US" sz="1500"/>
+          </a:p>
+          <a:p>
+            <a:pPr marL="0" indent="0">
+              <a:lnSpc>
+                <a:spcPts val="1950"/>
+              </a:lnSpc>
+              <a:spcAft>
+                <a:spcPts val="0"/>
+              </a:spcAft>
+              <a:buNone/>
+            </a:pPr>
+            <a:r>
+              <a:rPr lang="en-US" sz="1500" b="0">
+                <a:solidFill>
+                  <a:srgbClr val="202B33"/>
+                </a:solidFill>
+                <a:latin typeface="Arial"/>
+                <a:ea typeface="Arial"/>
+                <a:cs typeface="Arial"/>
+              </a:rPr>
+              <a:t xml:space="preserve">not. We are early adopters; we are</a:t>
+            </a:r>
+            <a:endParaRPr lang="en-US" sz="1500"/>
+          </a:p>
+          <a:p>
+            <a:pPr marL="0" indent="0">
+              <a:lnSpc>
+                <a:spcPts val="1950"/>
+              </a:lnSpc>
+              <a:spcAft>
+                <a:spcPts val="0"/>
+              </a:spcAft>
+              <a:buNone/>
+            </a:pPr>
+            <a:r>
+              <a:rPr lang="en-US" sz="1500" b="0">
+                <a:solidFill>
+                  <a:srgbClr val="202B33"/>
+                </a:solidFill>
+                <a:latin typeface="Arial"/>
+                <a:ea typeface="Arial"/>
+                <a:cs typeface="Arial"/>
+              </a:rPr>
+              <a:t xml:space="preserve">delighted to regenerate a tool rather than</a:t>
+            </a:r>
+            <a:endParaRPr lang="en-US" sz="1500"/>
+          </a:p>
+          <a:p>
+            <a:pPr marL="0" indent="0">
+              <a:lnSpc>
+                <a:spcPts val="1950"/>
+              </a:lnSpc>
+              <a:spcAft>
+                <a:spcPts val="0"/>
+              </a:spcAft>
+              <a:buNone/>
+            </a:pPr>
+            <a:r>
+              <a:rPr lang="en-US" sz="1500" b="0">
+                <a:solidFill>
+                  <a:srgbClr val="202B33"/>
+                </a:solidFill>
+                <a:latin typeface="Arial"/>
+                <a:ea typeface="Arial"/>
+                <a:cs typeface="Arial"/>
+              </a:rPr>
+              <a:t xml:space="preserve">maintain it. Normal people are not turned</a:t>
+            </a:r>
+            <a:endParaRPr lang="en-US" sz="1500"/>
+          </a:p>
+          <a:p>
+            <a:pPr marL="0" indent="0">
+              <a:lnSpc>
+                <a:spcPts val="1950"/>
+              </a:lnSpc>
+              <a:spcAft>
+                <a:spcPts val="0"/>
+              </a:spcAft>
+              <a:buNone/>
+            </a:pPr>
+            <a:r>
+              <a:rPr lang="en-US" sz="1500" b="0">
+                <a:solidFill>
+                  <a:srgbClr val="202B33"/>
+                </a:solidFill>
+                <a:latin typeface="Arial"/>
+                <a:ea typeface="Arial"/>
+                <a:cs typeface="Arial"/>
+              </a:rPr>
+              <a:t xml:space="preserve">on by the idea of vibe coding their own</a:t>
+            </a:r>
+            <a:endParaRPr lang="en-US" sz="1500"/>
+          </a:p>
+          <a:p>
+            <a:pPr marL="0" indent="0">
+              <a:lnSpc>
+                <a:spcPts val="1950"/>
+              </a:lnSpc>
+              <a:spcAft>
+                <a:spcPts val="0"/>
+              </a:spcAft>
+              <a:buNone/>
+            </a:pPr>
+            <a:r>
+              <a:rPr lang="en-US" sz="1500" b="0">
+                <a:solidFill>
+                  <a:srgbClr val="202B33"/>
+                </a:solidFill>
+                <a:latin typeface="Arial"/>
+                <a:ea typeface="Arial"/>
+                <a:cs typeface="Arial"/>
+              </a:rPr>
+              <a:t xml:space="preserve">recipe tracker, never mind a Slack</a:t>
+            </a:r>
+            <a:endParaRPr lang="en-US" sz="1500"/>
+          </a:p>
+          <a:p>
+            <a:pPr marL="0" indent="0">
+              <a:lnSpc>
+                <a:spcPts val="1950"/>
+              </a:lnSpc>
+              <a:spcAft>
+                <a:spcPts val="0"/>
+              </a:spcAft>
+              <a:buNone/>
+            </a:pPr>
+            <a:r>
+              <a:rPr lang="en-US" sz="1500" b="0">
+                <a:solidFill>
+                  <a:srgbClr val="202B33"/>
+                </a:solidFill>
+                <a:latin typeface="Arial"/>
+                <a:ea typeface="Arial"/>
+                <a:cs typeface="Arial"/>
+              </a:rPr>
+              <a:t xml:space="preserve">replacement. What they will accept is an</a:t>
+            </a:r>
+            <a:endParaRPr lang="en-US" sz="1500"/>
+          </a:p>
+          <a:p>
+            <a:pPr marL="0" indent="0">
+              <a:lnSpc>
+                <a:spcPts val="1950"/>
+              </a:lnSpc>
+              <a:spcAft>
+                <a:spcPts val="0"/>
+              </a:spcAft>
+              <a:buNone/>
+            </a:pPr>
+            <a:r>
+              <a:rPr lang="en-US" sz="1500" b="0">
+                <a:solidFill>
+                  <a:srgbClr val="202B33"/>
+                </a:solidFill>
+                <a:latin typeface="Arial"/>
+                <a:ea typeface="Arial"/>
+                <a:cs typeface="Arial"/>
+              </a:rPr>
+              <a:t xml:space="preserve">interface generated for them, adapting in</a:t>
+            </a:r>
+            <a:endParaRPr lang="en-US" sz="1500"/>
+          </a:p>
+          <a:p>
+            <a:pPr marL="0" indent="0">
+              <a:lnSpc>
+                <a:spcPts val="1950"/>
+              </a:lnSpc>
+              <a:spcAft>
+                <a:spcPts val="0"/>
+              </a:spcAft>
+              <a:buNone/>
+            </a:pPr>
+            <a:r>
+              <a:rPr lang="en-US" sz="1500" b="0">
+                <a:solidFill>
+                  <a:srgbClr val="202B33"/>
+                </a:solidFill>
+                <a:latin typeface="Arial"/>
+                <a:ea typeface="Arial"/>
+                <a:cs typeface="Arial"/>
+              </a:rPr>
+              <a:t xml:space="preserve">real time, that they never had to choose</a:t>
+            </a:r>
+            <a:endParaRPr lang="en-US" sz="1500"/>
+          </a:p>
+          <a:p>
+            <a:pPr marL="0" indent="0">
+              <a:lnSpc>
+                <a:spcPts val="1950"/>
+              </a:lnSpc>
+              <a:spcAft>
+                <a:spcPts val="0"/>
+              </a:spcAft>
+              <a:buNone/>
+            </a:pPr>
+            <a:r>
+              <a:rPr lang="en-US" sz="1500" b="0">
+                <a:solidFill>
+                  <a:srgbClr val="202B33"/>
+                </a:solidFill>
+                <a:latin typeface="Arial"/>
+                <a:ea typeface="Arial"/>
+                <a:cs typeface="Arial"/>
+              </a:rPr>
+              <a:t xml:space="preserve">from a menu of products.</a:t>
             </a:r>
             <a:endParaRPr lang="en-US" sz="1500"/>
           </a:p>
@@ -9255,7 +10403,7 @@
                 <a:ea typeface="Arial"/>
                 <a:cs typeface="Arial"/>
               </a:rPr>
-              <a:t xml:space="preserve">SOURCE REFERENCES</a:t>
+              <a:t xml:space="preserve">11 / 12    SOURCE SLIDE 15</a:t>
             </a:r>
             <a:endParaRPr lang="en-US" sz="1050"/>
           </a:p>
@@ -9304,7 +10452,7 @@
                 <a:ea typeface="Arial"/>
                 <a:cs typeface="Arial"/>
               </a:rPr>
-              <a:t xml:space="preserve">References</a:t>
+              <a:t xml:space="preserve">Minority Report, With Terminals (continued)</a:t>
             </a:r>
             <a:endParaRPr lang="en-US" sz="2550"/>
           </a:p>
@@ -9353,237 +10501,398 @@
                 <a:ea typeface="Arial"/>
                 <a:cs typeface="Arial"/>
               </a:rPr>
-              <a:t xml:space="preserve">Melvin E. Conway (1968), How Do Committees</a:t>
-            </a:r>
-            <a:endParaRPr lang="en-US" sz="1500"/>
-          </a:p>
-          <a:p>
-            <a:pPr marL="0" indent="0">
-              <a:lnSpc>
-                <a:spcPts val="1950"/>
-              </a:lnSpc>
-              <a:spcAft>
-                <a:spcPts val="0"/>
-              </a:spcAft>
-              <a:buNone/>
-            </a:pPr>
-            <a:r>
-              <a:rPr lang="en-US" sz="1500" b="0">
-                <a:solidFill>
-                  <a:srgbClr val="202B33"/>
-                </a:solidFill>
-                <a:latin typeface="Arial"/>
-                <a:ea typeface="Arial"/>
-                <a:cs typeface="Arial"/>
-              </a:rPr>
-              <a:t xml:space="preserve">Invent? —</a:t>
-            </a:r>
-            <a:endParaRPr lang="en-US" sz="1500"/>
-          </a:p>
-          <a:p>
-            <a:pPr marL="0" indent="0">
-              <a:lnSpc>
-                <a:spcPts val="1950"/>
-              </a:lnSpc>
-              <a:spcAft>
-                <a:spcPts val="0"/>
-              </a:spcAft>
-              <a:buNone/>
-            </a:pPr>
-            <a:r>
-              <a:rPr lang="en-US" sz="1500" b="0">
-                <a:solidFill>
-                  <a:srgbClr val="202B33"/>
-                </a:solidFill>
-                <a:latin typeface="Arial"/>
-                <a:ea typeface="Arial"/>
-                <a:cs typeface="Arial"/>
-              </a:rPr>
-              <a:t xml:space="preserve">https://melconway.com/Home/pdf/committees.pdf,</a:t>
-            </a:r>
-            <a:endParaRPr lang="en-US" sz="1500"/>
-          </a:p>
-          <a:p>
-            <a:pPr marL="0" indent="0">
-              <a:lnSpc>
-                <a:spcPts val="1950"/>
-              </a:lnSpc>
-              <a:spcAft>
-                <a:spcPts val="0"/>
-              </a:spcAft>
-              <a:buNone/>
-            </a:pPr>
-            <a:r>
-              <a:rPr lang="en-US" sz="1500" b="0">
-                <a:solidFill>
-                  <a:srgbClr val="202B33"/>
-                </a:solidFill>
-                <a:latin typeface="Arial"/>
-                <a:ea typeface="Arial"/>
-                <a:cs typeface="Arial"/>
-              </a:rPr>
-              <a:t xml:space="preserve">Datamation, April, 28–31.</a:t>
-            </a:r>
-            <a:endParaRPr lang="en-US" sz="1500"/>
-          </a:p>
-          <a:p>
-            <a:pPr marL="0" indent="0">
-              <a:lnSpc>
-                <a:spcPts val="1950"/>
-              </a:lnSpc>
-              <a:spcAft>
-                <a:spcPts val="0"/>
-              </a:spcAft>
-              <a:buNone/>
-            </a:pPr>
-            <a:r>
-              <a:rPr lang="en-US" sz="1500" b="0">
-                <a:solidFill>
-                  <a:srgbClr val="202B33"/>
-                </a:solidFill>
-                <a:latin typeface="Arial"/>
-                <a:ea typeface="Arial"/>
-                <a:cs typeface="Arial"/>
-              </a:rPr>
-              <a:t xml:space="preserve"/>
-            </a:r>
-            <a:endParaRPr lang="en-US" sz="1500"/>
-          </a:p>
-          <a:p>
-            <a:pPr marL="0" indent="0">
-              <a:lnSpc>
-                <a:spcPts val="1950"/>
-              </a:lnSpc>
-              <a:spcAft>
-                <a:spcPts val="0"/>
-              </a:spcAft>
-              <a:buNone/>
-            </a:pPr>
-            <a:r>
-              <a:rPr lang="en-US" sz="1500" b="0">
-                <a:solidFill>
-                  <a:srgbClr val="202B33"/>
-                </a:solidFill>
-                <a:latin typeface="Arial"/>
-                <a:ea typeface="Arial"/>
-                <a:cs typeface="Arial"/>
-              </a:rPr>
-              <a:t xml:space="preserve">Ronald H. Coase (1937), The Nature of the</a:t>
-            </a:r>
-            <a:endParaRPr lang="en-US" sz="1500"/>
-          </a:p>
-          <a:p>
-            <a:pPr marL="0" indent="0">
-              <a:lnSpc>
-                <a:spcPts val="1950"/>
-              </a:lnSpc>
-              <a:spcAft>
-                <a:spcPts val="0"/>
-              </a:spcAft>
-              <a:buNone/>
-            </a:pPr>
-            <a:r>
-              <a:rPr lang="en-US" sz="1500" b="0">
-                <a:solidFill>
-                  <a:srgbClr val="202B33"/>
-                </a:solidFill>
-                <a:latin typeface="Arial"/>
-                <a:ea typeface="Arial"/>
-                <a:cs typeface="Arial"/>
-              </a:rPr>
-              <a:t xml:space="preserve">Firm —</a:t>
-            </a:r>
-            <a:endParaRPr lang="en-US" sz="1500"/>
-          </a:p>
-          <a:p>
-            <a:pPr marL="0" indent="0">
-              <a:lnSpc>
-                <a:spcPts val="1950"/>
-              </a:lnSpc>
-              <a:spcAft>
-                <a:spcPts val="0"/>
-              </a:spcAft>
-              <a:buNone/>
-            </a:pPr>
-            <a:r>
-              <a:rPr lang="en-US" sz="1500" b="0">
-                <a:solidFill>
-                  <a:srgbClr val="202B33"/>
-                </a:solidFill>
-                <a:latin typeface="Arial"/>
-                <a:ea typeface="Arial"/>
-                <a:cs typeface="Arial"/>
-              </a:rPr>
-              <a:t xml:space="preserve">https://onlinelibrary.wiley.com/doi/10.1111/j.1468-0335.1937.tb00002.x),</a:t>
-            </a:r>
-            <a:endParaRPr lang="en-US" sz="1500"/>
-          </a:p>
-          <a:p>
-            <a:pPr marL="0" indent="0">
-              <a:lnSpc>
-                <a:spcPts val="1950"/>
-              </a:lnSpc>
-              <a:spcAft>
-                <a:spcPts val="0"/>
-              </a:spcAft>
-              <a:buNone/>
-            </a:pPr>
-            <a:r>
-              <a:rPr lang="en-US" sz="1500" b="0">
-                <a:solidFill>
-                  <a:srgbClr val="202B33"/>
-                </a:solidFill>
-                <a:latin typeface="Arial"/>
-                <a:ea typeface="Arial"/>
-                <a:cs typeface="Arial"/>
-              </a:rPr>
-              <a:t xml:space="preserve">Economica 4(16, 386–405. The agent-design</a:t>
-            </a:r>
-            <a:endParaRPr lang="en-US" sz="1500"/>
-          </a:p>
-          <a:p>
-            <a:pPr marL="0" indent="0">
-              <a:lnSpc>
-                <a:spcPts val="1950"/>
-              </a:lnSpc>
-              <a:spcAft>
-                <a:spcPts val="0"/>
-              </a:spcAft>
-              <a:buNone/>
-            </a:pPr>
-            <a:r>
-              <a:rPr lang="en-US" sz="1500" b="0">
-                <a:solidFill>
-                  <a:srgbClr val="202B33"/>
-                </a:solidFill>
-                <a:latin typeface="Arial"/>
-                <a:ea typeface="Arial"/>
-                <a:cs typeface="Arial"/>
-              </a:rPr>
-              <a:t xml:space="preserve">application is the speaker’s argument.</a:t>
-            </a:r>
-            <a:endParaRPr lang="en-US" sz="1500"/>
-          </a:p>
-          <a:p>
-            <a:pPr marL="0" indent="0">
-              <a:lnSpc>
-                <a:spcPts val="1950"/>
-              </a:lnSpc>
-              <a:spcAft>
-                <a:spcPts val="0"/>
-              </a:spcAft>
-              <a:buNone/>
-            </a:pPr>
-            <a:r>
-              <a:rPr lang="en-US" sz="1500" b="0">
-                <a:solidFill>
-                  <a:srgbClr val="202B33"/>
-                </a:solidFill>
-                <a:latin typeface="Arial"/>
-                <a:ea typeface="Arial"/>
-                <a:cs typeface="Arial"/>
-              </a:rPr>
-              <a:t xml:space="preserve"/>
+              <a:t xml:space="preserve">Which raises the question this room should</a:t>
+            </a:r>
+            <a:endParaRPr lang="en-US" sz="1500"/>
+          </a:p>
+          <a:p>
+            <a:pPr marL="0" indent="0">
+              <a:lnSpc>
+                <a:spcPts val="1950"/>
+              </a:lnSpc>
+              <a:spcAft>
+                <a:spcPts val="0"/>
+              </a:spcAft>
+              <a:buNone/>
+            </a:pPr>
+            <a:r>
+              <a:rPr lang="en-US" sz="1500" b="0">
+                <a:solidFill>
+                  <a:srgbClr val="202B33"/>
+                </a:solidFill>
+                <a:latin typeface="Arial"/>
+                <a:ea typeface="Arial"/>
+                <a:cs typeface="Arial"/>
+              </a:rPr>
+              <a:t xml:space="preserve">actually be arguing about. Should OpenAI</a:t>
+            </a:r>
+            <a:endParaRPr lang="en-US" sz="1500"/>
+          </a:p>
+          <a:p>
+            <a:pPr marL="0" indent="0">
+              <a:lnSpc>
+                <a:spcPts val="1950"/>
+              </a:lnSpc>
+              <a:spcAft>
+                <a:spcPts val="0"/>
+              </a:spcAft>
+              <a:buNone/>
+            </a:pPr>
+            <a:r>
+              <a:rPr lang="en-US" sz="1500" b="0">
+                <a:solidFill>
+                  <a:srgbClr val="202B33"/>
+                </a:solidFill>
+                <a:latin typeface="Arial"/>
+                <a:ea typeface="Arial"/>
+                <a:cs typeface="Arial"/>
+              </a:rPr>
+              <a:t xml:space="preserve">and Anthropic end up owning every software</a:t>
+            </a:r>
+            <a:endParaRPr lang="en-US" sz="1500"/>
+          </a:p>
+          <a:p>
+            <a:pPr marL="0" indent="0">
+              <a:lnSpc>
+                <a:spcPts val="1950"/>
+              </a:lnSpc>
+              <a:spcAft>
+                <a:spcPts val="0"/>
+              </a:spcAft>
+              <a:buNone/>
+            </a:pPr>
+            <a:r>
+              <a:rPr lang="en-US" sz="1500" b="0">
+                <a:solidFill>
+                  <a:srgbClr val="202B33"/>
+                </a:solidFill>
+                <a:latin typeface="Arial"/>
+                <a:ea typeface="Arial"/>
+                <a:cs typeface="Arial"/>
+              </a:rPr>
+              <a:t xml:space="preserve">channel? Watch what happens when the</a:t>
+            </a:r>
+            <a:endParaRPr lang="en-US" sz="1500"/>
+          </a:p>
+          <a:p>
+            <a:pPr marL="0" indent="0">
+              <a:lnSpc>
+                <a:spcPts val="1950"/>
+              </a:lnSpc>
+              <a:spcAft>
+                <a:spcPts val="0"/>
+              </a:spcAft>
+              <a:buNone/>
+            </a:pPr>
+            <a:r>
+              <a:rPr lang="en-US" sz="1500" b="0">
+                <a:solidFill>
+                  <a:srgbClr val="202B33"/>
+                </a:solidFill>
+                <a:latin typeface="Arial"/>
+                <a:ea typeface="Arial"/>
+                <a:cs typeface="Arial"/>
+              </a:rPr>
+              <a:t xml:space="preserve">assistants ship real-time collaboration:</a:t>
+            </a:r>
+            <a:endParaRPr lang="en-US" sz="1500"/>
+          </a:p>
+          <a:p>
+            <a:pPr marL="0" indent="0">
+              <a:lnSpc>
+                <a:spcPts val="1950"/>
+              </a:lnSpc>
+              <a:spcAft>
+                <a:spcPts val="0"/>
+              </a:spcAft>
+              <a:buNone/>
+            </a:pPr>
+            <a:r>
+              <a:rPr lang="en-US" sz="1500" b="0">
+                <a:solidFill>
+                  <a:srgbClr val="202B33"/>
+                </a:solidFill>
+                <a:latin typeface="Arial"/>
+                <a:ea typeface="Arial"/>
+                <a:cs typeface="Arial"/>
+              </a:rPr>
+              <a:t xml:space="preserve">who spends less time in email, Slack and</a:t>
+            </a:r>
+            <a:endParaRPr lang="en-US" sz="1500"/>
+          </a:p>
+          <a:p>
+            <a:pPr marL="0" indent="0">
+              <a:lnSpc>
+                <a:spcPts val="1950"/>
+              </a:lnSpc>
+              <a:spcAft>
+                <a:spcPts val="0"/>
+              </a:spcAft>
+              <a:buNone/>
+            </a:pPr>
+            <a:r>
+              <a:rPr lang="en-US" sz="1500" b="0">
+                <a:solidFill>
+                  <a:srgbClr val="202B33"/>
+                </a:solidFill>
+                <a:latin typeface="Arial"/>
+                <a:ea typeface="Arial"/>
+                <a:cs typeface="Arial"/>
+              </a:rPr>
+              <a:t xml:space="preserve">Google Docs then? I can already make and</a:t>
+            </a:r>
+            <a:endParaRPr lang="en-US" sz="1500"/>
+          </a:p>
+          <a:p>
+            <a:pPr marL="0" indent="0">
+              <a:lnSpc>
+                <a:spcPts val="1950"/>
+              </a:lnSpc>
+              <a:spcAft>
+                <a:spcPts val="0"/>
+              </a:spcAft>
+              <a:buNone/>
+            </a:pPr>
+            <a:r>
+              <a:rPr lang="en-US" sz="1500" b="0">
+                <a:solidFill>
+                  <a:srgbClr val="202B33"/>
+                </a:solidFill>
+                <a:latin typeface="Arial"/>
+                <a:ea typeface="Arial"/>
+                <a:cs typeface="Arial"/>
+              </a:rPr>
+              <a:t xml:space="preserve">edit images and video in ways that make me</a:t>
+            </a:r>
+            <a:endParaRPr lang="en-US" sz="1500"/>
+          </a:p>
+          <a:p>
+            <a:pPr marL="0" indent="0">
+              <a:lnSpc>
+                <a:spcPts val="1950"/>
+              </a:lnSpc>
+              <a:spcAft>
+                <a:spcPts val="0"/>
+              </a:spcAft>
+              <a:buNone/>
+            </a:pPr>
+            <a:r>
+              <a:rPr lang="en-US" sz="1500" b="0">
+                <a:solidFill>
+                  <a:srgbClr val="202B33"/>
+                </a:solidFill>
+                <a:latin typeface="Arial"/>
+                <a:ea typeface="Arial"/>
+                <a:cs typeface="Arial"/>
+              </a:rPr>
+              <a:t xml:space="preserve">less likely to open Photoshop or DaVinci.</a:t>
+            </a:r>
+            <a:endParaRPr lang="en-US" sz="1500"/>
+          </a:p>
+          <a:p>
+            <a:pPr marL="0" indent="0">
+              <a:lnSpc>
+                <a:spcPts val="1950"/>
+              </a:lnSpc>
+              <a:spcAft>
+                <a:spcPts val="0"/>
+              </a:spcAft>
+              <a:buNone/>
+            </a:pPr>
+            <a:r>
+              <a:rPr lang="en-US" sz="1500" b="0">
+                <a:solidFill>
+                  <a:srgbClr val="202B33"/>
+                </a:solidFill>
+                <a:latin typeface="Arial"/>
+                <a:ea typeface="Arial"/>
+                <a:cs typeface="Arial"/>
+              </a:rPr>
+              <a:t xml:space="preserve">If I need a jingle for the company, I ask</a:t>
+            </a:r>
+            <a:endParaRPr lang="en-US" sz="1500"/>
+          </a:p>
+          <a:p>
+            <a:pPr marL="0" indent="0">
+              <a:lnSpc>
+                <a:spcPts val="1950"/>
+              </a:lnSpc>
+              <a:spcAft>
+                <a:spcPts val="0"/>
+              </a:spcAft>
+              <a:buNone/>
+            </a:pPr>
+            <a:r>
+              <a:rPr lang="en-US" sz="1500" b="0">
+                <a:solidFill>
+                  <a:srgbClr val="202B33"/>
+                </a:solidFill>
+                <a:latin typeface="Arial"/>
+                <a:ea typeface="Arial"/>
+                <a:cs typeface="Arial"/>
+              </a:rPr>
+              <a:t xml:space="preserve">Suno and it is done. So is everything you</a:t>
+            </a:r>
+            <a:endParaRPr lang="en-US" sz="1500"/>
+          </a:p>
+          <a:p>
+            <a:pPr marL="0" indent="0">
+              <a:lnSpc>
+                <a:spcPts val="1950"/>
+              </a:lnSpc>
+              <a:spcAft>
+                <a:spcPts val="0"/>
+              </a:spcAft>
+              <a:buNone/>
+            </a:pPr>
+            <a:r>
+              <a:rPr lang="en-US" sz="1500" b="0">
+                <a:solidFill>
+                  <a:srgbClr val="202B33"/>
+                </a:solidFill>
+                <a:latin typeface="Arial"/>
+                <a:ea typeface="Arial"/>
+                <a:cs typeface="Arial"/>
+              </a:rPr>
+              <a:t xml:space="preserve">spent a lifetime learning, mastering and</a:t>
+            </a:r>
+            <a:endParaRPr lang="en-US" sz="1500"/>
+          </a:p>
+          <a:p>
+            <a:pPr marL="0" indent="0">
+              <a:lnSpc>
+                <a:spcPts val="1950"/>
+              </a:lnSpc>
+              <a:spcAft>
+                <a:spcPts val="0"/>
+              </a:spcAft>
+              <a:buNone/>
+            </a:pPr>
+            <a:r>
+              <a:rPr lang="en-US" sz="1500" b="0">
+                <a:solidFill>
+                  <a:srgbClr val="202B33"/>
+                </a:solidFill>
+                <a:latin typeface="Arial"/>
+                <a:ea typeface="Arial"/>
+                <a:cs typeface="Arial"/>
+              </a:rPr>
+              <a:t xml:space="preserve">fighting with about to be irrelevant? Yes.</a:t>
+            </a:r>
+            <a:endParaRPr lang="en-US" sz="1500"/>
+          </a:p>
+          <a:p>
+            <a:pPr marL="0" indent="0">
+              <a:lnSpc>
+                <a:spcPts val="1950"/>
+              </a:lnSpc>
+              <a:spcAft>
+                <a:spcPts val="0"/>
+              </a:spcAft>
+              <a:buNone/>
+            </a:pPr>
+            <a:r>
+              <a:rPr lang="en-US" sz="1500" b="0">
+                <a:solidFill>
+                  <a:srgbClr val="202B33"/>
+                </a:solidFill>
+                <a:latin typeface="Arial"/>
+                <a:ea typeface="Arial"/>
+                <a:cs typeface="Arial"/>
+              </a:rPr>
+              <a:t xml:space="preserve">At least as you know it.</a:t>
+            </a:r>
+            <a:endParaRPr lang="en-US" sz="1500"/>
+          </a:p>
+          <a:p>
+            <a:pPr marL="0" indent="0">
+              <a:lnSpc>
+                <a:spcPts val="1950"/>
+              </a:lnSpc>
+              <a:spcAft>
+                <a:spcPts val="0"/>
+              </a:spcAft>
+              <a:buNone/>
+            </a:pPr>
+            <a:r>
+              <a:rPr lang="en-US" sz="1500" b="0">
+                <a:solidFill>
+                  <a:srgbClr val="202B33"/>
+                </a:solidFill>
+                <a:latin typeface="Arial"/>
+                <a:ea typeface="Arial"/>
+                <a:cs typeface="Arial"/>
+              </a:rPr>
+              <a:t xml:space="preserve"/>
+            </a:r>
+            <a:endParaRPr lang="en-US" sz="1500"/>
+          </a:p>
+          <a:p>
+            <a:pPr marL="0" indent="0">
+              <a:lnSpc>
+                <a:spcPts val="1950"/>
+              </a:lnSpc>
+              <a:spcAft>
+                <a:spcPts val="0"/>
+              </a:spcAft>
+              <a:buNone/>
+            </a:pPr>
+            <a:r>
+              <a:rPr lang="en-US" sz="1500" b="0">
+                <a:solidFill>
+                  <a:srgbClr val="202B33"/>
+                </a:solidFill>
+                <a:latin typeface="Arial"/>
+                <a:ea typeface="Arial"/>
+                <a:cs typeface="Arial"/>
+              </a:rPr>
+              <a:t xml:space="preserve">What replaces it looks less like a grid of</a:t>
+            </a:r>
+            <a:endParaRPr lang="en-US" sz="1500"/>
+          </a:p>
+          <a:p>
+            <a:pPr marL="0" indent="0">
+              <a:lnSpc>
+                <a:spcPts val="1950"/>
+              </a:lnSpc>
+              <a:spcAft>
+                <a:spcPts val="0"/>
+              </a:spcAft>
+              <a:buNone/>
+            </a:pPr>
+            <a:r>
+              <a:rPr lang="en-US" sz="1500" b="0">
+                <a:solidFill>
+                  <a:srgbClr val="202B33"/>
+                </a:solidFill>
+                <a:latin typeface="Arial"/>
+                <a:ea typeface="Arial"/>
+                <a:cs typeface="Arial"/>
+              </a:rPr>
+              <a:t xml:space="preserve">apps and more like Minority Report, with a</a:t>
+            </a:r>
+            <a:endParaRPr lang="en-US" sz="1500"/>
+          </a:p>
+          <a:p>
+            <a:pPr marL="0" indent="0">
+              <a:lnSpc>
+                <a:spcPts val="1950"/>
+              </a:lnSpc>
+              <a:spcAft>
+                <a:spcPts val="0"/>
+              </a:spcAft>
+              <a:buNone/>
+            </a:pPr>
+            <a:r>
+              <a:rPr lang="en-US" sz="1500" b="0">
+                <a:solidFill>
+                  <a:srgbClr val="202B33"/>
+                </a:solidFill>
+                <a:latin typeface="Arial"/>
+                <a:ea typeface="Arial"/>
+                <a:cs typeface="Arial"/>
+              </a:rPr>
+              <a:t xml:space="preserve">surprise revival of the terminal. Which is</a:t>
             </a:r>
             <a:endParaRPr lang="en-US" sz="1500"/>
           </a:p>
@@ -9632,214 +10941,375 @@
                 <a:ea typeface="Arial"/>
                 <a:cs typeface="Arial"/>
               </a:rPr>
-              <a:t xml:space="preserve">Thoughtworks, Inverse Conway Maneuver —</a:t>
-            </a:r>
-            <a:endParaRPr lang="en-US" sz="1500"/>
-          </a:p>
-          <a:p>
-            <a:pPr marL="0" indent="0">
-              <a:lnSpc>
-                <a:spcPts val="1950"/>
-              </a:lnSpc>
-              <a:spcAft>
-                <a:spcPts val="0"/>
-              </a:spcAft>
-              <a:buNone/>
-            </a:pPr>
-            <a:r>
-              <a:rPr lang="en-US" sz="1500" b="0">
-                <a:solidFill>
-                  <a:srgbClr val="202B33"/>
-                </a:solidFill>
-                <a:latin typeface="Arial"/>
-                <a:ea typeface="Arial"/>
-                <a:cs typeface="Arial"/>
-              </a:rPr>
-              <a:t xml:space="preserve">https://www.thoughtworks.com/en-br/radar/techniques/inverse-conway-maneuver),</a:t>
-            </a:r>
-            <a:endParaRPr lang="en-US" sz="1500"/>
-          </a:p>
-          <a:p>
-            <a:pPr marL="0" indent="0">
-              <a:lnSpc>
-                <a:spcPts val="1950"/>
-              </a:lnSpc>
-              <a:spcAft>
-                <a:spcPts val="0"/>
-              </a:spcAft>
-              <a:buNone/>
-            </a:pPr>
-            <a:r>
-              <a:rPr lang="en-US" sz="1500" b="0">
-                <a:solidFill>
-                  <a:srgbClr val="202B33"/>
-                </a:solidFill>
-                <a:latin typeface="Arial"/>
-                <a:ea typeface="Arial"/>
-                <a:cs typeface="Arial"/>
-              </a:rPr>
-              <a:t xml:space="preserve">2014/2015. Skelton and Pais, [Team</a:t>
-            </a:r>
-            <a:endParaRPr lang="en-US" sz="1500"/>
-          </a:p>
-          <a:p>
-            <a:pPr marL="0" indent="0">
-              <a:lnSpc>
-                <a:spcPts val="1950"/>
-              </a:lnSpc>
-              <a:spcAft>
-                <a:spcPts val="0"/>
-              </a:spcAft>
-              <a:buNone/>
-            </a:pPr>
-            <a:r>
-              <a:rPr lang="en-US" sz="1500" b="0">
-                <a:solidFill>
-                  <a:srgbClr val="202B33"/>
-                </a:solidFill>
-                <a:latin typeface="Arial"/>
-                <a:ea typeface="Arial"/>
-                <a:cs typeface="Arial"/>
-              </a:rPr>
-              <a:t xml:space="preserve">Topologies interaction</a:t>
-            </a:r>
-            <a:endParaRPr lang="en-US" sz="1500"/>
-          </a:p>
-          <a:p>
-            <a:pPr marL="0" indent="0">
-              <a:lnSpc>
-                <a:spcPts val="1950"/>
-              </a:lnSpc>
-              <a:spcAft>
-                <a:spcPts val="0"/>
-              </a:spcAft>
-              <a:buNone/>
-            </a:pPr>
-            <a:r>
-              <a:rPr lang="en-US" sz="1500" b="0">
-                <a:solidFill>
-                  <a:srgbClr val="202B33"/>
-                </a:solidFill>
-                <a:latin typeface="Arial"/>
-                <a:ea typeface="Arial"/>
-                <a:cs typeface="Arial"/>
-              </a:rPr>
-              <a:t xml:space="preserve">modes](https://teamtopologies.com/key-concepts.</a:t>
-            </a:r>
-            <a:endParaRPr lang="en-US" sz="1500"/>
-          </a:p>
-          <a:p>
-            <a:pPr marL="0" indent="0">
-              <a:lnSpc>
-                <a:spcPts val="1950"/>
-              </a:lnSpc>
-              <a:spcAft>
-                <a:spcPts val="0"/>
-              </a:spcAft>
-              <a:buNone/>
-            </a:pPr>
-            <a:r>
-              <a:rPr lang="en-US" sz="1500" b="0">
-                <a:solidFill>
-                  <a:srgbClr val="202B33"/>
-                </a:solidFill>
-                <a:latin typeface="Arial"/>
-                <a:ea typeface="Arial"/>
-                <a:cs typeface="Arial"/>
-              </a:rPr>
-              <a:t xml:space="preserve"/>
-            </a:r>
-            <a:endParaRPr lang="en-US" sz="1500"/>
-          </a:p>
-          <a:p>
-            <a:pPr marL="0" indent="0">
-              <a:lnSpc>
-                <a:spcPts val="1950"/>
-              </a:lnSpc>
-              <a:spcAft>
-                <a:spcPts val="0"/>
-              </a:spcAft>
-              <a:buNone/>
-            </a:pPr>
-            <a:r>
-              <a:rPr lang="en-US" sz="1500" b="0">
-                <a:solidFill>
-                  <a:srgbClr val="202B33"/>
-                </a:solidFill>
-                <a:latin typeface="Arial"/>
-                <a:ea typeface="Arial"/>
-                <a:cs typeface="Arial"/>
-              </a:rPr>
-              <a:t xml:space="preserve">Donald T. Campbell (1979), Assessing the</a:t>
-            </a:r>
-            <a:endParaRPr lang="en-US" sz="1500"/>
-          </a:p>
-          <a:p>
-            <a:pPr marL="0" indent="0">
-              <a:lnSpc>
-                <a:spcPts val="1950"/>
-              </a:lnSpc>
-              <a:spcAft>
-                <a:spcPts val="0"/>
-              </a:spcAft>
-              <a:buNone/>
-            </a:pPr>
-            <a:r>
-              <a:rPr lang="en-US" sz="1500" b="0">
-                <a:solidFill>
-                  <a:srgbClr val="202B33"/>
-                </a:solidFill>
-                <a:latin typeface="Arial"/>
-                <a:ea typeface="Arial"/>
-                <a:cs typeface="Arial"/>
-              </a:rPr>
-              <a:t xml:space="preserve">impact of planned social change —</a:t>
-            </a:r>
-            <a:endParaRPr lang="en-US" sz="1500"/>
-          </a:p>
-          <a:p>
-            <a:pPr marL="0" indent="0">
-              <a:lnSpc>
-                <a:spcPts val="1950"/>
-              </a:lnSpc>
-              <a:spcAft>
-                <a:spcPts val="0"/>
-              </a:spcAft>
-              <a:buNone/>
-            </a:pPr>
-            <a:r>
-              <a:rPr lang="en-US" sz="1500" b="0">
-                <a:solidFill>
-                  <a:srgbClr val="202B33"/>
-                </a:solidFill>
-                <a:latin typeface="Arial"/>
-                <a:ea typeface="Arial"/>
-                <a:cs typeface="Arial"/>
-              </a:rPr>
-              <a:t xml:space="preserve">https://doi.org/10.1016/0149-7189%2879%2990048-X),</a:t>
-            </a:r>
-            <a:endParaRPr lang="en-US" sz="1500"/>
-          </a:p>
-          <a:p>
-            <a:pPr marL="0" indent="0">
-              <a:lnSpc>
-                <a:spcPts val="1950"/>
-              </a:lnSpc>
-              <a:spcAft>
-                <a:spcPts val="0"/>
-              </a:spcAft>
-              <a:buNone/>
-            </a:pPr>
-            <a:r>
-              <a:rPr lang="en-US" sz="1500" b="0">
-                <a:solidFill>
-                  <a:srgbClr val="202B33"/>
-                </a:solidFill>
-                <a:latin typeface="Arial"/>
-                <a:ea typeface="Arial"/>
-                <a:cs typeface="Arial"/>
-              </a:rPr>
-              <a:t xml:space="preserve">Evaluation and Program Planning 2(1, 67–90.</a:t>
+              <a:t xml:space="preserve">a Matrix ending when you think about it.</a:t>
+            </a:r>
+            <a:endParaRPr lang="en-US" sz="1500"/>
+          </a:p>
+          <a:p>
+            <a:pPr marL="0" indent="0">
+              <a:lnSpc>
+                <a:spcPts val="1950"/>
+              </a:lnSpc>
+              <a:spcAft>
+                <a:spcPts val="0"/>
+              </a:spcAft>
+              <a:buNone/>
+            </a:pPr>
+            <a:r>
+              <a:rPr lang="en-US" sz="1500" b="0">
+                <a:solidFill>
+                  <a:srgbClr val="202B33"/>
+                </a:solidFill>
+                <a:latin typeface="Arial"/>
+                <a:ea typeface="Arial"/>
+                <a:cs typeface="Arial"/>
+              </a:rPr>
+              <a:t xml:space="preserve">Thanks, AI. Skynet is not so bad if I get</a:t>
+            </a:r>
+            <a:endParaRPr lang="en-US" sz="1500"/>
+          </a:p>
+          <a:p>
+            <a:pPr marL="0" indent="0">
+              <a:lnSpc>
+                <a:spcPts val="1950"/>
+              </a:lnSpc>
+              <a:spcAft>
+                <a:spcPts val="0"/>
+              </a:spcAft>
+              <a:buNone/>
+            </a:pPr>
+            <a:r>
+              <a:rPr lang="en-US" sz="1500" b="0">
+                <a:solidFill>
+                  <a:srgbClr val="202B33"/>
+                </a:solidFill>
+                <a:latin typeface="Arial"/>
+                <a:ea typeface="Arial"/>
+                <a:cs typeface="Arial"/>
+              </a:rPr>
+              <a:t xml:space="preserve">to keep my CLIs.</a:t>
+            </a:r>
+            <a:endParaRPr lang="en-US" sz="1500"/>
+          </a:p>
+          <a:p>
+            <a:pPr marL="0" indent="0">
+              <a:lnSpc>
+                <a:spcPts val="1950"/>
+              </a:lnSpc>
+              <a:spcAft>
+                <a:spcPts val="0"/>
+              </a:spcAft>
+              <a:buNone/>
+            </a:pPr>
+            <a:r>
+              <a:rPr lang="en-US" sz="1500" b="0">
+                <a:solidFill>
+                  <a:srgbClr val="202B33"/>
+                </a:solidFill>
+                <a:latin typeface="Arial"/>
+                <a:ea typeface="Arial"/>
+                <a:cs typeface="Arial"/>
+              </a:rPr>
+              <a:t xml:space="preserve"/>
+            </a:r>
+            <a:endParaRPr lang="en-US" sz="1500"/>
+          </a:p>
+          <a:p>
+            <a:pPr marL="0" indent="0">
+              <a:lnSpc>
+                <a:spcPts val="1950"/>
+              </a:lnSpc>
+              <a:spcAft>
+                <a:spcPts val="0"/>
+              </a:spcAft>
+              <a:buNone/>
+            </a:pPr>
+            <a:r>
+              <a:rPr lang="en-US" sz="1500" b="0">
+                <a:solidFill>
+                  <a:srgbClr val="202B33"/>
+                </a:solidFill>
+                <a:latin typeface="Arial"/>
+                <a:ea typeface="Arial"/>
+                <a:cs typeface="Arial"/>
+              </a:rPr>
+              <a:t xml:space="preserve">Here is the part I want you to leave with.</a:t>
+            </a:r>
+            <a:endParaRPr lang="en-US" sz="1500"/>
+          </a:p>
+          <a:p>
+            <a:pPr marL="0" indent="0">
+              <a:lnSpc>
+                <a:spcPts val="1950"/>
+              </a:lnSpc>
+              <a:spcAft>
+                <a:spcPts val="0"/>
+              </a:spcAft>
+              <a:buNone/>
+            </a:pPr>
+            <a:r>
+              <a:rPr lang="en-US" sz="1500" b="0">
+                <a:solidFill>
+                  <a:srgbClr val="202B33"/>
+                </a:solidFill>
+                <a:latin typeface="Arial"/>
+                <a:ea typeface="Arial"/>
+                <a:cs typeface="Arial"/>
+              </a:rPr>
+              <a:t xml:space="preserve">That future is not spoken for. GPT image</a:t>
+            </a:r>
+            <a:endParaRPr lang="en-US" sz="1500"/>
+          </a:p>
+          <a:p>
+            <a:pPr marL="0" indent="0">
+              <a:lnSpc>
+                <a:spcPts val="1950"/>
+              </a:lnSpc>
+              <a:spcAft>
+                <a:spcPts val="0"/>
+              </a:spcAft>
+              <a:buNone/>
+            </a:pPr>
+            <a:r>
+              <a:rPr lang="en-US" sz="1500" b="0">
+                <a:solidFill>
+                  <a:srgbClr val="202B33"/>
+                </a:solidFill>
+                <a:latin typeface="Arial"/>
+                <a:ea typeface="Arial"/>
+                <a:cs typeface="Arial"/>
+              </a:rPr>
+              <a:t xml:space="preserve">being pretty good does not mean the story</a:t>
+            </a:r>
+            <a:endParaRPr lang="en-US" sz="1500"/>
+          </a:p>
+          <a:p>
+            <a:pPr marL="0" indent="0">
+              <a:lnSpc>
+                <a:spcPts val="1950"/>
+              </a:lnSpc>
+              <a:spcAft>
+                <a:spcPts val="0"/>
+              </a:spcAft>
+              <a:buNone/>
+            </a:pPr>
+            <a:r>
+              <a:rPr lang="en-US" sz="1500" b="0">
+                <a:solidFill>
+                  <a:srgbClr val="202B33"/>
+                </a:solidFill>
+                <a:latin typeface="Arial"/>
+                <a:ea typeface="Arial"/>
+                <a:cs typeface="Arial"/>
+              </a:rPr>
+              <a:t xml:space="preserve">of image creation belongs to the big</a:t>
+            </a:r>
+            <a:endParaRPr lang="en-US" sz="1500"/>
+          </a:p>
+          <a:p>
+            <a:pPr marL="0" indent="0">
+              <a:lnSpc>
+                <a:spcPts val="1950"/>
+              </a:lnSpc>
+              <a:spcAft>
+                <a:spcPts val="0"/>
+              </a:spcAft>
+              <a:buNone/>
+            </a:pPr>
+            <a:r>
+              <a:rPr lang="en-US" sz="1500" b="0">
+                <a:solidFill>
+                  <a:srgbClr val="202B33"/>
+                </a:solidFill>
+                <a:latin typeface="Arial"/>
+                <a:ea typeface="Arial"/>
+                <a:cs typeface="Arial"/>
+              </a:rPr>
+              <a:t xml:space="preserve">players, and the same is true in whichever</a:t>
+            </a:r>
+            <a:endParaRPr lang="en-US" sz="1500"/>
+          </a:p>
+          <a:p>
+            <a:pPr marL="0" indent="0">
+              <a:lnSpc>
+                <a:spcPts val="1950"/>
+              </a:lnSpc>
+              <a:spcAft>
+                <a:spcPts val="0"/>
+              </a:spcAft>
+              <a:buNone/>
+            </a:pPr>
+            <a:r>
+              <a:rPr lang="en-US" sz="1500" b="0">
+                <a:solidFill>
+                  <a:srgbClr val="202B33"/>
+                </a:solidFill>
+                <a:latin typeface="Arial"/>
+                <a:ea typeface="Arial"/>
+                <a:cs typeface="Arial"/>
+              </a:rPr>
+              <a:t xml:space="preserve">industry you work in. Those of us who do</a:t>
+            </a:r>
+            <a:endParaRPr lang="en-US" sz="1500"/>
+          </a:p>
+          <a:p>
+            <a:pPr marL="0" indent="0">
+              <a:lnSpc>
+                <a:spcPts val="1950"/>
+              </a:lnSpc>
+              <a:spcAft>
+                <a:spcPts val="0"/>
+              </a:spcAft>
+              <a:buNone/>
+            </a:pPr>
+            <a:r>
+              <a:rPr lang="en-US" sz="1500" b="0">
+                <a:solidFill>
+                  <a:srgbClr val="202B33"/>
+                </a:solidFill>
+                <a:latin typeface="Arial"/>
+                <a:ea typeface="Arial"/>
+                <a:cs typeface="Arial"/>
+              </a:rPr>
+              <a:t xml:space="preserve">not work at a frontier lab, the organic</a:t>
+            </a:r>
+            <a:endParaRPr lang="en-US" sz="1500"/>
+          </a:p>
+          <a:p>
+            <a:pPr marL="0" indent="0">
+              <a:lnSpc>
+                <a:spcPts val="1950"/>
+              </a:lnSpc>
+              <a:spcAft>
+                <a:spcPts val="0"/>
+              </a:spcAft>
+              <a:buNone/>
+            </a:pPr>
+            <a:r>
+              <a:rPr lang="en-US" sz="1500" b="0">
+                <a:solidFill>
+                  <a:srgbClr val="202B33"/>
+                </a:solidFill>
+                <a:latin typeface="Arial"/>
+                <a:ea typeface="Arial"/>
+                <a:cs typeface="Arial"/>
+              </a:rPr>
+              <a:t xml:space="preserve">agents in the room, get to rethink any and</a:t>
+            </a:r>
+            <a:endParaRPr lang="en-US" sz="1500"/>
+          </a:p>
+          <a:p>
+            <a:pPr marL="0" indent="0">
+              <a:lnSpc>
+                <a:spcPts val="1950"/>
+              </a:lnSpc>
+              <a:spcAft>
+                <a:spcPts val="0"/>
+              </a:spcAft>
+              <a:buNone/>
+            </a:pPr>
+            <a:r>
+              <a:rPr lang="en-US" sz="1500" b="0">
+                <a:solidFill>
+                  <a:srgbClr val="202B33"/>
+                </a:solidFill>
+                <a:latin typeface="Arial"/>
+                <a:ea typeface="Arial"/>
+                <a:cs typeface="Arial"/>
+              </a:rPr>
+              <a:t xml:space="preserve">every app as an AI-native system from the</a:t>
+            </a:r>
+            <a:endParaRPr lang="en-US" sz="1500"/>
+          </a:p>
+          <a:p>
+            <a:pPr marL="0" indent="0">
+              <a:lnSpc>
+                <a:spcPts val="1950"/>
+              </a:lnSpc>
+              <a:spcAft>
+                <a:spcPts val="0"/>
+              </a:spcAft>
+              <a:buNone/>
+            </a:pPr>
+            <a:r>
+              <a:rPr lang="en-US" sz="1500" b="0">
+                <a:solidFill>
+                  <a:srgbClr val="202B33"/>
+                </a:solidFill>
+                <a:latin typeface="Arial"/>
+                <a:ea typeface="Arial"/>
+                <a:cs typeface="Arial"/>
+              </a:rPr>
+              <a:t xml:space="preserve">boundary up. That is this whole talk one</a:t>
+            </a:r>
+            <a:endParaRPr lang="en-US" sz="1500"/>
+          </a:p>
+          <a:p>
+            <a:pPr marL="0" indent="0">
+              <a:lnSpc>
+                <a:spcPts val="1950"/>
+              </a:lnSpc>
+              <a:spcAft>
+                <a:spcPts val="0"/>
+              </a:spcAft>
+              <a:buNone/>
+            </a:pPr>
+            <a:r>
+              <a:rPr lang="en-US" sz="1500" b="0">
+                <a:solidFill>
+                  <a:srgbClr val="202B33"/>
+                </a:solidFill>
+                <a:latin typeface="Arial"/>
+                <a:ea typeface="Arial"/>
+                <a:cs typeface="Arial"/>
+              </a:rPr>
+              <a:t xml:space="preserve">level higher: do not photocopy today's</a:t>
+            </a:r>
+            <a:endParaRPr lang="en-US" sz="1500"/>
+          </a:p>
+          <a:p>
+            <a:pPr marL="0" indent="0">
+              <a:lnSpc>
+                <a:spcPts val="1950"/>
+              </a:lnSpc>
+              <a:spcAft>
+                <a:spcPts val="0"/>
+              </a:spcAft>
+              <a:buNone/>
+            </a:pPr>
+            <a:r>
+              <a:rPr lang="en-US" sz="1500" b="0">
+                <a:solidFill>
+                  <a:srgbClr val="202B33"/>
+                </a:solidFill>
+                <a:latin typeface="Arial"/>
+                <a:ea typeface="Arial"/>
+                <a:cs typeface="Arial"/>
+              </a:rPr>
+              <a:t xml:space="preserve">product categories onto tomorrow's</a:t>
+            </a:r>
+            <a:endParaRPr lang="en-US" sz="1500"/>
+          </a:p>
+          <a:p>
+            <a:pPr marL="0" indent="0">
+              <a:lnSpc>
+                <a:spcPts val="1950"/>
+              </a:lnSpc>
+              <a:spcAft>
+                <a:spcPts val="0"/>
+              </a:spcAft>
+              <a:buNone/>
+            </a:pPr>
+            <a:r>
+              <a:rPr lang="en-US" sz="1500" b="0">
+                <a:solidFill>
+                  <a:srgbClr val="202B33"/>
+                </a:solidFill>
+                <a:latin typeface="Arial"/>
+                <a:ea typeface="Arial"/>
+                <a:cs typeface="Arial"/>
+              </a:rPr>
+              <a:t xml:space="preserve">substrate either.</a:t>
             </a:r>
             <a:endParaRPr lang="en-US" sz="1500"/>
           </a:p>
@@ -9938,6 +11408,1833 @@
                 <a:cs typeface="Arial"/>
               </a:rPr>
               <a:t xml:space="preserve">13</a:t>
+            </a:r>
+            <a:endParaRPr lang="en-US" sz="975"/>
+          </a:p>
+        </p:txBody>
+      </p:sp>
+    </p:spTree>
+  </p:cSld>
+  <p:clrMapOvr>
+    <a:masterClrMapping/>
+  </p:clrMapOvr>
+</p:sld>
+</file>
+
+<file path=ppt/slides/slide14.xml><?xml version="1.0" encoding="utf-8"?>
+<p:sld xmlns:a="http://schemas.openxmlformats.org/drawingml/2006/main" xmlns:r="http://schemas.openxmlformats.org/officeDocument/2006/relationships" xmlns:p="http://schemas.openxmlformats.org/presentationml/2006/main">
+  <p:cSld name="Slide 14">
+    <p:bg>
+      <p:bgPr>
+        <a:solidFill>
+          <a:srgbClr val="FAFAF7"/>
+        </a:solidFill>
+        <a:effectLst/>
+      </p:bgPr>
+    </p:bg>
+    <p:spTree>
+      <p:nvGrpSpPr>
+        <p:cNvPr id="1" name=""/>
+        <p:cNvGrpSpPr/>
+        <p:nvPr/>
+      </p:nvGrpSpPr>
+      <p:grpSpPr>
+        <a:xfrm>
+          <a:off x="0" y="0"/>
+          <a:ext cx="0" cy="0"/>
+          <a:chOff x="0" y="0"/>
+          <a:chExt cx="0" cy="0"/>
+        </a:xfrm>
+      </p:grpSpPr>
+      <p:sp>
+        <p:nvSpPr>
+          <p:cNvPr id="2" name="Text 2"/>
+          <p:cNvSpPr txBox="1"/>
+          <p:nvPr/>
+        </p:nvSpPr>
+        <p:spPr>
+          <a:xfrm>
+            <a:off x="457200" y="266700"/>
+            <a:ext cx="9144000" cy="228600"/>
+          </a:xfrm>
+          <a:prstGeom prst="rect">
+            <a:avLst/>
+          </a:prstGeom>
+          <a:noFill/>
+          <a:ln>
+            <a:noFill/>
+          </a:ln>
+        </p:spPr>
+        <p:txBody>
+          <a:bodyPr wrap="none" lIns="0" tIns="0" rIns="0" bIns="0" anchor="t">
+            <a:noAutofit/>
+          </a:bodyPr>
+          <a:lstStyle/>
+          <a:p>
+            <a:pPr marL="0" indent="0">
+              <a:lnSpc>
+                <a:spcPts val="1365"/>
+              </a:lnSpc>
+              <a:spcAft>
+                <a:spcPts val="0"/>
+              </a:spcAft>
+              <a:buNone/>
+            </a:pPr>
+            <a:r>
+              <a:rPr lang="en-US" sz="1050" b="1">
+                <a:solidFill>
+                  <a:srgbClr val="246957"/>
+                </a:solidFill>
+                <a:latin typeface="Arial"/>
+                <a:ea typeface="Arial"/>
+                <a:cs typeface="Arial"/>
+              </a:rPr>
+              <a:t xml:space="preserve">12 / 12    SOURCE SLIDE 17</a:t>
+            </a:r>
+            <a:endParaRPr lang="en-US" sz="1050"/>
+          </a:p>
+        </p:txBody>
+      </p:sp>
+      <p:sp>
+        <p:nvSpPr>
+          <p:cNvPr id="3" name="Text 3"/>
+          <p:cNvSpPr txBox="1"/>
+          <p:nvPr/>
+        </p:nvSpPr>
+        <p:spPr>
+          <a:xfrm>
+            <a:off x="457200" y="657225"/>
+            <a:ext cx="9144000" cy="1104900"/>
+          </a:xfrm>
+          <a:prstGeom prst="rect">
+            <a:avLst/>
+          </a:prstGeom>
+          <a:noFill/>
+          <a:ln>
+            <a:noFill/>
+          </a:ln>
+        </p:spPr>
+        <p:txBody>
+          <a:bodyPr wrap="none" lIns="0" tIns="0" rIns="0" bIns="0" anchor="t">
+            <a:noAutofit/>
+          </a:bodyPr>
+          <a:lstStyle/>
+          <a:p>
+            <a:pPr marL="0" indent="0">
+              <a:lnSpc>
+                <a:spcPts val="3060"/>
+              </a:lnSpc>
+              <a:spcAft>
+                <a:spcPts val="0"/>
+              </a:spcAft>
+              <a:buNone/>
+            </a:pPr>
+            <a:r>
+              <a:rPr lang="en-US" sz="2550" b="1">
+                <a:solidFill>
+                  <a:srgbClr val="202B33"/>
+                </a:solidFill>
+                <a:latin typeface="Arial"/>
+                <a:ea typeface="Arial"/>
+                <a:cs typeface="Arial"/>
+              </a:rPr>
+              <a:t xml:space="preserve">Break the mirror on purpose</a:t>
+            </a:r>
+            <a:endParaRPr lang="en-US" sz="2550"/>
+          </a:p>
+        </p:txBody>
+      </p:sp>
+      <p:sp>
+        <p:nvSpPr>
+          <p:cNvPr id="4" name="Text 4"/>
+          <p:cNvSpPr txBox="1"/>
+          <p:nvPr/>
+        </p:nvSpPr>
+        <p:spPr>
+          <a:xfrm>
+            <a:off x="457200" y="1971675"/>
+            <a:ext cx="4352925" cy="5314950"/>
+          </a:xfrm>
+          <a:prstGeom prst="rect">
+            <a:avLst/>
+          </a:prstGeom>
+          <a:noFill/>
+          <a:ln>
+            <a:noFill/>
+          </a:ln>
+        </p:spPr>
+        <p:txBody>
+          <a:bodyPr wrap="none" lIns="0" tIns="0" rIns="0" bIns="0" anchor="t">
+            <a:noAutofit/>
+          </a:bodyPr>
+          <a:lstStyle/>
+          <a:p>
+            <a:pPr marL="0" indent="0">
+              <a:lnSpc>
+                <a:spcPts val="1950"/>
+              </a:lnSpc>
+              <a:spcAft>
+                <a:spcPts val="0"/>
+              </a:spcAft>
+              <a:buNone/>
+            </a:pPr>
+            <a:r>
+              <a:rPr lang="en-US" sz="1500" b="0">
+                <a:solidFill>
+                  <a:srgbClr val="202B33"/>
+                </a:solidFill>
+                <a:latin typeface="Arial"/>
+                <a:ea typeface="Arial"/>
+                <a:cs typeface="Arial"/>
+              </a:rPr>
+              <a:t xml:space="preserve">Reprice the handoffs. Draw the interfaces.</a:t>
+            </a:r>
+            <a:endParaRPr lang="en-US" sz="1500"/>
+          </a:p>
+          <a:p>
+            <a:pPr marL="0" indent="0">
+              <a:lnSpc>
+                <a:spcPts val="1950"/>
+              </a:lnSpc>
+              <a:spcAft>
+                <a:spcPts val="0"/>
+              </a:spcAft>
+              <a:buNone/>
+            </a:pPr>
+            <a:r>
+              <a:rPr lang="en-US" sz="1500" b="0">
+                <a:solidFill>
+                  <a:srgbClr val="202B33"/>
+                </a:solidFill>
+                <a:latin typeface="Arial"/>
+                <a:ea typeface="Arial"/>
+                <a:cs typeface="Arial"/>
+              </a:rPr>
+              <a:t xml:space="preserve"/>
+            </a:r>
+            <a:endParaRPr lang="en-US" sz="1500"/>
+          </a:p>
+          <a:p>
+            <a:pPr marL="0" indent="0">
+              <a:lnSpc>
+                <a:spcPts val="1950"/>
+              </a:lnSpc>
+              <a:spcAft>
+                <a:spcPts val="0"/>
+              </a:spcAft>
+              <a:buNone/>
+            </a:pPr>
+            <a:r>
+              <a:rPr lang="en-US" sz="1500" b="0">
+                <a:solidFill>
+                  <a:srgbClr val="202B33"/>
+                </a:solidFill>
+                <a:latin typeface="Arial"/>
+                <a:ea typeface="Arial"/>
+                <a:cs typeface="Arial"/>
+              </a:rPr>
+              <a:t xml:space="preserve">Automate the right things. Keep the taste.</a:t>
+            </a:r>
+            <a:endParaRPr lang="en-US" sz="1500"/>
+          </a:p>
+          <a:p>
+            <a:pPr marL="0" indent="0">
+              <a:lnSpc>
+                <a:spcPts val="1950"/>
+              </a:lnSpc>
+              <a:spcAft>
+                <a:spcPts val="0"/>
+              </a:spcAft>
+              <a:buNone/>
+            </a:pPr>
+            <a:r>
+              <a:rPr lang="en-US" sz="1500" b="0">
+                <a:solidFill>
+                  <a:srgbClr val="202B33"/>
+                </a:solidFill>
+                <a:latin typeface="Arial"/>
+                <a:ea typeface="Arial"/>
+                <a:cs typeface="Arial"/>
+              </a:rPr>
+              <a:t xml:space="preserve"/>
+            </a:r>
+            <a:endParaRPr lang="en-US" sz="1500"/>
+          </a:p>
+          <a:p>
+            <a:pPr marL="0" indent="0">
+              <a:lnSpc>
+                <a:spcPts val="1950"/>
+              </a:lnSpc>
+              <a:spcAft>
+                <a:spcPts val="0"/>
+              </a:spcAft>
+              <a:buNone/>
+            </a:pPr>
+            <a:r>
+              <a:rPr lang="en-US" sz="1500" b="0">
+                <a:solidFill>
+                  <a:srgbClr val="202B33"/>
+                </a:solidFill>
+                <a:latin typeface="Arial"/>
+                <a:ea typeface="Arial"/>
+                <a:cs typeface="Arial"/>
+              </a:rPr>
+              <a:t xml:space="preserve">Back to the org chart. Some of those</a:t>
+            </a:r>
+            <a:endParaRPr lang="en-US" sz="1500"/>
+          </a:p>
+          <a:p>
+            <a:pPr marL="0" indent="0">
+              <a:lnSpc>
+                <a:spcPts val="1950"/>
+              </a:lnSpc>
+              <a:spcAft>
+                <a:spcPts val="0"/>
+              </a:spcAft>
+              <a:buNone/>
+            </a:pPr>
+            <a:r>
+              <a:rPr lang="en-US" sz="1500" b="0">
+                <a:solidFill>
+                  <a:srgbClr val="202B33"/>
+                </a:solidFill>
+                <a:latin typeface="Arial"/>
+                <a:ea typeface="Arial"/>
+                <a:cs typeface="Arial"/>
+              </a:rPr>
+              <a:t xml:space="preserve">boundaries exist because the work really is</a:t>
+            </a:r>
+            <a:endParaRPr lang="en-US" sz="1500"/>
+          </a:p>
+          <a:p>
+            <a:pPr marL="0" indent="0">
+              <a:lnSpc>
+                <a:spcPts val="1950"/>
+              </a:lnSpc>
+              <a:spcAft>
+                <a:spcPts val="0"/>
+              </a:spcAft>
+              <a:buNone/>
+            </a:pPr>
+            <a:r>
+              <a:rPr lang="en-US" sz="1500" b="0">
+                <a:solidFill>
+                  <a:srgbClr val="202B33"/>
+                </a:solidFill>
+                <a:latin typeface="Arial"/>
+                <a:ea typeface="Arial"/>
+                <a:cs typeface="Arial"/>
+              </a:rPr>
+              <a:t xml:space="preserve">different. Some exist because the person</a:t>
+            </a:r>
+            <a:endParaRPr lang="en-US" sz="1500"/>
+          </a:p>
+          <a:p>
+            <a:pPr marL="0" indent="0">
+              <a:lnSpc>
+                <a:spcPts val="1950"/>
+              </a:lnSpc>
+              <a:spcAft>
+                <a:spcPts val="0"/>
+              </a:spcAft>
+              <a:buNone/>
+            </a:pPr>
+            <a:r>
+              <a:rPr lang="en-US" sz="1500" b="0">
+                <a:solidFill>
+                  <a:srgbClr val="202B33"/>
+                </a:solidFill>
+                <a:latin typeface="Arial"/>
+                <a:ea typeface="Arial"/>
+                <a:cs typeface="Arial"/>
+              </a:rPr>
+              <a:t xml:space="preserve">with the spreadsheet sat in another</a:t>
+            </a:r>
+            <a:endParaRPr lang="en-US" sz="1500"/>
+          </a:p>
+          <a:p>
+            <a:pPr marL="0" indent="0">
+              <a:lnSpc>
+                <a:spcPts val="1950"/>
+              </a:lnSpc>
+              <a:spcAft>
+                <a:spcPts val="0"/>
+              </a:spcAft>
+              <a:buNone/>
+            </a:pPr>
+            <a:r>
+              <a:rPr lang="en-US" sz="1500" b="0">
+                <a:solidFill>
+                  <a:srgbClr val="202B33"/>
+                </a:solidFill>
+                <a:latin typeface="Arial"/>
+                <a:ea typeface="Arial"/>
+                <a:cs typeface="Arial"/>
+              </a:rPr>
+              <a:t xml:space="preserve">department. We should know which before</a:t>
+            </a:r>
+            <a:endParaRPr lang="en-US" sz="1500"/>
+          </a:p>
+          <a:p>
+            <a:pPr marL="0" indent="0">
+              <a:lnSpc>
+                <a:spcPts val="1950"/>
+              </a:lnSpc>
+              <a:spcAft>
+                <a:spcPts val="0"/>
+              </a:spcAft>
+              <a:buNone/>
+            </a:pPr>
+            <a:r>
+              <a:rPr lang="en-US" sz="1500" b="0">
+                <a:solidFill>
+                  <a:srgbClr val="202B33"/>
+                </a:solidFill>
+                <a:latin typeface="Arial"/>
+                <a:ea typeface="Arial"/>
+                <a:cs typeface="Arial"/>
+              </a:rPr>
+              <a:t xml:space="preserve">teaching agents to repeat them.</a:t>
+            </a:r>
+            <a:endParaRPr lang="en-US" sz="1500"/>
+          </a:p>
+          <a:p>
+            <a:pPr marL="0" indent="0">
+              <a:lnSpc>
+                <a:spcPts val="1950"/>
+              </a:lnSpc>
+              <a:spcAft>
+                <a:spcPts val="0"/>
+              </a:spcAft>
+              <a:buNone/>
+            </a:pPr>
+            <a:r>
+              <a:rPr lang="en-US" sz="1500" b="0">
+                <a:solidFill>
+                  <a:srgbClr val="202B33"/>
+                </a:solidFill>
+                <a:latin typeface="Arial"/>
+                <a:ea typeface="Arial"/>
+                <a:cs typeface="Arial"/>
+              </a:rPr>
+              <a:t xml:space="preserve"/>
+            </a:r>
+            <a:endParaRPr lang="en-US" sz="1500"/>
+          </a:p>
+          <a:p>
+            <a:pPr marL="0" indent="0">
+              <a:lnSpc>
+                <a:spcPts val="1950"/>
+              </a:lnSpc>
+              <a:spcAft>
+                <a:spcPts val="0"/>
+              </a:spcAft>
+              <a:buNone/>
+            </a:pPr>
+            <a:r>
+              <a:rPr lang="en-US" sz="1500" b="0">
+                <a:solidFill>
+                  <a:srgbClr val="202B33"/>
+                </a:solidFill>
+                <a:latin typeface="Arial"/>
+                <a:ea typeface="Arial"/>
+                <a:cs typeface="Arial"/>
+              </a:rPr>
+              <a:t xml:space="preserve">Take one boundary. What arrives, what</a:t>
+            </a:r>
+            <a:endParaRPr lang="en-US" sz="1500"/>
+          </a:p>
+          <a:p>
+            <a:pPr marL="0" indent="0">
+              <a:lnSpc>
+                <a:spcPts val="1950"/>
+              </a:lnSpc>
+              <a:spcAft>
+                <a:spcPts val="0"/>
+              </a:spcAft>
+              <a:buNone/>
+            </a:pPr>
+            <a:r>
+              <a:rPr lang="en-US" sz="1500" b="0">
+                <a:solidFill>
+                  <a:srgbClr val="202B33"/>
+                </a:solidFill>
+                <a:latin typeface="Arial"/>
+                <a:ea typeface="Arial"/>
+                <a:cs typeface="Arial"/>
+              </a:rPr>
+              <a:t xml:space="preserve">leaves, who decides, and what did it cost</a:t>
+            </a:r>
+            <a:endParaRPr lang="en-US" sz="1500"/>
+          </a:p>
+          <a:p>
+            <a:pPr marL="0" indent="0">
+              <a:lnSpc>
+                <a:spcPts val="1950"/>
+              </a:lnSpc>
+              <a:spcAft>
+                <a:spcPts val="0"/>
+              </a:spcAft>
+              <a:buNone/>
+            </a:pPr>
+            <a:r>
+              <a:rPr lang="en-US" sz="1500" b="0">
+                <a:solidFill>
+                  <a:srgbClr val="202B33"/>
+                </a:solidFill>
+                <a:latin typeface="Arial"/>
+                <a:ea typeface="Arial"/>
+                <a:cs typeface="Arial"/>
+              </a:rPr>
+              <a:t xml:space="preserve">last week? Make collection cheaper without</a:t>
+            </a:r>
+            <a:endParaRPr lang="en-US" sz="1500"/>
+          </a:p>
+          <a:p>
+            <a:pPr marL="0" indent="0">
+              <a:lnSpc>
+                <a:spcPts val="1950"/>
+              </a:lnSpc>
+              <a:spcAft>
+                <a:spcPts val="0"/>
+              </a:spcAft>
+              <a:buNone/>
+            </a:pPr>
+            <a:r>
+              <a:rPr lang="en-US" sz="1500" b="0">
+                <a:solidFill>
+                  <a:srgbClr val="202B33"/>
+                </a:solidFill>
+                <a:latin typeface="Arial"/>
+                <a:ea typeface="Arial"/>
+                <a:cs typeface="Arial"/>
+              </a:rPr>
+              <a:t xml:space="preserve">erasing the disagreement the handoff used</a:t>
+            </a:r>
+            <a:endParaRPr lang="en-US" sz="1500"/>
+          </a:p>
+          <a:p>
+            <a:pPr marL="0" indent="0">
+              <a:lnSpc>
+                <a:spcPts val="1950"/>
+              </a:lnSpc>
+              <a:spcAft>
+                <a:spcPts val="0"/>
+              </a:spcAft>
+              <a:buNone/>
+            </a:pPr>
+            <a:r>
+              <a:rPr lang="en-US" sz="1500" b="0">
+                <a:solidFill>
+                  <a:srgbClr val="202B33"/>
+                </a:solidFill>
+                <a:latin typeface="Arial"/>
+                <a:ea typeface="Arial"/>
+                <a:cs typeface="Arial"/>
+              </a:rPr>
+              <a:t xml:space="preserve">to expose. Keep the product review where</a:t>
+            </a:r>
+            <a:endParaRPr lang="en-US" sz="1500"/>
+          </a:p>
+          <a:p>
+            <a:pPr marL="0" indent="0">
+              <a:lnSpc>
+                <a:spcPts val="1950"/>
+              </a:lnSpc>
+              <a:spcAft>
+                <a:spcPts val="0"/>
+              </a:spcAft>
+              <a:buNone/>
+            </a:pPr>
+            <a:r>
+              <a:rPr lang="en-US" sz="1500" b="0">
+                <a:solidFill>
+                  <a:srgbClr val="202B33"/>
+                </a:solidFill>
+                <a:latin typeface="Arial"/>
+                <a:ea typeface="Arial"/>
+                <a:cs typeface="Arial"/>
+              </a:rPr>
+              <a:t xml:space="preserve">the evidence conflicts, and give the</a:t>
+            </a:r>
+            <a:endParaRPr lang="en-US" sz="1500"/>
+          </a:p>
+        </p:txBody>
+      </p:sp>
+      <p:sp>
+        <p:nvSpPr>
+          <p:cNvPr id="5" name="Text 5"/>
+          <p:cNvSpPr txBox="1"/>
+          <p:nvPr/>
+        </p:nvSpPr>
+        <p:spPr>
+          <a:xfrm>
+            <a:off x="5238750" y="1971675"/>
+            <a:ext cx="4362450" cy="5314950"/>
+          </a:xfrm>
+          <a:prstGeom prst="rect">
+            <a:avLst/>
+          </a:prstGeom>
+          <a:noFill/>
+          <a:ln>
+            <a:noFill/>
+          </a:ln>
+        </p:spPr>
+        <p:txBody>
+          <a:bodyPr wrap="none" lIns="0" tIns="0" rIns="0" bIns="0" anchor="t">
+            <a:noAutofit/>
+          </a:bodyPr>
+          <a:lstStyle/>
+          <a:p>
+            <a:pPr marL="0" indent="0">
+              <a:lnSpc>
+                <a:spcPts val="1950"/>
+              </a:lnSpc>
+              <a:spcAft>
+                <a:spcPts val="0"/>
+              </a:spcAft>
+              <a:buNone/>
+            </a:pPr>
+            <a:r>
+              <a:rPr lang="en-US" sz="1500" b="0">
+                <a:solidFill>
+                  <a:srgbClr val="202B33"/>
+                </a:solidFill>
+                <a:latin typeface="Arial"/>
+                <a:ea typeface="Arial"/>
+                <a:cs typeface="Arial"/>
+              </a:rPr>
+              <a:t xml:space="preserve">decision a durable artifact so the next</a:t>
+            </a:r>
+            <a:endParaRPr lang="en-US" sz="1500"/>
+          </a:p>
+          <a:p>
+            <a:pPr marL="0" indent="0">
+              <a:lnSpc>
+                <a:spcPts val="1950"/>
+              </a:lnSpc>
+              <a:spcAft>
+                <a:spcPts val="0"/>
+              </a:spcAft>
+              <a:buNone/>
+            </a:pPr>
+            <a:r>
+              <a:rPr lang="en-US" sz="1500" b="0">
+                <a:solidFill>
+                  <a:srgbClr val="202B33"/>
+                </a:solidFill>
+                <a:latin typeface="Arial"/>
+                <a:ea typeface="Arial"/>
+                <a:cs typeface="Arial"/>
+              </a:rPr>
+              <a:t xml:space="preserve">agent does not have to guess.</a:t>
+            </a:r>
+            <a:endParaRPr lang="en-US" sz="1500"/>
+          </a:p>
+          <a:p>
+            <a:pPr marL="0" indent="0">
+              <a:lnSpc>
+                <a:spcPts val="1950"/>
+              </a:lnSpc>
+              <a:spcAft>
+                <a:spcPts val="0"/>
+              </a:spcAft>
+              <a:buNone/>
+            </a:pPr>
+            <a:r>
+              <a:rPr lang="en-US" sz="1500" b="0">
+                <a:solidFill>
+                  <a:srgbClr val="202B33"/>
+                </a:solidFill>
+                <a:latin typeface="Arial"/>
+                <a:ea typeface="Arial"/>
+                <a:cs typeface="Arial"/>
+              </a:rPr>
+              <a:t xml:space="preserve"/>
+            </a:r>
+            <a:endParaRPr lang="en-US" sz="1500"/>
+          </a:p>
+          <a:p>
+            <a:pPr marL="0" indent="0">
+              <a:lnSpc>
+                <a:spcPts val="1950"/>
+              </a:lnSpc>
+              <a:spcAft>
+                <a:spcPts val="0"/>
+              </a:spcAft>
+              <a:buNone/>
+            </a:pPr>
+            <a:r>
+              <a:rPr lang="en-US" sz="1500" b="0">
+                <a:solidFill>
+                  <a:srgbClr val="202B33"/>
+                </a:solidFill>
+                <a:latin typeface="Arial"/>
+                <a:ea typeface="Arial"/>
+                <a:cs typeface="Arial"/>
+              </a:rPr>
+              <a:t xml:space="preserve">Then price ownership, and price the fuel.</a:t>
+            </a:r>
+            <a:endParaRPr lang="en-US" sz="1500"/>
+          </a:p>
+          <a:p>
+            <a:pPr marL="0" indent="0">
+              <a:lnSpc>
+                <a:spcPts val="1950"/>
+              </a:lnSpc>
+              <a:spcAft>
+                <a:spcPts val="0"/>
+              </a:spcAft>
+              <a:buNone/>
+            </a:pPr>
+            <a:r>
+              <a:rPr lang="en-US" sz="1500" b="0">
+                <a:solidFill>
+                  <a:srgbClr val="202B33"/>
+                </a:solidFill>
+                <a:latin typeface="Arial"/>
+                <a:ea typeface="Arial"/>
+                <a:cs typeface="Arial"/>
+              </a:rPr>
+              <a:t xml:space="preserve">Six agents do not become free because one</a:t>
+            </a:r>
+            <a:endParaRPr lang="en-US" sz="1500"/>
+          </a:p>
+          <a:p>
+            <a:pPr marL="0" indent="0">
+              <a:lnSpc>
+                <a:spcPts val="1950"/>
+              </a:lnSpc>
+              <a:spcAft>
+                <a:spcPts val="0"/>
+              </a:spcAft>
+              <a:buNone/>
+            </a:pPr>
+            <a:r>
+              <a:rPr lang="en-US" sz="1500" b="0">
+                <a:solidFill>
+                  <a:srgbClr val="202B33"/>
+                </a:solidFill>
+                <a:latin typeface="Arial"/>
+                <a:ea typeface="Arial"/>
+                <a:cs typeface="Arial"/>
+              </a:rPr>
+              <a:t xml:space="preserve">person has their names in a config file,</a:t>
+            </a:r>
+            <a:endParaRPr lang="en-US" sz="1500"/>
+          </a:p>
+          <a:p>
+            <a:pPr marL="0" indent="0">
+              <a:lnSpc>
+                <a:spcPts val="1950"/>
+              </a:lnSpc>
+              <a:spcAft>
+                <a:spcPts val="0"/>
+              </a:spcAft>
+              <a:buNone/>
+            </a:pPr>
+            <a:r>
+              <a:rPr lang="en-US" sz="1500" b="0">
+                <a:solidFill>
+                  <a:srgbClr val="202B33"/>
+                </a:solidFill>
+                <a:latin typeface="Arial"/>
+                <a:ea typeface="Arial"/>
+                <a:cs typeface="Arial"/>
+              </a:rPr>
+              <a:t xml:space="preserve">and neither does the burn that keeps them</a:t>
+            </a:r>
+            <a:endParaRPr lang="en-US" sz="1500"/>
+          </a:p>
+          <a:p>
+            <a:pPr marL="0" indent="0">
+              <a:lnSpc>
+                <a:spcPts val="1950"/>
+              </a:lnSpc>
+              <a:spcAft>
+                <a:spcPts val="0"/>
+              </a:spcAft>
+              <a:buNone/>
+            </a:pPr>
+            <a:r>
+              <a:rPr lang="en-US" sz="1500" b="0">
+                <a:solidFill>
+                  <a:srgbClr val="202B33"/>
+                </a:solidFill>
+                <a:latin typeface="Arial"/>
+                <a:ea typeface="Arial"/>
+                <a:cs typeface="Arial"/>
+              </a:rPr>
+              <a:t xml:space="preserve">running. Put permission before customer</a:t>
+            </a:r>
+            <a:endParaRPr lang="en-US" sz="1500"/>
+          </a:p>
+          <a:p>
+            <a:pPr marL="0" indent="0">
+              <a:lnSpc>
+                <a:spcPts val="1950"/>
+              </a:lnSpc>
+              <a:spcAft>
+                <a:spcPts val="0"/>
+              </a:spcAft>
+              <a:buNone/>
+            </a:pPr>
+            <a:r>
+              <a:rPr lang="en-US" sz="1500" b="0">
+                <a:solidFill>
+                  <a:srgbClr val="202B33"/>
+                </a:solidFill>
+                <a:latin typeface="Arial"/>
+                <a:ea typeface="Arial"/>
+                <a:cs typeface="Arial"/>
+              </a:rPr>
+              <a:t xml:space="preserve">consequences.</a:t>
+            </a:r>
+            <a:endParaRPr lang="en-US" sz="1500"/>
+          </a:p>
+          <a:p>
+            <a:pPr marL="0" indent="0">
+              <a:lnSpc>
+                <a:spcPts val="1950"/>
+              </a:lnSpc>
+              <a:spcAft>
+                <a:spcPts val="0"/>
+              </a:spcAft>
+              <a:buNone/>
+            </a:pPr>
+            <a:r>
+              <a:rPr lang="en-US" sz="1500" b="0">
+                <a:solidFill>
+                  <a:srgbClr val="202B33"/>
+                </a:solidFill>
+                <a:latin typeface="Arial"/>
+                <a:ea typeface="Arial"/>
+                <a:cs typeface="Arial"/>
+              </a:rPr>
+              <a:t xml:space="preserve"/>
+            </a:r>
+            <a:endParaRPr lang="en-US" sz="1500"/>
+          </a:p>
+          <a:p>
+            <a:pPr marL="0" indent="0">
+              <a:lnSpc>
+                <a:spcPts val="1950"/>
+              </a:lnSpc>
+              <a:spcAft>
+                <a:spcPts val="0"/>
+              </a:spcAft>
+              <a:buNone/>
+            </a:pPr>
+            <a:r>
+              <a:rPr lang="en-US" sz="1500" b="0">
+                <a:solidFill>
+                  <a:srgbClr val="202B33"/>
+                </a:solidFill>
+                <a:latin typeface="Arial"/>
+                <a:ea typeface="Arial"/>
+                <a:cs typeface="Arial"/>
+              </a:rPr>
+              <a:t xml:space="preserve">And then do the larger version of the same</a:t>
+            </a:r>
+            <a:endParaRPr lang="en-US" sz="1500"/>
+          </a:p>
+          <a:p>
+            <a:pPr marL="0" indent="0">
+              <a:lnSpc>
+                <a:spcPts val="1950"/>
+              </a:lnSpc>
+              <a:spcAft>
+                <a:spcPts val="0"/>
+              </a:spcAft>
+              <a:buNone/>
+            </a:pPr>
+            <a:r>
+              <a:rPr lang="en-US" sz="1500" b="0">
+                <a:solidFill>
+                  <a:srgbClr val="202B33"/>
+                </a:solidFill>
+                <a:latin typeface="Arial"/>
+                <a:ea typeface="Arial"/>
+                <a:cs typeface="Arial"/>
+              </a:rPr>
+              <a:t xml:space="preserve">move. The org chart is a record of earlier</a:t>
+            </a:r>
+            <a:endParaRPr lang="en-US" sz="1500"/>
+          </a:p>
+          <a:p>
+            <a:pPr marL="0" indent="0">
+              <a:lnSpc>
+                <a:spcPts val="1950"/>
+              </a:lnSpc>
+              <a:spcAft>
+                <a:spcPts val="0"/>
+              </a:spcAft>
+              <a:buNone/>
+            </a:pPr>
+            <a:r>
+              <a:rPr lang="en-US" sz="1500" b="0">
+                <a:solidFill>
+                  <a:srgbClr val="202B33"/>
+                </a:solidFill>
+                <a:latin typeface="Arial"/>
+                <a:ea typeface="Arial"/>
+                <a:cs typeface="Arial"/>
+              </a:rPr>
+              <a:t xml:space="preserve">tradeoffs; so is the product category you</a:t>
+            </a:r>
+            <a:endParaRPr lang="en-US" sz="1500"/>
+          </a:p>
+          <a:p>
+            <a:pPr marL="0" indent="0">
+              <a:lnSpc>
+                <a:spcPts val="1950"/>
+              </a:lnSpc>
+              <a:spcAft>
+                <a:spcPts val="0"/>
+              </a:spcAft>
+              <a:buNone/>
+            </a:pPr>
+            <a:r>
+              <a:rPr lang="en-US" sz="1500" b="0">
+                <a:solidFill>
+                  <a:srgbClr val="202B33"/>
+                </a:solidFill>
+                <a:latin typeface="Arial"/>
+                <a:ea typeface="Arial"/>
+                <a:cs typeface="Arial"/>
+              </a:rPr>
+              <a:t xml:space="preserve">are working inside. You are allowed to make</a:t>
+            </a:r>
+            <a:endParaRPr lang="en-US" sz="1500"/>
+          </a:p>
+          <a:p>
+            <a:pPr marL="0" indent="0">
+              <a:lnSpc>
+                <a:spcPts val="1950"/>
+              </a:lnSpc>
+              <a:spcAft>
+                <a:spcPts val="0"/>
+              </a:spcAft>
+              <a:buNone/>
+            </a:pPr>
+            <a:r>
+              <a:rPr lang="en-US" sz="1500" b="0">
+                <a:solidFill>
+                  <a:srgbClr val="202B33"/>
+                </a:solidFill>
+                <a:latin typeface="Arial"/>
+                <a:ea typeface="Arial"/>
+                <a:cs typeface="Arial"/>
+              </a:rPr>
+              <a:t xml:space="preserve">new ones, and the channel is not spoken for</a:t>
+            </a:r>
+            <a:endParaRPr lang="en-US" sz="1500"/>
+          </a:p>
+          <a:p>
+            <a:pPr marL="0" indent="0">
+              <a:lnSpc>
+                <a:spcPts val="1950"/>
+              </a:lnSpc>
+              <a:spcAft>
+                <a:spcPts val="0"/>
+              </a:spcAft>
+              <a:buNone/>
+            </a:pPr>
+            <a:r>
+              <a:rPr lang="en-US" sz="1500" b="0">
+                <a:solidFill>
+                  <a:srgbClr val="202B33"/>
+                </a:solidFill>
+                <a:latin typeface="Arial"/>
+                <a:ea typeface="Arial"/>
+                <a:cs typeface="Arial"/>
+              </a:rPr>
+              <a:t xml:space="preserve">yet. Break the mirror on purpose. Automate</a:t>
+            </a:r>
+            <a:endParaRPr lang="en-US" sz="1500"/>
+          </a:p>
+          <a:p>
+            <a:pPr marL="0" indent="0">
+              <a:lnSpc>
+                <a:spcPts val="1950"/>
+              </a:lnSpc>
+              <a:spcAft>
+                <a:spcPts val="0"/>
+              </a:spcAft>
+              <a:buNone/>
+            </a:pPr>
+            <a:r>
+              <a:rPr lang="en-US" sz="1500" b="0">
+                <a:solidFill>
+                  <a:srgbClr val="202B33"/>
+                </a:solidFill>
+                <a:latin typeface="Arial"/>
+                <a:ea typeface="Arial"/>
+                <a:cs typeface="Arial"/>
+              </a:rPr>
+              <a:t xml:space="preserve">the right things. Keep the taste.</a:t>
+            </a:r>
+            <a:endParaRPr lang="en-US" sz="1500"/>
+          </a:p>
+        </p:txBody>
+      </p:sp>
+      <p:sp>
+        <p:nvSpPr>
+          <p:cNvPr id="6" name="Text 6"/>
+          <p:cNvSpPr txBox="1"/>
+          <p:nvPr/>
+        </p:nvSpPr>
+        <p:spPr>
+          <a:xfrm>
+            <a:off x="457200" y="7486650"/>
+            <a:ext cx="8820150" cy="190500"/>
+          </a:xfrm>
+          <a:prstGeom prst="rect">
+            <a:avLst/>
+          </a:prstGeom>
+          <a:noFill/>
+          <a:ln>
+            <a:noFill/>
+          </a:ln>
+        </p:spPr>
+        <p:txBody>
+          <a:bodyPr wrap="none" lIns="0" tIns="0" rIns="0" bIns="0" anchor="t">
+            <a:noAutofit/>
+          </a:bodyPr>
+          <a:lstStyle/>
+          <a:p>
+            <a:pPr marL="0" indent="0">
+              <a:lnSpc>
+                <a:spcPts val="1268"/>
+              </a:lnSpc>
+              <a:spcAft>
+                <a:spcPts val="0"/>
+              </a:spcAft>
+              <a:buNone/>
+            </a:pPr>
+            <a:r>
+              <a:rPr lang="en-US" sz="975" b="0">
+                <a:solidFill>
+                  <a:srgbClr val="48555B"/>
+                </a:solidFill>
+                <a:latin typeface="Arial"/>
+                <a:ea typeface="Arial"/>
+                <a:cs typeface="Arial"/>
+              </a:rPr>
+              <a:t xml:space="preserve">The Future of Product Engineering: Break the Mirror on Purpose</a:t>
+            </a:r>
+            <a:endParaRPr lang="en-US" sz="975"/>
+          </a:p>
+        </p:txBody>
+      </p:sp>
+      <p:sp>
+        <p:nvSpPr>
+          <p:cNvPr id="7" name="Text 7"/>
+          <p:cNvSpPr txBox="1"/>
+          <p:nvPr/>
+        </p:nvSpPr>
+        <p:spPr>
+          <a:xfrm>
+            <a:off x="9391650" y="7486650"/>
+            <a:ext cx="238125" cy="190500"/>
+          </a:xfrm>
+          <a:prstGeom prst="rect">
+            <a:avLst/>
+          </a:prstGeom>
+          <a:noFill/>
+          <a:ln>
+            <a:noFill/>
+          </a:ln>
+        </p:spPr>
+        <p:txBody>
+          <a:bodyPr wrap="none" lIns="0" tIns="0" rIns="0" bIns="0" anchor="t">
+            <a:noAutofit/>
+          </a:bodyPr>
+          <a:lstStyle/>
+          <a:p>
+            <a:pPr marL="0" indent="0">
+              <a:lnSpc>
+                <a:spcPts val="1268"/>
+              </a:lnSpc>
+              <a:spcAft>
+                <a:spcPts val="0"/>
+              </a:spcAft>
+              <a:buNone/>
+            </a:pPr>
+            <a:r>
+              <a:rPr lang="en-US" sz="975" b="0">
+                <a:solidFill>
+                  <a:srgbClr val="48555B"/>
+                </a:solidFill>
+                <a:latin typeface="Arial"/>
+                <a:ea typeface="Arial"/>
+                <a:cs typeface="Arial"/>
+              </a:rPr>
+              <a:t xml:space="preserve">14</a:t>
+            </a:r>
+            <a:endParaRPr lang="en-US" sz="975"/>
+          </a:p>
+        </p:txBody>
+      </p:sp>
+    </p:spTree>
+  </p:cSld>
+  <p:clrMapOvr>
+    <a:masterClrMapping/>
+  </p:clrMapOvr>
+</p:sld>
+</file>
+
+<file path=ppt/slides/slide15.xml><?xml version="1.0" encoding="utf-8"?>
+<p:sld xmlns:a="http://schemas.openxmlformats.org/drawingml/2006/main" xmlns:r="http://schemas.openxmlformats.org/officeDocument/2006/relationships" xmlns:p="http://schemas.openxmlformats.org/presentationml/2006/main">
+  <p:cSld name="Slide 15">
+    <p:bg>
+      <p:bgPr>
+        <a:solidFill>
+          <a:srgbClr val="FAFAF7"/>
+        </a:solidFill>
+        <a:effectLst/>
+      </p:bgPr>
+    </p:bg>
+    <p:spTree>
+      <p:nvGrpSpPr>
+        <p:cNvPr id="1" name=""/>
+        <p:cNvGrpSpPr/>
+        <p:nvPr/>
+      </p:nvGrpSpPr>
+      <p:grpSpPr>
+        <a:xfrm>
+          <a:off x="0" y="0"/>
+          <a:ext cx="0" cy="0"/>
+          <a:chOff x="0" y="0"/>
+          <a:chExt cx="0" cy="0"/>
+        </a:xfrm>
+      </p:grpSpPr>
+      <p:sp>
+        <p:nvSpPr>
+          <p:cNvPr id="2" name="Text 2"/>
+          <p:cNvSpPr txBox="1"/>
+          <p:nvPr/>
+        </p:nvSpPr>
+        <p:spPr>
+          <a:xfrm>
+            <a:off x="457200" y="266700"/>
+            <a:ext cx="9144000" cy="228600"/>
+          </a:xfrm>
+          <a:prstGeom prst="rect">
+            <a:avLst/>
+          </a:prstGeom>
+          <a:noFill/>
+          <a:ln>
+            <a:noFill/>
+          </a:ln>
+        </p:spPr>
+        <p:txBody>
+          <a:bodyPr wrap="none" lIns="0" tIns="0" rIns="0" bIns="0" anchor="t">
+            <a:noAutofit/>
+          </a:bodyPr>
+          <a:lstStyle/>
+          <a:p>
+            <a:pPr marL="0" indent="0">
+              <a:lnSpc>
+                <a:spcPts val="1365"/>
+              </a:lnSpc>
+              <a:spcAft>
+                <a:spcPts val="0"/>
+              </a:spcAft>
+              <a:buNone/>
+            </a:pPr>
+            <a:r>
+              <a:rPr lang="en-US" sz="1050" b="1">
+                <a:solidFill>
+                  <a:srgbClr val="246957"/>
+                </a:solidFill>
+                <a:latin typeface="Arial"/>
+                <a:ea typeface="Arial"/>
+                <a:cs typeface="Arial"/>
+              </a:rPr>
+              <a:t xml:space="preserve">SOURCE REFERENCES</a:t>
+            </a:r>
+            <a:endParaRPr lang="en-US" sz="1050"/>
+          </a:p>
+        </p:txBody>
+      </p:sp>
+      <p:sp>
+        <p:nvSpPr>
+          <p:cNvPr id="3" name="Text 3"/>
+          <p:cNvSpPr txBox="1"/>
+          <p:nvPr/>
+        </p:nvSpPr>
+        <p:spPr>
+          <a:xfrm>
+            <a:off x="457200" y="657225"/>
+            <a:ext cx="9144000" cy="1104900"/>
+          </a:xfrm>
+          <a:prstGeom prst="rect">
+            <a:avLst/>
+          </a:prstGeom>
+          <a:noFill/>
+          <a:ln>
+            <a:noFill/>
+          </a:ln>
+        </p:spPr>
+        <p:txBody>
+          <a:bodyPr wrap="none" lIns="0" tIns="0" rIns="0" bIns="0" anchor="t">
+            <a:noAutofit/>
+          </a:bodyPr>
+          <a:lstStyle/>
+          <a:p>
+            <a:pPr marL="0" indent="0">
+              <a:lnSpc>
+                <a:spcPts val="3060"/>
+              </a:lnSpc>
+              <a:spcAft>
+                <a:spcPts val="0"/>
+              </a:spcAft>
+              <a:buNone/>
+            </a:pPr>
+            <a:r>
+              <a:rPr lang="en-US" sz="2550" b="1">
+                <a:solidFill>
+                  <a:srgbClr val="202B33"/>
+                </a:solidFill>
+                <a:latin typeface="Arial"/>
+                <a:ea typeface="Arial"/>
+                <a:cs typeface="Arial"/>
+              </a:rPr>
+              <a:t xml:space="preserve">References</a:t>
+            </a:r>
+            <a:endParaRPr lang="en-US" sz="2550"/>
+          </a:p>
+        </p:txBody>
+      </p:sp>
+      <p:sp>
+        <p:nvSpPr>
+          <p:cNvPr id="4" name="Text 4"/>
+          <p:cNvSpPr txBox="1"/>
+          <p:nvPr/>
+        </p:nvSpPr>
+        <p:spPr>
+          <a:xfrm>
+            <a:off x="457200" y="1971675"/>
+            <a:ext cx="4352925" cy="5314950"/>
+          </a:xfrm>
+          <a:prstGeom prst="rect">
+            <a:avLst/>
+          </a:prstGeom>
+          <a:noFill/>
+          <a:ln>
+            <a:noFill/>
+          </a:ln>
+        </p:spPr>
+        <p:txBody>
+          <a:bodyPr wrap="none" lIns="0" tIns="0" rIns="0" bIns="0" anchor="t">
+            <a:noAutofit/>
+          </a:bodyPr>
+          <a:lstStyle/>
+          <a:p>
+            <a:pPr marL="0" indent="0">
+              <a:lnSpc>
+                <a:spcPts val="1950"/>
+              </a:lnSpc>
+              <a:spcAft>
+                <a:spcPts val="0"/>
+              </a:spcAft>
+              <a:buNone/>
+            </a:pPr>
+            <a:r>
+              <a:rPr lang="en-US" sz="1500" b="0">
+                <a:solidFill>
+                  <a:srgbClr val="202B33"/>
+                </a:solidFill>
+                <a:latin typeface="Arial"/>
+                <a:ea typeface="Arial"/>
+                <a:cs typeface="Arial"/>
+              </a:rPr>
+              <a:t xml:space="preserve">Melvin E. Conway (1968), How Do Committees</a:t>
+            </a:r>
+            <a:endParaRPr lang="en-US" sz="1500"/>
+          </a:p>
+          <a:p>
+            <a:pPr marL="0" indent="0">
+              <a:lnSpc>
+                <a:spcPts val="1950"/>
+              </a:lnSpc>
+              <a:spcAft>
+                <a:spcPts val="0"/>
+              </a:spcAft>
+              <a:buNone/>
+            </a:pPr>
+            <a:r>
+              <a:rPr lang="en-US" sz="1500" b="0">
+                <a:solidFill>
+                  <a:srgbClr val="202B33"/>
+                </a:solidFill>
+                <a:latin typeface="Arial"/>
+                <a:ea typeface="Arial"/>
+                <a:cs typeface="Arial"/>
+              </a:rPr>
+              <a:t xml:space="preserve">Invent? —</a:t>
+            </a:r>
+            <a:endParaRPr lang="en-US" sz="1500"/>
+          </a:p>
+          <a:p>
+            <a:pPr marL="0" indent="0">
+              <a:lnSpc>
+                <a:spcPts val="1950"/>
+              </a:lnSpc>
+              <a:spcAft>
+                <a:spcPts val="0"/>
+              </a:spcAft>
+              <a:buNone/>
+            </a:pPr>
+            <a:r>
+              <a:rPr lang="en-US" sz="1500" b="0">
+                <a:solidFill>
+                  <a:srgbClr val="202B33"/>
+                </a:solidFill>
+                <a:latin typeface="Arial"/>
+                <a:ea typeface="Arial"/>
+                <a:cs typeface="Arial"/>
+              </a:rPr>
+              <a:t xml:space="preserve">https://melconway.com/Home/pdf/committees.pdf,</a:t>
+            </a:r>
+            <a:endParaRPr lang="en-US" sz="1500"/>
+          </a:p>
+          <a:p>
+            <a:pPr marL="0" indent="0">
+              <a:lnSpc>
+                <a:spcPts val="1950"/>
+              </a:lnSpc>
+              <a:spcAft>
+                <a:spcPts val="0"/>
+              </a:spcAft>
+              <a:buNone/>
+            </a:pPr>
+            <a:r>
+              <a:rPr lang="en-US" sz="1500" b="0">
+                <a:solidFill>
+                  <a:srgbClr val="202B33"/>
+                </a:solidFill>
+                <a:latin typeface="Arial"/>
+                <a:ea typeface="Arial"/>
+                <a:cs typeface="Arial"/>
+              </a:rPr>
+              <a:t xml:space="preserve">Datamation, April, 28–31.</a:t>
+            </a:r>
+            <a:endParaRPr lang="en-US" sz="1500"/>
+          </a:p>
+          <a:p>
+            <a:pPr marL="0" indent="0">
+              <a:lnSpc>
+                <a:spcPts val="1950"/>
+              </a:lnSpc>
+              <a:spcAft>
+                <a:spcPts val="0"/>
+              </a:spcAft>
+              <a:buNone/>
+            </a:pPr>
+            <a:r>
+              <a:rPr lang="en-US" sz="1500" b="0">
+                <a:solidFill>
+                  <a:srgbClr val="202B33"/>
+                </a:solidFill>
+                <a:latin typeface="Arial"/>
+                <a:ea typeface="Arial"/>
+                <a:cs typeface="Arial"/>
+              </a:rPr>
+              <a:t xml:space="preserve"/>
+            </a:r>
+            <a:endParaRPr lang="en-US" sz="1500"/>
+          </a:p>
+          <a:p>
+            <a:pPr marL="0" indent="0">
+              <a:lnSpc>
+                <a:spcPts val="1950"/>
+              </a:lnSpc>
+              <a:spcAft>
+                <a:spcPts val="0"/>
+              </a:spcAft>
+              <a:buNone/>
+            </a:pPr>
+            <a:r>
+              <a:rPr lang="en-US" sz="1500" b="0">
+                <a:solidFill>
+                  <a:srgbClr val="202B33"/>
+                </a:solidFill>
+                <a:latin typeface="Arial"/>
+                <a:ea typeface="Arial"/>
+                <a:cs typeface="Arial"/>
+              </a:rPr>
+              <a:t xml:space="preserve">Ronald H. Coase (1937), The Nature of the</a:t>
+            </a:r>
+            <a:endParaRPr lang="en-US" sz="1500"/>
+          </a:p>
+          <a:p>
+            <a:pPr marL="0" indent="0">
+              <a:lnSpc>
+                <a:spcPts val="1950"/>
+              </a:lnSpc>
+              <a:spcAft>
+                <a:spcPts val="0"/>
+              </a:spcAft>
+              <a:buNone/>
+            </a:pPr>
+            <a:r>
+              <a:rPr lang="en-US" sz="1500" b="0">
+                <a:solidFill>
+                  <a:srgbClr val="202B33"/>
+                </a:solidFill>
+                <a:latin typeface="Arial"/>
+                <a:ea typeface="Arial"/>
+                <a:cs typeface="Arial"/>
+              </a:rPr>
+              <a:t xml:space="preserve">Firm —</a:t>
+            </a:r>
+            <a:endParaRPr lang="en-US" sz="1500"/>
+          </a:p>
+          <a:p>
+            <a:pPr marL="0" indent="0">
+              <a:lnSpc>
+                <a:spcPts val="1950"/>
+              </a:lnSpc>
+              <a:spcAft>
+                <a:spcPts val="0"/>
+              </a:spcAft>
+              <a:buNone/>
+            </a:pPr>
+            <a:r>
+              <a:rPr lang="en-US" sz="1500" b="0">
+                <a:solidFill>
+                  <a:srgbClr val="202B33"/>
+                </a:solidFill>
+                <a:latin typeface="Arial"/>
+                <a:ea typeface="Arial"/>
+                <a:cs typeface="Arial"/>
+              </a:rPr>
+              <a:t xml:space="preserve">https://onlinelibrary.wiley.com/doi/10.1111/j.1468-0335.1937.tb00002.x),</a:t>
+            </a:r>
+            <a:endParaRPr lang="en-US" sz="1500"/>
+          </a:p>
+          <a:p>
+            <a:pPr marL="0" indent="0">
+              <a:lnSpc>
+                <a:spcPts val="1950"/>
+              </a:lnSpc>
+              <a:spcAft>
+                <a:spcPts val="0"/>
+              </a:spcAft>
+              <a:buNone/>
+            </a:pPr>
+            <a:r>
+              <a:rPr lang="en-US" sz="1500" b="0">
+                <a:solidFill>
+                  <a:srgbClr val="202B33"/>
+                </a:solidFill>
+                <a:latin typeface="Arial"/>
+                <a:ea typeface="Arial"/>
+                <a:cs typeface="Arial"/>
+              </a:rPr>
+              <a:t xml:space="preserve">Economica 4(16, 386–405. The agent-design</a:t>
+            </a:r>
+            <a:endParaRPr lang="en-US" sz="1500"/>
+          </a:p>
+          <a:p>
+            <a:pPr marL="0" indent="0">
+              <a:lnSpc>
+                <a:spcPts val="1950"/>
+              </a:lnSpc>
+              <a:spcAft>
+                <a:spcPts val="0"/>
+              </a:spcAft>
+              <a:buNone/>
+            </a:pPr>
+            <a:r>
+              <a:rPr lang="en-US" sz="1500" b="0">
+                <a:solidFill>
+                  <a:srgbClr val="202B33"/>
+                </a:solidFill>
+                <a:latin typeface="Arial"/>
+                <a:ea typeface="Arial"/>
+                <a:cs typeface="Arial"/>
+              </a:rPr>
+              <a:t xml:space="preserve">application is the speaker’s argument.</a:t>
+            </a:r>
+            <a:endParaRPr lang="en-US" sz="1500"/>
+          </a:p>
+          <a:p>
+            <a:pPr marL="0" indent="0">
+              <a:lnSpc>
+                <a:spcPts val="1950"/>
+              </a:lnSpc>
+              <a:spcAft>
+                <a:spcPts val="0"/>
+              </a:spcAft>
+              <a:buNone/>
+            </a:pPr>
+            <a:r>
+              <a:rPr lang="en-US" sz="1500" b="0">
+                <a:solidFill>
+                  <a:srgbClr val="202B33"/>
+                </a:solidFill>
+                <a:latin typeface="Arial"/>
+                <a:ea typeface="Arial"/>
+                <a:cs typeface="Arial"/>
+              </a:rPr>
+              <a:t xml:space="preserve"/>
+            </a:r>
+            <a:endParaRPr lang="en-US" sz="1500"/>
+          </a:p>
+        </p:txBody>
+      </p:sp>
+      <p:sp>
+        <p:nvSpPr>
+          <p:cNvPr id="5" name="Text 5"/>
+          <p:cNvSpPr txBox="1"/>
+          <p:nvPr/>
+        </p:nvSpPr>
+        <p:spPr>
+          <a:xfrm>
+            <a:off x="5238750" y="1971675"/>
+            <a:ext cx="4362450" cy="5314950"/>
+          </a:xfrm>
+          <a:prstGeom prst="rect">
+            <a:avLst/>
+          </a:prstGeom>
+          <a:noFill/>
+          <a:ln>
+            <a:noFill/>
+          </a:ln>
+        </p:spPr>
+        <p:txBody>
+          <a:bodyPr wrap="none" lIns="0" tIns="0" rIns="0" bIns="0" anchor="t">
+            <a:noAutofit/>
+          </a:bodyPr>
+          <a:lstStyle/>
+          <a:p>
+            <a:pPr marL="0" indent="0">
+              <a:lnSpc>
+                <a:spcPts val="1950"/>
+              </a:lnSpc>
+              <a:spcAft>
+                <a:spcPts val="0"/>
+              </a:spcAft>
+              <a:buNone/>
+            </a:pPr>
+            <a:r>
+              <a:rPr lang="en-US" sz="1500" b="0">
+                <a:solidFill>
+                  <a:srgbClr val="202B33"/>
+                </a:solidFill>
+                <a:latin typeface="Arial"/>
+                <a:ea typeface="Arial"/>
+                <a:cs typeface="Arial"/>
+              </a:rPr>
+              <a:t xml:space="preserve">Thoughtworks, Inverse Conway Maneuver —</a:t>
+            </a:r>
+            <a:endParaRPr lang="en-US" sz="1500"/>
+          </a:p>
+          <a:p>
+            <a:pPr marL="0" indent="0">
+              <a:lnSpc>
+                <a:spcPts val="1950"/>
+              </a:lnSpc>
+              <a:spcAft>
+                <a:spcPts val="0"/>
+              </a:spcAft>
+              <a:buNone/>
+            </a:pPr>
+            <a:r>
+              <a:rPr lang="en-US" sz="1500" b="0">
+                <a:solidFill>
+                  <a:srgbClr val="202B33"/>
+                </a:solidFill>
+                <a:latin typeface="Arial"/>
+                <a:ea typeface="Arial"/>
+                <a:cs typeface="Arial"/>
+              </a:rPr>
+              <a:t xml:space="preserve">https://www.thoughtworks.com/en-br/radar/techniques/inverse-conway-maneuver),</a:t>
+            </a:r>
+            <a:endParaRPr lang="en-US" sz="1500"/>
+          </a:p>
+          <a:p>
+            <a:pPr marL="0" indent="0">
+              <a:lnSpc>
+                <a:spcPts val="1950"/>
+              </a:lnSpc>
+              <a:spcAft>
+                <a:spcPts val="0"/>
+              </a:spcAft>
+              <a:buNone/>
+            </a:pPr>
+            <a:r>
+              <a:rPr lang="en-US" sz="1500" b="0">
+                <a:solidFill>
+                  <a:srgbClr val="202B33"/>
+                </a:solidFill>
+                <a:latin typeface="Arial"/>
+                <a:ea typeface="Arial"/>
+                <a:cs typeface="Arial"/>
+              </a:rPr>
+              <a:t xml:space="preserve">2014/2015. Skelton and Pais, [Team</a:t>
+            </a:r>
+            <a:endParaRPr lang="en-US" sz="1500"/>
+          </a:p>
+          <a:p>
+            <a:pPr marL="0" indent="0">
+              <a:lnSpc>
+                <a:spcPts val="1950"/>
+              </a:lnSpc>
+              <a:spcAft>
+                <a:spcPts val="0"/>
+              </a:spcAft>
+              <a:buNone/>
+            </a:pPr>
+            <a:r>
+              <a:rPr lang="en-US" sz="1500" b="0">
+                <a:solidFill>
+                  <a:srgbClr val="202B33"/>
+                </a:solidFill>
+                <a:latin typeface="Arial"/>
+                <a:ea typeface="Arial"/>
+                <a:cs typeface="Arial"/>
+              </a:rPr>
+              <a:t xml:space="preserve">Topologies interaction</a:t>
+            </a:r>
+            <a:endParaRPr lang="en-US" sz="1500"/>
+          </a:p>
+          <a:p>
+            <a:pPr marL="0" indent="0">
+              <a:lnSpc>
+                <a:spcPts val="1950"/>
+              </a:lnSpc>
+              <a:spcAft>
+                <a:spcPts val="0"/>
+              </a:spcAft>
+              <a:buNone/>
+            </a:pPr>
+            <a:r>
+              <a:rPr lang="en-US" sz="1500" b="0">
+                <a:solidFill>
+                  <a:srgbClr val="202B33"/>
+                </a:solidFill>
+                <a:latin typeface="Arial"/>
+                <a:ea typeface="Arial"/>
+                <a:cs typeface="Arial"/>
+              </a:rPr>
+              <a:t xml:space="preserve">modes](https://teamtopologies.com/key-concepts.</a:t>
+            </a:r>
+            <a:endParaRPr lang="en-US" sz="1500"/>
+          </a:p>
+          <a:p>
+            <a:pPr marL="0" indent="0">
+              <a:lnSpc>
+                <a:spcPts val="1950"/>
+              </a:lnSpc>
+              <a:spcAft>
+                <a:spcPts val="0"/>
+              </a:spcAft>
+              <a:buNone/>
+            </a:pPr>
+            <a:r>
+              <a:rPr lang="en-US" sz="1500" b="0">
+                <a:solidFill>
+                  <a:srgbClr val="202B33"/>
+                </a:solidFill>
+                <a:latin typeface="Arial"/>
+                <a:ea typeface="Arial"/>
+                <a:cs typeface="Arial"/>
+              </a:rPr>
+              <a:t xml:space="preserve"/>
+            </a:r>
+            <a:endParaRPr lang="en-US" sz="1500"/>
+          </a:p>
+          <a:p>
+            <a:pPr marL="0" indent="0">
+              <a:lnSpc>
+                <a:spcPts val="1950"/>
+              </a:lnSpc>
+              <a:spcAft>
+                <a:spcPts val="0"/>
+              </a:spcAft>
+              <a:buNone/>
+            </a:pPr>
+            <a:r>
+              <a:rPr lang="en-US" sz="1500" b="0">
+                <a:solidFill>
+                  <a:srgbClr val="202B33"/>
+                </a:solidFill>
+                <a:latin typeface="Arial"/>
+                <a:ea typeface="Arial"/>
+                <a:cs typeface="Arial"/>
+              </a:rPr>
+              <a:t xml:space="preserve">Donald T. Campbell (1979), Assessing the</a:t>
+            </a:r>
+            <a:endParaRPr lang="en-US" sz="1500"/>
+          </a:p>
+          <a:p>
+            <a:pPr marL="0" indent="0">
+              <a:lnSpc>
+                <a:spcPts val="1950"/>
+              </a:lnSpc>
+              <a:spcAft>
+                <a:spcPts val="0"/>
+              </a:spcAft>
+              <a:buNone/>
+            </a:pPr>
+            <a:r>
+              <a:rPr lang="en-US" sz="1500" b="0">
+                <a:solidFill>
+                  <a:srgbClr val="202B33"/>
+                </a:solidFill>
+                <a:latin typeface="Arial"/>
+                <a:ea typeface="Arial"/>
+                <a:cs typeface="Arial"/>
+              </a:rPr>
+              <a:t xml:space="preserve">impact of planned social change —</a:t>
+            </a:r>
+            <a:endParaRPr lang="en-US" sz="1500"/>
+          </a:p>
+          <a:p>
+            <a:pPr marL="0" indent="0">
+              <a:lnSpc>
+                <a:spcPts val="1950"/>
+              </a:lnSpc>
+              <a:spcAft>
+                <a:spcPts val="0"/>
+              </a:spcAft>
+              <a:buNone/>
+            </a:pPr>
+            <a:r>
+              <a:rPr lang="en-US" sz="1500" b="0">
+                <a:solidFill>
+                  <a:srgbClr val="202B33"/>
+                </a:solidFill>
+                <a:latin typeface="Arial"/>
+                <a:ea typeface="Arial"/>
+                <a:cs typeface="Arial"/>
+              </a:rPr>
+              <a:t xml:space="preserve">https://doi.org/10.1016/0149-7189%2879%2990048-X),</a:t>
+            </a:r>
+            <a:endParaRPr lang="en-US" sz="1500"/>
+          </a:p>
+          <a:p>
+            <a:pPr marL="0" indent="0">
+              <a:lnSpc>
+                <a:spcPts val="1950"/>
+              </a:lnSpc>
+              <a:spcAft>
+                <a:spcPts val="0"/>
+              </a:spcAft>
+              <a:buNone/>
+            </a:pPr>
+            <a:r>
+              <a:rPr lang="en-US" sz="1500" b="0">
+                <a:solidFill>
+                  <a:srgbClr val="202B33"/>
+                </a:solidFill>
+                <a:latin typeface="Arial"/>
+                <a:ea typeface="Arial"/>
+                <a:cs typeface="Arial"/>
+              </a:rPr>
+              <a:t xml:space="preserve">Evaluation and Program Planning 2(1, 67–90.</a:t>
+            </a:r>
+            <a:endParaRPr lang="en-US" sz="1500"/>
+          </a:p>
+        </p:txBody>
+      </p:sp>
+      <p:sp>
+        <p:nvSpPr>
+          <p:cNvPr id="6" name="Text 6"/>
+          <p:cNvSpPr txBox="1"/>
+          <p:nvPr/>
+        </p:nvSpPr>
+        <p:spPr>
+          <a:xfrm>
+            <a:off x="457200" y="7486650"/>
+            <a:ext cx="8820150" cy="190500"/>
+          </a:xfrm>
+          <a:prstGeom prst="rect">
+            <a:avLst/>
+          </a:prstGeom>
+          <a:noFill/>
+          <a:ln>
+            <a:noFill/>
+          </a:ln>
+        </p:spPr>
+        <p:txBody>
+          <a:bodyPr wrap="none" lIns="0" tIns="0" rIns="0" bIns="0" anchor="t">
+            <a:noAutofit/>
+          </a:bodyPr>
+          <a:lstStyle/>
+          <a:p>
+            <a:pPr marL="0" indent="0">
+              <a:lnSpc>
+                <a:spcPts val="1268"/>
+              </a:lnSpc>
+              <a:spcAft>
+                <a:spcPts val="0"/>
+              </a:spcAft>
+              <a:buNone/>
+            </a:pPr>
+            <a:r>
+              <a:rPr lang="en-US" sz="975" b="0">
+                <a:solidFill>
+                  <a:srgbClr val="48555B"/>
+                </a:solidFill>
+                <a:latin typeface="Arial"/>
+                <a:ea typeface="Arial"/>
+                <a:cs typeface="Arial"/>
+              </a:rPr>
+              <a:t xml:space="preserve">The Future of Product Engineering: Break the Mirror on Purpose</a:t>
+            </a:r>
+            <a:endParaRPr lang="en-US" sz="975"/>
+          </a:p>
+        </p:txBody>
+      </p:sp>
+      <p:sp>
+        <p:nvSpPr>
+          <p:cNvPr id="7" name="Text 7"/>
+          <p:cNvSpPr txBox="1"/>
+          <p:nvPr/>
+        </p:nvSpPr>
+        <p:spPr>
+          <a:xfrm>
+            <a:off x="9391650" y="7486650"/>
+            <a:ext cx="238125" cy="190500"/>
+          </a:xfrm>
+          <a:prstGeom prst="rect">
+            <a:avLst/>
+          </a:prstGeom>
+          <a:noFill/>
+          <a:ln>
+            <a:noFill/>
+          </a:ln>
+        </p:spPr>
+        <p:txBody>
+          <a:bodyPr wrap="none" lIns="0" tIns="0" rIns="0" bIns="0" anchor="t">
+            <a:noAutofit/>
+          </a:bodyPr>
+          <a:lstStyle/>
+          <a:p>
+            <a:pPr marL="0" indent="0">
+              <a:lnSpc>
+                <a:spcPts val="1268"/>
+              </a:lnSpc>
+              <a:spcAft>
+                <a:spcPts val="0"/>
+              </a:spcAft>
+              <a:buNone/>
+            </a:pPr>
+            <a:r>
+              <a:rPr lang="en-US" sz="975" b="0">
+                <a:solidFill>
+                  <a:srgbClr val="48555B"/>
+                </a:solidFill>
+                <a:latin typeface="Arial"/>
+                <a:ea typeface="Arial"/>
+                <a:cs typeface="Arial"/>
+              </a:rPr>
+              <a:t xml:space="preserve">15</a:t>
             </a:r>
             <a:endParaRPr lang="en-US" sz="975"/>
           </a:p>
@@ -10019,7 +13316,7 @@
                 <a:ea typeface="Arial"/>
                 <a:cs typeface="Arial"/>
               </a:rPr>
-              <a:t xml:space="preserve">01 / 11    SOURCE SLIDE 1</a:t>
+              <a:t xml:space="preserve">01 / 12    SOURCE SLIDE 1</a:t>
             </a:r>
             <a:endParaRPr lang="en-US" sz="1050"/>
           </a:p>
@@ -10944,7 +14241,7 @@
                 <a:ea typeface="Arial"/>
                 <a:cs typeface="Arial"/>
               </a:rPr>
-              <a:t xml:space="preserve">02 / 11    SOURCE SLIDE 3</a:t>
+              <a:t xml:space="preserve">02 / 12    SOURCE SLIDE 3</a:t>
             </a:r>
             <a:endParaRPr lang="en-US" sz="1050"/>
           </a:p>
@@ -11846,7 +15143,7 @@
                 <a:ea typeface="Arial"/>
                 <a:cs typeface="Arial"/>
               </a:rPr>
-              <a:t xml:space="preserve">03 / 11    SOURCE SLIDE 4</a:t>
+              <a:t xml:space="preserve">03 / 12    SOURCE SLIDE 4</a:t>
             </a:r>
             <a:endParaRPr lang="en-US" sz="1050"/>
           </a:p>
@@ -12679,7 +15976,7 @@
                 <a:ea typeface="Arial"/>
                 <a:cs typeface="Arial"/>
               </a:rPr>
-              <a:t xml:space="preserve">04 / 11    SOURCE SLIDE 5</a:t>
+              <a:t xml:space="preserve">04 / 12    SOURCE SLIDE 5</a:t>
             </a:r>
             <a:endParaRPr lang="en-US" sz="1050"/>
           </a:p>
@@ -13613,7 +16910,7 @@
                 <a:ea typeface="Arial"/>
                 <a:cs typeface="Arial"/>
               </a:rPr>
-              <a:t xml:space="preserve">05 / 11    SOURCE SLIDE 6</a:t>
+              <a:t xml:space="preserve">05 / 12    SOURCE SLIDE 6</a:t>
             </a:r>
             <a:endParaRPr lang="en-US" sz="1050"/>
           </a:p>
@@ -13968,29 +17265,6 @@
             </a:r>
             <a:endParaRPr lang="en-US" sz="1500"/>
           </a:p>
-          <a:p>
-            <a:pPr marL="0" indent="0">
-              <a:lnSpc>
-                <a:spcPts val="1950"/>
-              </a:lnSpc>
-              <a:spcAft>
-                <a:spcPts val="0"/>
-              </a:spcAft>
-              <a:buNone/>
-            </a:pPr>
-            <a:r>
-              <a:rPr lang="en-US" sz="1500" b="0">
-                <a:solidFill>
-                  <a:srgbClr val="202B33"/>
-                </a:solidFill>
-                <a:latin typeface="Arial"/>
-                <a:ea typeface="Arial"/>
-                <a:cs typeface="Arial"/>
-              </a:rPr>
-              <a:t xml:space="preserve">Now make them disagree. Research says</a:t>
-            </a:r>
-            <a:endParaRPr lang="en-US" sz="1500"/>
-          </a:p>
         </p:txBody>
       </p:sp>
       <p:sp>
@@ -14036,6 +17310,29 @@
                 <a:ea typeface="Arial"/>
                 <a:cs typeface="Arial"/>
               </a:rPr>
+              <a:t xml:space="preserve">Now make them disagree. Research says</a:t>
+            </a:r>
+            <a:endParaRPr lang="en-US" sz="1500"/>
+          </a:p>
+          <a:p>
+            <a:pPr marL="0" indent="0">
+              <a:lnSpc>
+                <a:spcPts val="1950"/>
+              </a:lnSpc>
+              <a:spcAft>
+                <a:spcPts val="0"/>
+              </a:spcAft>
+              <a:buNone/>
+            </a:pPr>
+            <a:r>
+              <a:rPr lang="en-US" sz="1500" b="0">
+                <a:solidFill>
+                  <a:srgbClr val="202B33"/>
+                </a:solidFill>
+                <a:latin typeface="Arial"/>
+                <a:ea typeface="Arial"/>
+                <a:cs typeface="Arial"/>
+              </a:rPr>
               <a:t xml:space="preserve">onboarding lacks a feature. Feedback says</a:t>
             </a:r>
             <a:endParaRPr lang="en-US" sz="1500"/>
@@ -14266,53 +17563,7 @@
                 <a:ea typeface="Arial"/>
                 <a:cs typeface="Arial"/>
               </a:rPr>
-              <a:t xml:space="preserve">exercised in public there. A standing brief</a:t>
-            </a:r>
-            <a:endParaRPr lang="en-US" sz="1500"/>
-          </a:p>
-          <a:p>
-            <a:pPr marL="0" indent="0">
-              <a:lnSpc>
-                <a:spcPts val="1950"/>
-              </a:lnSpc>
-              <a:spcAft>
-                <a:spcPts val="0"/>
-              </a:spcAft>
-              <a:buNone/>
-            </a:pPr>
-            <a:r>
-              <a:rPr lang="en-US" sz="1500" b="0">
-                <a:solidFill>
-                  <a:srgbClr val="202B33"/>
-                </a:solidFill>
-                <a:latin typeface="Arial"/>
-                <a:ea typeface="Arial"/>
-                <a:cs typeface="Arial"/>
-              </a:rPr>
-              <a:t xml:space="preserve">is useful; a dashboard nobody opens is just</a:t>
-            </a:r>
-            <a:endParaRPr lang="en-US" sz="1500"/>
-          </a:p>
-          <a:p>
-            <a:pPr marL="0" indent="0">
-              <a:lnSpc>
-                <a:spcPts val="1950"/>
-              </a:lnSpc>
-              <a:spcAft>
-                <a:spcPts val="0"/>
-              </a:spcAft>
-              <a:buNone/>
-            </a:pPr>
-            <a:r>
-              <a:rPr lang="en-US" sz="1500" b="0">
-                <a:solidFill>
-                  <a:srgbClr val="202B33"/>
-                </a:solidFill>
-                <a:latin typeface="Arial"/>
-                <a:ea typeface="Arial"/>
-                <a:cs typeface="Arial"/>
-              </a:rPr>
-              <a:t xml:space="preserve">another place to store the mistake.</a:t>
+              <a:t xml:space="preserve">exercised in public there.</a:t>
             </a:r>
             <a:endParaRPr lang="en-US" sz="1500"/>
           </a:p>
@@ -14492,7 +17743,7 @@
                 <a:ea typeface="Arial"/>
                 <a:cs typeface="Arial"/>
               </a:rPr>
-              <a:t xml:space="preserve">06 / 11    SOURCE SLIDE 7</a:t>
+              <a:t xml:space="preserve">06 / 12    SOURCE SLIDE 7</a:t>
             </a:r>
             <a:endParaRPr lang="en-US" sz="1050"/>
           </a:p>
@@ -14778,75 +18029,6 @@
             </a:r>
             <a:endParaRPr lang="en-US" sz="1500"/>
           </a:p>
-          <a:p>
-            <a:pPr marL="0" indent="0">
-              <a:lnSpc>
-                <a:spcPts val="1950"/>
-              </a:lnSpc>
-              <a:spcAft>
-                <a:spcPts val="0"/>
-              </a:spcAft>
-              <a:buNone/>
-            </a:pPr>
-            <a:r>
-              <a:rPr lang="en-US" sz="1500" b="0">
-                <a:solidFill>
-                  <a:srgbClr val="202B33"/>
-                </a:solidFill>
-                <a:latin typeface="Arial"/>
-                <a:ea typeface="Arial"/>
-                <a:cs typeface="Arial"/>
-              </a:rPr>
-              <a:t xml:space="preserve"/>
-            </a:r>
-            <a:endParaRPr lang="en-US" sz="1500"/>
-          </a:p>
-          <a:p>
-            <a:pPr marL="0" indent="0">
-              <a:lnSpc>
-                <a:spcPts val="1950"/>
-              </a:lnSpc>
-              <a:spcAft>
-                <a:spcPts val="0"/>
-              </a:spcAft>
-              <a:buNone/>
-            </a:pPr>
-            <a:r>
-              <a:rPr lang="en-US" sz="1500" b="0">
-                <a:solidFill>
-                  <a:srgbClr val="202B33"/>
-                </a:solidFill>
-                <a:latin typeface="Arial"/>
-                <a:ea typeface="Arial"/>
-                <a:cs typeface="Arial"/>
-              </a:rPr>
-              <a:t xml:space="preserve">Who estimated a ticket last week? Keep your</a:t>
-            </a:r>
-            <a:endParaRPr lang="en-US" sz="1500"/>
-          </a:p>
-          <a:p>
-            <a:pPr marL="0" indent="0">
-              <a:lnSpc>
-                <a:spcPts val="1950"/>
-              </a:lnSpc>
-              <a:spcAft>
-                <a:spcPts val="0"/>
-              </a:spcAft>
-              <a:buNone/>
-            </a:pPr>
-            <a:r>
-              <a:rPr lang="en-US" sz="1500" b="0">
-                <a:solidFill>
-                  <a:srgbClr val="202B33"/>
-                </a:solidFill>
-                <a:latin typeface="Arial"/>
-                <a:ea typeface="Arial"/>
-                <a:cs typeface="Arial"/>
-              </a:rPr>
-              <a:t xml:space="preserve">hands up long enough to count. That is this</a:t>
-            </a:r>
-            <a:endParaRPr lang="en-US" sz="1500"/>
-          </a:p>
         </p:txBody>
       </p:sp>
       <p:sp>
@@ -14873,75 +18055,6 @@
             <a:noAutofit/>
           </a:bodyPr>
           <a:lstStyle/>
-          <a:p>
-            <a:pPr marL="0" indent="0">
-              <a:lnSpc>
-                <a:spcPts val="1950"/>
-              </a:lnSpc>
-              <a:spcAft>
-                <a:spcPts val="0"/>
-              </a:spcAft>
-              <a:buNone/>
-            </a:pPr>
-            <a:r>
-              <a:rPr lang="en-US" sz="1500" b="0">
-                <a:solidFill>
-                  <a:srgbClr val="202B33"/>
-                </a:solidFill>
-                <a:latin typeface="Arial"/>
-                <a:ea typeface="Arial"/>
-                <a:cs typeface="Arial"/>
-              </a:rPr>
-              <a:t xml:space="preserve">room, not an industry survey. If half the</a:t>
-            </a:r>
-            <a:endParaRPr lang="en-US" sz="1500"/>
-          </a:p>
-          <a:p>
-            <a:pPr marL="0" indent="0">
-              <a:lnSpc>
-                <a:spcPts val="1950"/>
-              </a:lnSpc>
-              <a:spcAft>
-                <a:spcPts val="0"/>
-              </a:spcAft>
-              <a:buNone/>
-            </a:pPr>
-            <a:r>
-              <a:rPr lang="en-US" sz="1500" b="0">
-                <a:solidFill>
-                  <a:srgbClr val="202B33"/>
-                </a:solidFill>
-                <a:latin typeface="Arial"/>
-                <a:ea typeface="Arial"/>
-                <a:cs typeface="Arial"/>
-              </a:rPr>
-              <a:t xml:space="preserve">room did it yesterday, then effort has left</a:t>
-            </a:r>
-            <a:endParaRPr lang="en-US" sz="1500"/>
-          </a:p>
-          <a:p>
-            <a:pPr marL="0" indent="0">
-              <a:lnSpc>
-                <a:spcPts val="1950"/>
-              </a:lnSpc>
-              <a:spcAft>
-                <a:spcPts val="0"/>
-              </a:spcAft>
-              <a:buNone/>
-            </a:pPr>
-            <a:r>
-              <a:rPr lang="en-US" sz="1500" b="0">
-                <a:solidFill>
-                  <a:srgbClr val="202B33"/>
-                </a:solidFill>
-                <a:latin typeface="Arial"/>
-                <a:ea typeface="Arial"/>
-                <a:cs typeface="Arial"/>
-              </a:rPr>
-              <a:t xml:space="preserve">some rubrics and is alive in others.</a:t>
-            </a:r>
-            <a:endParaRPr lang="en-US" sz="1500"/>
-          </a:p>
           <a:p>
             <a:pPr marL="0" indent="0">
               <a:lnSpc>
@@ -15302,7 +18415,7 @@
                 <a:ea typeface="Arial"/>
                 <a:cs typeface="Arial"/>
               </a:rPr>
-              <a:t xml:space="preserve">07 / 11    SOURCE SLIDE 9</a:t>
+              <a:t xml:space="preserve">07 / 12    SOURCE SLIDE 9</a:t>
             </a:r>
             <a:endParaRPr lang="en-US" sz="1050"/>
           </a:p>
@@ -15702,99 +18815,76 @@
                 <a:ea typeface="Arial"/>
                 <a:cs typeface="Arial"/>
               </a:rPr>
-              <a:t xml:space="preserve">person approves the message and recipients.</a:t>
-            </a:r>
-            <a:endParaRPr lang="en-US" sz="1500"/>
-          </a:p>
-          <a:p>
-            <a:pPr marL="0" indent="0">
-              <a:lnSpc>
-                <a:spcPts val="1950"/>
-              </a:lnSpc>
-              <a:spcAft>
-                <a:spcPts val="0"/>
-              </a:spcAft>
-              <a:buNone/>
-            </a:pPr>
-            <a:r>
-              <a:rPr lang="en-US" sz="1500" b="0">
-                <a:solidFill>
-                  <a:srgbClr val="202B33"/>
-                </a:solidFill>
-                <a:latin typeface="Arial"/>
-                <a:ea typeface="Arial"/>
-                <a:cs typeface="Arial"/>
-              </a:rPr>
-              <a:t xml:space="preserve">Acceptance enrolls the customer behind a</a:t>
-            </a:r>
-            <a:endParaRPr lang="en-US" sz="1500"/>
-          </a:p>
-          <a:p>
-            <a:pPr marL="0" indent="0">
-              <a:lnSpc>
-                <a:spcPts val="1950"/>
-              </a:lnSpc>
-              <a:spcAft>
-                <a:spcPts val="0"/>
-              </a:spcAft>
-              <a:buNone/>
-            </a:pPr>
-            <a:r>
-              <a:rPr lang="en-US" sz="1500" b="0">
-                <a:solidFill>
-                  <a:srgbClr val="202B33"/>
-                </a:solidFill>
-                <a:latin typeface="Arial"/>
-                <a:ea typeface="Arial"/>
-                <a:cs typeface="Arial"/>
-              </a:rPr>
-              <a:t xml:space="preserve">flag. Narrow feedback tells us what to try</a:t>
-            </a:r>
-            <a:endParaRPr lang="en-US" sz="1500"/>
-          </a:p>
-          <a:p>
-            <a:pPr marL="0" indent="0">
-              <a:lnSpc>
-                <a:spcPts val="1950"/>
-              </a:lnSpc>
-              <a:spcAft>
-                <a:spcPts val="0"/>
-              </a:spcAft>
-              <a:buNone/>
-            </a:pPr>
-            <a:r>
-              <a:rPr lang="en-US" sz="1500" b="0">
-                <a:solidFill>
-                  <a:srgbClr val="202B33"/>
-                </a:solidFill>
-                <a:latin typeface="Arial"/>
-                <a:ea typeface="Arial"/>
-                <a:cs typeface="Arial"/>
-              </a:rPr>
-              <a:t xml:space="preserve">next; it does not automatically establish a</a:t>
-            </a:r>
-            <a:endParaRPr lang="en-US" sz="1500"/>
-          </a:p>
-          <a:p>
-            <a:pPr marL="0" indent="0">
-              <a:lnSpc>
-                <a:spcPts val="1950"/>
-              </a:lnSpc>
-              <a:spcAft>
-                <a:spcPts val="0"/>
-              </a:spcAft>
-              <a:buNone/>
-            </a:pPr>
-            <a:r>
-              <a:rPr lang="en-US" sz="1500" b="0">
-                <a:solidFill>
-                  <a:srgbClr val="202B33"/>
-                </a:solidFill>
-                <a:latin typeface="Arial"/>
-                <a:ea typeface="Arial"/>
-                <a:cs typeface="Arial"/>
-              </a:rPr>
-              <a:t xml:space="preserve">causal improvement.</a:t>
+              <a:t xml:space="preserve">person approves the message and the</a:t>
+            </a:r>
+            <a:endParaRPr lang="en-US" sz="1500"/>
+          </a:p>
+          <a:p>
+            <a:pPr marL="0" indent="0">
+              <a:lnSpc>
+                <a:spcPts val="1950"/>
+              </a:lnSpc>
+              <a:spcAft>
+                <a:spcPts val="0"/>
+              </a:spcAft>
+              <a:buNone/>
+            </a:pPr>
+            <a:r>
+              <a:rPr lang="en-US" sz="1500" b="0">
+                <a:solidFill>
+                  <a:srgbClr val="202B33"/>
+                </a:solidFill>
+                <a:latin typeface="Arial"/>
+                <a:ea typeface="Arial"/>
+                <a:cs typeface="Arial"/>
+              </a:rPr>
+              <a:t xml:space="preserve">recipients. Narrow feedback tells us what</a:t>
+            </a:r>
+            <a:endParaRPr lang="en-US" sz="1500"/>
+          </a:p>
+          <a:p>
+            <a:pPr marL="0" indent="0">
+              <a:lnSpc>
+                <a:spcPts val="1950"/>
+              </a:lnSpc>
+              <a:spcAft>
+                <a:spcPts val="0"/>
+              </a:spcAft>
+              <a:buNone/>
+            </a:pPr>
+            <a:r>
+              <a:rPr lang="en-US" sz="1500" b="0">
+                <a:solidFill>
+                  <a:srgbClr val="202B33"/>
+                </a:solidFill>
+                <a:latin typeface="Arial"/>
+                <a:ea typeface="Arial"/>
+                <a:cs typeface="Arial"/>
+              </a:rPr>
+              <a:t xml:space="preserve">to try next; it does not establish a causal</a:t>
+            </a:r>
+            <a:endParaRPr lang="en-US" sz="1500"/>
+          </a:p>
+          <a:p>
+            <a:pPr marL="0" indent="0">
+              <a:lnSpc>
+                <a:spcPts val="1950"/>
+              </a:lnSpc>
+              <a:spcAft>
+                <a:spcPts val="0"/>
+              </a:spcAft>
+              <a:buNone/>
+            </a:pPr>
+            <a:r>
+              <a:rPr lang="en-US" sz="1500" b="0">
+                <a:solidFill>
+                  <a:srgbClr val="202B33"/>
+                </a:solidFill>
+                <a:latin typeface="Arial"/>
+                <a:ea typeface="Arial"/>
+                <a:cs typeface="Arial"/>
+              </a:rPr>
+              <a:t xml:space="preserve">improvement.</a:t>
             </a:r>
             <a:endParaRPr lang="en-US" sz="1500"/>
           </a:p>
@@ -16135,7 +19225,7 @@
                 <a:ea typeface="Arial"/>
                 <a:cs typeface="Arial"/>
               </a:rPr>
-              <a:t xml:space="preserve">08 / 11    SOURCE SLIDE 10</a:t>
+              <a:t xml:space="preserve">08 / 12    SOURCE SLIDE 10</a:t>
             </a:r>
             <a:endParaRPr lang="en-US" sz="1050"/>
           </a:p>

--- a/artifacts/speaking-portfolio-expanded/decks/product-engineering-30min-handout.pptx
+++ b/artifacts/speaking-portfolio-expanded/decks/product-engineering-30min-handout.pptx
@@ -220,7 +220,7 @@
                 <a:ea typeface="Arial"/>
                 <a:cs typeface="Arial"/>
               </a:rPr>
-              <a:t xml:space="preserve">Source slide 11. 16:30 to 21:00</a:t>
+              <a:t xml:space="preserve">Source slide 11. 16:30 to 20:30</a:t>
             </a:r>
             <a:endParaRPr lang="en-US" sz="1200"/>
           </a:p>
@@ -793,7 +793,7 @@
                 <a:ea typeface="Arial"/>
                 <a:cs typeface="Arial"/>
               </a:rPr>
-              <a:t xml:space="preserve">Source slide 12. 21:00 to 23:30</a:t>
+              <a:t xml:space="preserve">Source slide 12. 20:30 to 23:00</a:t>
             </a:r>
             <a:endParaRPr lang="en-US" sz="1200"/>
           </a:p>
@@ -1161,7 +1161,7 @@
                 <a:ea typeface="Arial"/>
                 <a:cs typeface="Arial"/>
               </a:rPr>
-              <a:t xml:space="preserve">Bridge: Graicunas counted 222 possible relationships at six reports, which is a warning about interfaces rather than a staffing ratio, and Bainbridge asks who still gets recovery practice. One more ownership line for the years ahead: tokens stop being a build cost and become fuel, defensive agents run forever, and somebody owns that meter.</a:t>
+              <a:t xml:space="preserve">Bridge: Graicunas counted 222 possible relationships at six reports, which is a warning about interfaces rather than a staffing ratio, and Bainbridge asks who still gets recovery practice. That leaves two predictions to close on, and I will label them as predictions once, because I have measured neither. The first is an ownership line for the years ahead: tokens stop being a build cost and become fuel, defensive agents run forever, and somebody owns that meter.</a:t>
             </a:r>
             <a:endParaRPr lang="en-US" sz="1200"/>
           </a:p>
@@ -1274,7 +1274,7 @@
                 <a:ea typeface="Arial"/>
                 <a:cs typeface="Arial"/>
               </a:rPr>
-              <a:t xml:space="preserve">Source slide 15. 23:30 to 26:30</a:t>
+              <a:t xml:space="preserve">Source slide 15. 23:00 to 27:00</a:t>
             </a:r>
             <a:endParaRPr lang="en-US" sz="1200"/>
           </a:p>
@@ -1459,52 +1459,6 @@
                 <a:cs typeface="Arial"/>
               </a:rPr>
               <a:t xml:space="preserve">Second prediction, and this one is less comfortable. AI does not magically make software work. Well-understood software still gets harder to operate as the world moves under it: you outgrow a performance envelope, you accumulate features, somebody deprecates your dependency. Generation makes the first version cheap. It does not make the tenth year cheap.</a:t>
-            </a:r>
-            <a:endParaRPr lang="en-US" sz="1200"/>
-          </a:p>
-          <a:p>
-            <a:pPr marL="0" indent="0">
-              <a:lnSpc>
-                <a:spcPts val="1560"/>
-              </a:lnSpc>
-              <a:spcAft>
-                <a:spcPts val="0"/>
-              </a:spcAft>
-              <a:buNone/>
-            </a:pPr>
-            <a:r>
-              <a:rPr lang="en-US" sz="1200" b="0">
-                <a:solidFill>
-                  <a:srgbClr val="202b33"/>
-                </a:solidFill>
-                <a:latin typeface="Arial"/>
-                <a:ea typeface="Arial"/>
-                <a:cs typeface="Arial"/>
-              </a:rPr>
-              <a:t xml:space="preserve"/>
-            </a:r>
-            <a:endParaRPr lang="en-US" sz="1200"/>
-          </a:p>
-          <a:p>
-            <a:pPr marL="0" indent="0">
-              <a:lnSpc>
-                <a:spcPts val="1560"/>
-              </a:lnSpc>
-              <a:spcAft>
-                <a:spcPts val="0"/>
-              </a:spcAft>
-              <a:buNone/>
-            </a:pPr>
-            <a:r>
-              <a:rPr lang="en-US" sz="1200" b="0">
-                <a:solidFill>
-                  <a:srgbClr val="202b33"/>
-                </a:solidFill>
-                <a:latin typeface="Arial"/>
-                <a:ea typeface="Arial"/>
-                <a:cs typeface="Arial"/>
-              </a:rPr>
-              <a:t xml:space="preserve">And throwaway software is a taste most of this room has and most of the world does not. We are early adopters; we are delighted to regenerate a tool rather than maintain it. Normal people are not turned on by the idea of vibe coding their own recipe tracker, never mind a Slack replacement. What they will accept is an interface generated for them, adapting in real time, that they never had to choose from a menu of products.</a:t>
             </a:r>
             <a:endParaRPr lang="en-US" sz="1200"/>
           </a:p>
@@ -1893,7 +1847,7 @@
                 <a:ea typeface="Arial"/>
                 <a:cs typeface="Arial"/>
               </a:rPr>
-              <a:t xml:space="preserve">Source slide 15. 23:30 to 26:30</a:t>
+              <a:t xml:space="preserve">Source slide 15. 23:00 to 27:00</a:t>
             </a:r>
             <a:endParaRPr lang="en-US" sz="1200"/>
           </a:p>
@@ -2078,52 +2032,6 @@
                 <a:cs typeface="Arial"/>
               </a:rPr>
               <a:t xml:space="preserve">Second prediction, and this one is less comfortable. AI does not magically make software work. Well-understood software still gets harder to operate as the world moves under it: you outgrow a performance envelope, you accumulate features, somebody deprecates your dependency. Generation makes the first version cheap. It does not make the tenth year cheap.</a:t>
-            </a:r>
-            <a:endParaRPr lang="en-US" sz="1200"/>
-          </a:p>
-          <a:p>
-            <a:pPr marL="0" indent="0">
-              <a:lnSpc>
-                <a:spcPts val="1560"/>
-              </a:lnSpc>
-              <a:spcAft>
-                <a:spcPts val="0"/>
-              </a:spcAft>
-              <a:buNone/>
-            </a:pPr>
-            <a:r>
-              <a:rPr lang="en-US" sz="1200" b="0">
-                <a:solidFill>
-                  <a:srgbClr val="202b33"/>
-                </a:solidFill>
-                <a:latin typeface="Arial"/>
-                <a:ea typeface="Arial"/>
-                <a:cs typeface="Arial"/>
-              </a:rPr>
-              <a:t xml:space="preserve"/>
-            </a:r>
-            <a:endParaRPr lang="en-US" sz="1200"/>
-          </a:p>
-          <a:p>
-            <a:pPr marL="0" indent="0">
-              <a:lnSpc>
-                <a:spcPts val="1560"/>
-              </a:lnSpc>
-              <a:spcAft>
-                <a:spcPts val="0"/>
-              </a:spcAft>
-              <a:buNone/>
-            </a:pPr>
-            <a:r>
-              <a:rPr lang="en-US" sz="1200" b="0">
-                <a:solidFill>
-                  <a:srgbClr val="202b33"/>
-                </a:solidFill>
-                <a:latin typeface="Arial"/>
-                <a:ea typeface="Arial"/>
-                <a:cs typeface="Arial"/>
-              </a:rPr>
-              <a:t xml:space="preserve">And throwaway software is a taste most of this room has and most of the world does not. We are early adopters; we are delighted to regenerate a tool rather than maintain it. Normal people are not turned on by the idea of vibe coding their own recipe tracker, never mind a Slack replacement. What they will accept is an interface generated for them, adapting in real time, that they never had to choose from a menu of products.</a:t>
             </a:r>
             <a:endParaRPr lang="en-US" sz="1200"/>
           </a:p>
@@ -2512,7 +2420,7 @@
                 <a:ea typeface="Arial"/>
                 <a:cs typeface="Arial"/>
               </a:rPr>
-              <a:t xml:space="preserve">Source slide 17. 26:30 to 30:00</a:t>
+              <a:t xml:space="preserve">Source slide 17. 27:00 to 30:00</a:t>
             </a:r>
             <a:endParaRPr lang="en-US" sz="1200"/>
           </a:p>
@@ -9512,14 +9420,69 @@
       </p:sp>
       <p:sp>
         <p:nvSpPr>
-          <p:cNvPr id="4" name="Text 4"/>
+          <p:cNvPr id="4" name="Image background"/>
+          <p:cNvSpPr/>
+          <p:nvPr/>
+        </p:nvSpPr>
+        <p:spPr>
+          <a:xfrm>
+            <a:off x="1554480" y="1781175"/>
+            <a:ext cx="6949440" cy="2714625"/>
+          </a:xfrm>
+          <a:prstGeom prst="rect">
+            <a:avLst/>
+          </a:prstGeom>
+          <a:solidFill>
+            <a:srgbClr val="161D26"/>
+          </a:solidFill>
+          <a:ln>
+            <a:noFill/>
+          </a:ln>
+        </p:spPr>
+      </p:sp>
+      <p:pic>
+        <p:nvPicPr>
+          <p:cNvPr id="5" name="f1622316a6930645ce2701de05e30b019086ac9401bd06917acb71f400ca25e3" descr="Prediction: a grid of chosen apps gives way to one generated surface, adapting per person, with a revived terminal beside it. Who owns that channel is still open, and non-frontier builders can rethink any app as AI-native."/>
+          <p:cNvPicPr>
+            <a:picLocks noChangeAspect="1"/>
+          </p:cNvPicPr>
+          <p:nvPr/>
+        </p:nvPicPr>
+        <p:blipFill>
+          <a:blip r:embed="rIdImage1">
+            <a:extLst>
+              <a:ext uri="{96DAC541-7B7A-43D3-8B79-37D633B846F1}">
+                <asvg:svgBlip xmlns:asvg="http://schemas.microsoft.com/office/drawing/2016/SVG/main" r:embed="rIdSvg1"/>
+              </a:ext>
+            </a:extLst>
+          </a:blip>
+          <a:stretch>
+            <a:fillRect/>
+          </a:stretch>
+        </p:blipFill>
+        <p:spPr>
+          <a:xfrm>
+            <a:off x="1554480" y="1781175"/>
+            <a:ext cx="6949440" cy="2714625"/>
+          </a:xfrm>
+          <a:prstGeom prst="rect">
+            <a:avLst/>
+          </a:prstGeom>
+          <a:ln>
+            <a:noFill/>
+          </a:ln>
+        </p:spPr>
+      </p:pic>
+      <p:sp>
+        <p:nvSpPr>
+          <p:cNvPr id="6" name="Text 6"/>
           <p:cNvSpPr txBox="1"/>
           <p:nvPr/>
         </p:nvSpPr>
         <p:spPr>
           <a:xfrm>
-            <a:off x="457200" y="1971675"/>
-            <a:ext cx="4352925" cy="5314950"/>
+            <a:off x="457200" y="4648200"/>
+            <a:ext cx="4352925" cy="2647950"/>
           </a:xfrm>
           <a:prstGeom prst="rect">
             <a:avLst/>
@@ -9537,153 +9500,130 @@
           <a:p>
             <a:pPr marL="0" indent="0">
               <a:lnSpc>
-                <a:spcPts val="1950"/>
-              </a:lnSpc>
-              <a:spcAft>
-                <a:spcPts val="0"/>
-              </a:spcAft>
-              <a:buNone/>
-            </a:pPr>
-            <a:r>
-              <a:rPr lang="en-US" sz="1500" b="0">
-                <a:solidFill>
-                  <a:srgbClr val="202B33"/>
-                </a:solidFill>
-                <a:latin typeface="Arial"/>
-                <a:ea typeface="Arial"/>
-                <a:cs typeface="Arial"/>
-              </a:rPr>
-              <a:t xml:space="preserve">Generated UI, adapting in real time, per</a:t>
-            </a:r>
-            <a:endParaRPr lang="en-US" sz="1500"/>
-          </a:p>
-          <a:p>
-            <a:pPr marL="0" indent="0">
-              <a:lnSpc>
-                <a:spcPts val="1950"/>
-              </a:lnSpc>
-              <a:spcAft>
-                <a:spcPts val="0"/>
-              </a:spcAft>
-              <a:buNone/>
-            </a:pPr>
-            <a:r>
-              <a:rPr lang="en-US" sz="1500" b="0">
-                <a:solidFill>
-                  <a:srgbClr val="202B33"/>
-                </a:solidFill>
-                <a:latin typeface="Arial"/>
-                <a:ea typeface="Arial"/>
-                <a:cs typeface="Arial"/>
-              </a:rPr>
-              <a:t xml:space="preserve">person</a:t>
-            </a:r>
-            <a:endParaRPr lang="en-US" sz="1500"/>
-          </a:p>
-          <a:p>
-            <a:pPr marL="0" indent="0">
-              <a:lnSpc>
-                <a:spcPts val="1950"/>
-              </a:lnSpc>
-              <a:spcAft>
-                <a:spcPts val="0"/>
-              </a:spcAft>
-              <a:buNone/>
-            </a:pPr>
-            <a:r>
-              <a:rPr lang="en-US" sz="1500" b="0">
-                <a:solidFill>
-                  <a:srgbClr val="202B33"/>
-                </a:solidFill>
-                <a:latin typeface="Arial"/>
-                <a:ea typeface="Arial"/>
-                <a:cs typeface="Arial"/>
-              </a:rPr>
-              <a:t xml:space="preserve"/>
-            </a:r>
-            <a:endParaRPr lang="en-US" sz="1500"/>
-          </a:p>
-          <a:p>
-            <a:pPr marL="0" indent="0">
-              <a:lnSpc>
-                <a:spcPts val="1950"/>
-              </a:lnSpc>
-              <a:spcAft>
-                <a:spcPts val="0"/>
-              </a:spcAft>
-              <a:buNone/>
-            </a:pPr>
-            <a:r>
-              <a:rPr lang="en-US" sz="1500" b="0">
-                <a:solidFill>
-                  <a:srgbClr val="202B33"/>
-                </a:solidFill>
-                <a:latin typeface="Arial"/>
-                <a:ea typeface="Arial"/>
-                <a:cs typeface="Arial"/>
-              </a:rPr>
-              <a:t xml:space="preserve">Yes, the software you mastered is going</a:t>
-            </a:r>
-            <a:endParaRPr lang="en-US" sz="1500"/>
-          </a:p>
-          <a:p>
-            <a:pPr marL="0" indent="0">
-              <a:lnSpc>
-                <a:spcPts val="1950"/>
-              </a:lnSpc>
-              <a:spcAft>
-                <a:spcPts val="0"/>
-              </a:spcAft>
-              <a:buNone/>
-            </a:pPr>
-            <a:r>
-              <a:rPr lang="en-US" sz="1500" b="0">
-                <a:solidFill>
-                  <a:srgbClr val="202B33"/>
-                </a:solidFill>
-                <a:latin typeface="Arial"/>
-                <a:ea typeface="Arial"/>
-                <a:cs typeface="Arial"/>
-              </a:rPr>
-              <a:t xml:space="preserve">away. As you know it.</a:t>
-            </a:r>
-            <a:endParaRPr lang="en-US" sz="1500"/>
-          </a:p>
-          <a:p>
-            <a:pPr marL="0" indent="0">
-              <a:lnSpc>
-                <a:spcPts val="1950"/>
-              </a:lnSpc>
-              <a:spcAft>
-                <a:spcPts val="0"/>
-              </a:spcAft>
-              <a:buNone/>
-            </a:pPr>
-            <a:r>
-              <a:rPr lang="en-US" sz="1500" b="0">
-                <a:solidFill>
-                  <a:srgbClr val="202B33"/>
-                </a:solidFill>
-                <a:latin typeface="Arial"/>
-                <a:ea typeface="Arial"/>
-                <a:cs typeface="Arial"/>
-              </a:rPr>
-              <a:t xml:space="preserve"/>
-            </a:r>
-            <a:endParaRPr lang="en-US" sz="1500"/>
-          </a:p>
-          <a:p>
-            <a:pPr marL="0" indent="0">
-              <a:lnSpc>
-                <a:spcPts val="1950"/>
-              </a:lnSpc>
-              <a:spcAft>
-                <a:spcPts val="0"/>
-              </a:spcAft>
-              <a:buNone/>
-            </a:pPr>
-            <a:r>
-              <a:rPr lang="en-US" sz="1500" b="0">
+                <a:spcPts val="1575"/>
+              </a:lnSpc>
+              <a:spcAft>
+                <a:spcPts val="0"/>
+              </a:spcAft>
+              <a:buNone/>
+            </a:pPr>
+            <a:r>
+              <a:rPr lang="en-US" sz="1200" b="0">
+                <a:solidFill>
+                  <a:srgbClr val="202B33"/>
+                </a:solidFill>
+                <a:latin typeface="Arial"/>
+                <a:ea typeface="Arial"/>
+                <a:cs typeface="Arial"/>
+              </a:rPr>
+              <a:t xml:space="preserve">Generated UI, adapting in real time, per person</a:t>
+            </a:r>
+            <a:endParaRPr lang="en-US" sz="1200"/>
+          </a:p>
+          <a:p>
+            <a:pPr marL="0" indent="0">
+              <a:lnSpc>
+                <a:spcPts val="1575"/>
+              </a:lnSpc>
+              <a:spcAft>
+                <a:spcPts val="0"/>
+              </a:spcAft>
+              <a:buNone/>
+            </a:pPr>
+            <a:r>
+              <a:rPr lang="en-US" sz="1200" b="0">
+                <a:solidFill>
+                  <a:srgbClr val="202B33"/>
+                </a:solidFill>
+                <a:latin typeface="Arial"/>
+                <a:ea typeface="Arial"/>
+                <a:cs typeface="Arial"/>
+              </a:rPr>
+              <a:t xml:space="preserve"/>
+            </a:r>
+            <a:endParaRPr lang="en-US" sz="1200"/>
+          </a:p>
+          <a:p>
+            <a:pPr marL="0" indent="0">
+              <a:lnSpc>
+                <a:spcPts val="1575"/>
+              </a:lnSpc>
+              <a:spcAft>
+                <a:spcPts val="0"/>
+              </a:spcAft>
+              <a:buNone/>
+            </a:pPr>
+            <a:r>
+              <a:rPr lang="en-US" sz="1200" b="0">
+                <a:solidFill>
+                  <a:srgbClr val="202B33"/>
+                </a:solidFill>
+                <a:latin typeface="Arial"/>
+                <a:ea typeface="Arial"/>
+                <a:cs typeface="Arial"/>
+              </a:rPr>
+              <a:t xml:space="preserve">Yes, the software you mastered is going away. As you</a:t>
+            </a:r>
+            <a:endParaRPr lang="en-US" sz="1200"/>
+          </a:p>
+          <a:p>
+            <a:pPr marL="0" indent="0">
+              <a:lnSpc>
+                <a:spcPts val="1575"/>
+              </a:lnSpc>
+              <a:spcAft>
+                <a:spcPts val="0"/>
+              </a:spcAft>
+              <a:buNone/>
+            </a:pPr>
+            <a:r>
+              <a:rPr lang="en-US" sz="1200" b="0">
+                <a:solidFill>
+                  <a:srgbClr val="202B33"/>
+                </a:solidFill>
+                <a:latin typeface="Arial"/>
+                <a:ea typeface="Arial"/>
+                <a:cs typeface="Arial"/>
+              </a:rPr>
+              <a:t xml:space="preserve">know it.</a:t>
+            </a:r>
+            <a:endParaRPr lang="en-US" sz="1200"/>
+          </a:p>
+          <a:p>
+            <a:pPr marL="0" indent="0">
+              <a:lnSpc>
+                <a:spcPts val="1575"/>
+              </a:lnSpc>
+              <a:spcAft>
+                <a:spcPts val="0"/>
+              </a:spcAft>
+              <a:buNone/>
+            </a:pPr>
+            <a:r>
+              <a:rPr lang="en-US" sz="1200" b="0">
+                <a:solidFill>
+                  <a:srgbClr val="202B33"/>
+                </a:solidFill>
+                <a:latin typeface="Arial"/>
+                <a:ea typeface="Arial"/>
+                <a:cs typeface="Arial"/>
+              </a:rPr>
+              <a:t xml:space="preserve"/>
+            </a:r>
+            <a:endParaRPr lang="en-US" sz="1200"/>
+          </a:p>
+          <a:p>
+            <a:pPr marL="0" indent="0">
+              <a:lnSpc>
+                <a:spcPts val="1575"/>
+              </a:lnSpc>
+              <a:spcAft>
+                <a:spcPts val="0"/>
+              </a:spcAft>
+              <a:buNone/>
+            </a:pPr>
+            <a:r>
+              <a:rPr lang="en-US" sz="1200" b="0">
                 <a:solidFill>
                   <a:srgbClr val="202B33"/>
                 </a:solidFill>
@@ -9693,204 +9633,66 @@
               </a:rPr>
               <a:t xml:space="preserve">The channel is not spoken for.</a:t>
             </a:r>
-            <a:endParaRPr lang="en-US" sz="1500"/>
-          </a:p>
-          <a:p>
-            <a:pPr marL="0" indent="0">
-              <a:lnSpc>
-                <a:spcPts val="1950"/>
-              </a:lnSpc>
-              <a:spcAft>
-                <a:spcPts val="0"/>
-              </a:spcAft>
-              <a:buNone/>
-            </a:pPr>
-            <a:r>
-              <a:rPr lang="en-US" sz="1500" b="0">
-                <a:solidFill>
-                  <a:srgbClr val="202B33"/>
-                </a:solidFill>
-                <a:latin typeface="Arial"/>
-                <a:ea typeface="Arial"/>
-                <a:cs typeface="Arial"/>
-              </a:rPr>
-              <a:t xml:space="preserve"/>
-            </a:r>
-            <a:endParaRPr lang="en-US" sz="1500"/>
-          </a:p>
-          <a:p>
-            <a:pPr marL="0" indent="0">
-              <a:lnSpc>
-                <a:spcPts val="1950"/>
-              </a:lnSpc>
-              <a:spcAft>
-                <a:spcPts val="0"/>
-              </a:spcAft>
-              <a:buNone/>
-            </a:pPr>
-            <a:r>
-              <a:rPr lang="en-US" sz="1500" b="0">
-                <a:solidFill>
-                  <a:srgbClr val="202B33"/>
-                </a:solidFill>
-                <a:latin typeface="Arial"/>
-                <a:ea typeface="Arial"/>
-                <a:cs typeface="Arial"/>
-              </a:rPr>
-              <a:t xml:space="preserve">Second prediction, and this one is less</a:t>
-            </a:r>
-            <a:endParaRPr lang="en-US" sz="1500"/>
-          </a:p>
-          <a:p>
-            <a:pPr marL="0" indent="0">
-              <a:lnSpc>
-                <a:spcPts val="1950"/>
-              </a:lnSpc>
-              <a:spcAft>
-                <a:spcPts val="0"/>
-              </a:spcAft>
-              <a:buNone/>
-            </a:pPr>
-            <a:r>
-              <a:rPr lang="en-US" sz="1500" b="0">
-                <a:solidFill>
-                  <a:srgbClr val="202B33"/>
-                </a:solidFill>
-                <a:latin typeface="Arial"/>
-                <a:ea typeface="Arial"/>
-                <a:cs typeface="Arial"/>
-              </a:rPr>
-              <a:t xml:space="preserve">comfortable. AI does not magically make</a:t>
-            </a:r>
-            <a:endParaRPr lang="en-US" sz="1500"/>
-          </a:p>
-          <a:p>
-            <a:pPr marL="0" indent="0">
-              <a:lnSpc>
-                <a:spcPts val="1950"/>
-              </a:lnSpc>
-              <a:spcAft>
-                <a:spcPts val="0"/>
-              </a:spcAft>
-              <a:buNone/>
-            </a:pPr>
-            <a:r>
-              <a:rPr lang="en-US" sz="1500" b="0">
-                <a:solidFill>
-                  <a:srgbClr val="202B33"/>
-                </a:solidFill>
-                <a:latin typeface="Arial"/>
-                <a:ea typeface="Arial"/>
-                <a:cs typeface="Arial"/>
-              </a:rPr>
-              <a:t xml:space="preserve">software work. Well-understood software</a:t>
-            </a:r>
-            <a:endParaRPr lang="en-US" sz="1500"/>
-          </a:p>
-          <a:p>
-            <a:pPr marL="0" indent="0">
-              <a:lnSpc>
-                <a:spcPts val="1950"/>
-              </a:lnSpc>
-              <a:spcAft>
-                <a:spcPts val="0"/>
-              </a:spcAft>
-              <a:buNone/>
-            </a:pPr>
-            <a:r>
-              <a:rPr lang="en-US" sz="1500" b="0">
-                <a:solidFill>
-                  <a:srgbClr val="202B33"/>
-                </a:solidFill>
-                <a:latin typeface="Arial"/>
-                <a:ea typeface="Arial"/>
-                <a:cs typeface="Arial"/>
-              </a:rPr>
-              <a:t xml:space="preserve">still gets harder to operate as the world</a:t>
-            </a:r>
-            <a:endParaRPr lang="en-US" sz="1500"/>
-          </a:p>
-          <a:p>
-            <a:pPr marL="0" indent="0">
-              <a:lnSpc>
-                <a:spcPts val="1950"/>
-              </a:lnSpc>
-              <a:spcAft>
-                <a:spcPts val="0"/>
-              </a:spcAft>
-              <a:buNone/>
-            </a:pPr>
-            <a:r>
-              <a:rPr lang="en-US" sz="1500" b="0">
-                <a:solidFill>
-                  <a:srgbClr val="202B33"/>
-                </a:solidFill>
-                <a:latin typeface="Arial"/>
-                <a:ea typeface="Arial"/>
-                <a:cs typeface="Arial"/>
-              </a:rPr>
-              <a:t xml:space="preserve">moves under it: you outgrow a performance</a:t>
-            </a:r>
-            <a:endParaRPr lang="en-US" sz="1500"/>
-          </a:p>
-          <a:p>
-            <a:pPr marL="0" indent="0">
-              <a:lnSpc>
-                <a:spcPts val="1950"/>
-              </a:lnSpc>
-              <a:spcAft>
-                <a:spcPts val="0"/>
-              </a:spcAft>
-              <a:buNone/>
-            </a:pPr>
-            <a:r>
-              <a:rPr lang="en-US" sz="1500" b="0">
-                <a:solidFill>
-                  <a:srgbClr val="202B33"/>
-                </a:solidFill>
-                <a:latin typeface="Arial"/>
-                <a:ea typeface="Arial"/>
-                <a:cs typeface="Arial"/>
-              </a:rPr>
-              <a:t xml:space="preserve">envelope, you accumulate features, somebody</a:t>
-            </a:r>
-            <a:endParaRPr lang="en-US" sz="1500"/>
-          </a:p>
-          <a:p>
-            <a:pPr marL="0" indent="0">
-              <a:lnSpc>
-                <a:spcPts val="1950"/>
-              </a:lnSpc>
-              <a:spcAft>
-                <a:spcPts val="0"/>
-              </a:spcAft>
-              <a:buNone/>
-            </a:pPr>
-            <a:r>
-              <a:rPr lang="en-US" sz="1500" b="0">
-                <a:solidFill>
-                  <a:srgbClr val="202B33"/>
-                </a:solidFill>
-                <a:latin typeface="Arial"/>
-                <a:ea typeface="Arial"/>
-                <a:cs typeface="Arial"/>
-              </a:rPr>
-              <a:t xml:space="preserve">deprecates your dependency. Generation</a:t>
-            </a:r>
-            <a:endParaRPr lang="en-US" sz="1500"/>
+            <a:endParaRPr lang="en-US" sz="1200"/>
+          </a:p>
+          <a:p>
+            <a:pPr marL="0" indent="0">
+              <a:lnSpc>
+                <a:spcPts val="1575"/>
+              </a:lnSpc>
+              <a:spcAft>
+                <a:spcPts val="0"/>
+              </a:spcAft>
+              <a:buNone/>
+            </a:pPr>
+            <a:r>
+              <a:rPr lang="en-US" sz="1200" b="0">
+                <a:solidFill>
+                  <a:srgbClr val="202B33"/>
+                </a:solidFill>
+                <a:latin typeface="Arial"/>
+                <a:ea typeface="Arial"/>
+                <a:cs typeface="Arial"/>
+              </a:rPr>
+              <a:t xml:space="preserve"/>
+            </a:r>
+            <a:endParaRPr lang="en-US" sz="1200"/>
+          </a:p>
+          <a:p>
+            <a:pPr marL="0" indent="0">
+              <a:lnSpc>
+                <a:spcPts val="1575"/>
+              </a:lnSpc>
+              <a:spcAft>
+                <a:spcPts val="0"/>
+              </a:spcAft>
+              <a:buNone/>
+            </a:pPr>
+            <a:r>
+              <a:rPr lang="en-US" sz="1200" b="0">
+                <a:solidFill>
+                  <a:srgbClr val="202B33"/>
+                </a:solidFill>
+                <a:latin typeface="Arial"/>
+                <a:ea typeface="Arial"/>
+                <a:cs typeface="Arial"/>
+              </a:rPr>
+              <a:t xml:space="preserve">Second prediction, and this one is less comfortable.</a:t>
+            </a:r>
+            <a:endParaRPr lang="en-US" sz="1200"/>
           </a:p>
         </p:txBody>
       </p:sp>
       <p:sp>
         <p:nvSpPr>
-          <p:cNvPr id="5" name="Text 5"/>
+          <p:cNvPr id="7" name="Text 7"/>
           <p:cNvSpPr txBox="1"/>
           <p:nvPr/>
         </p:nvSpPr>
         <p:spPr>
           <a:xfrm>
-            <a:off x="5238750" y="1971675"/>
-            <a:ext cx="4362450" cy="5314950"/>
+            <a:off x="5238750" y="4648200"/>
+            <a:ext cx="4362450" cy="2647950"/>
           </a:xfrm>
           <a:prstGeom prst="rect">
             <a:avLst/>
@@ -9908,330 +9710,169 @@
           <a:p>
             <a:pPr marL="0" indent="0">
               <a:lnSpc>
-                <a:spcPts val="1950"/>
-              </a:lnSpc>
-              <a:spcAft>
-                <a:spcPts val="0"/>
-              </a:spcAft>
-              <a:buNone/>
-            </a:pPr>
-            <a:r>
-              <a:rPr lang="en-US" sz="1500" b="0">
-                <a:solidFill>
-                  <a:srgbClr val="202B33"/>
-                </a:solidFill>
-                <a:latin typeface="Arial"/>
-                <a:ea typeface="Arial"/>
-                <a:cs typeface="Arial"/>
-              </a:rPr>
-              <a:t xml:space="preserve">makes the first version cheap. It does not</a:t>
-            </a:r>
-            <a:endParaRPr lang="en-US" sz="1500"/>
-          </a:p>
-          <a:p>
-            <a:pPr marL="0" indent="0">
-              <a:lnSpc>
-                <a:spcPts val="1950"/>
-              </a:lnSpc>
-              <a:spcAft>
-                <a:spcPts val="0"/>
-              </a:spcAft>
-              <a:buNone/>
-            </a:pPr>
-            <a:r>
-              <a:rPr lang="en-US" sz="1500" b="0">
-                <a:solidFill>
-                  <a:srgbClr val="202B33"/>
-                </a:solidFill>
-                <a:latin typeface="Arial"/>
-                <a:ea typeface="Arial"/>
-                <a:cs typeface="Arial"/>
-              </a:rPr>
-              <a:t xml:space="preserve">make the tenth year cheap.</a:t>
-            </a:r>
-            <a:endParaRPr lang="en-US" sz="1500"/>
-          </a:p>
-          <a:p>
-            <a:pPr marL="0" indent="0">
-              <a:lnSpc>
-                <a:spcPts val="1950"/>
-              </a:lnSpc>
-              <a:spcAft>
-                <a:spcPts val="0"/>
-              </a:spcAft>
-              <a:buNone/>
-            </a:pPr>
-            <a:r>
-              <a:rPr lang="en-US" sz="1500" b="0">
-                <a:solidFill>
-                  <a:srgbClr val="202B33"/>
-                </a:solidFill>
-                <a:latin typeface="Arial"/>
-                <a:ea typeface="Arial"/>
-                <a:cs typeface="Arial"/>
-              </a:rPr>
-              <a:t xml:space="preserve"/>
-            </a:r>
-            <a:endParaRPr lang="en-US" sz="1500"/>
-          </a:p>
-          <a:p>
-            <a:pPr marL="0" indent="0">
-              <a:lnSpc>
-                <a:spcPts val="1950"/>
-              </a:lnSpc>
-              <a:spcAft>
-                <a:spcPts val="0"/>
-              </a:spcAft>
-              <a:buNone/>
-            </a:pPr>
-            <a:r>
-              <a:rPr lang="en-US" sz="1500" b="0">
-                <a:solidFill>
-                  <a:srgbClr val="202B33"/>
-                </a:solidFill>
-                <a:latin typeface="Arial"/>
-                <a:ea typeface="Arial"/>
-                <a:cs typeface="Arial"/>
-              </a:rPr>
-              <a:t xml:space="preserve">And throwaway software is a taste most of</a:t>
-            </a:r>
-            <a:endParaRPr lang="en-US" sz="1500"/>
-          </a:p>
-          <a:p>
-            <a:pPr marL="0" indent="0">
-              <a:lnSpc>
-                <a:spcPts val="1950"/>
-              </a:lnSpc>
-              <a:spcAft>
-                <a:spcPts val="0"/>
-              </a:spcAft>
-              <a:buNone/>
-            </a:pPr>
-            <a:r>
-              <a:rPr lang="en-US" sz="1500" b="0">
-                <a:solidFill>
-                  <a:srgbClr val="202B33"/>
-                </a:solidFill>
-                <a:latin typeface="Arial"/>
-                <a:ea typeface="Arial"/>
-                <a:cs typeface="Arial"/>
-              </a:rPr>
-              <a:t xml:space="preserve">this room has and most of the world does</a:t>
-            </a:r>
-            <a:endParaRPr lang="en-US" sz="1500"/>
-          </a:p>
-          <a:p>
-            <a:pPr marL="0" indent="0">
-              <a:lnSpc>
-                <a:spcPts val="1950"/>
-              </a:lnSpc>
-              <a:spcAft>
-                <a:spcPts val="0"/>
-              </a:spcAft>
-              <a:buNone/>
-            </a:pPr>
-            <a:r>
-              <a:rPr lang="en-US" sz="1500" b="0">
-                <a:solidFill>
-                  <a:srgbClr val="202B33"/>
-                </a:solidFill>
-                <a:latin typeface="Arial"/>
-                <a:ea typeface="Arial"/>
-                <a:cs typeface="Arial"/>
-              </a:rPr>
-              <a:t xml:space="preserve">not. We are early adopters; we are</a:t>
-            </a:r>
-            <a:endParaRPr lang="en-US" sz="1500"/>
-          </a:p>
-          <a:p>
-            <a:pPr marL="0" indent="0">
-              <a:lnSpc>
-                <a:spcPts val="1950"/>
-              </a:lnSpc>
-              <a:spcAft>
-                <a:spcPts val="0"/>
-              </a:spcAft>
-              <a:buNone/>
-            </a:pPr>
-            <a:r>
-              <a:rPr lang="en-US" sz="1500" b="0">
-                <a:solidFill>
-                  <a:srgbClr val="202B33"/>
-                </a:solidFill>
-                <a:latin typeface="Arial"/>
-                <a:ea typeface="Arial"/>
-                <a:cs typeface="Arial"/>
-              </a:rPr>
-              <a:t xml:space="preserve">delighted to regenerate a tool rather than</a:t>
-            </a:r>
-            <a:endParaRPr lang="en-US" sz="1500"/>
-          </a:p>
-          <a:p>
-            <a:pPr marL="0" indent="0">
-              <a:lnSpc>
-                <a:spcPts val="1950"/>
-              </a:lnSpc>
-              <a:spcAft>
-                <a:spcPts val="0"/>
-              </a:spcAft>
-              <a:buNone/>
-            </a:pPr>
-            <a:r>
-              <a:rPr lang="en-US" sz="1500" b="0">
-                <a:solidFill>
-                  <a:srgbClr val="202B33"/>
-                </a:solidFill>
-                <a:latin typeface="Arial"/>
-                <a:ea typeface="Arial"/>
-                <a:cs typeface="Arial"/>
-              </a:rPr>
-              <a:t xml:space="preserve">maintain it. Normal people are not turned</a:t>
-            </a:r>
-            <a:endParaRPr lang="en-US" sz="1500"/>
-          </a:p>
-          <a:p>
-            <a:pPr marL="0" indent="0">
-              <a:lnSpc>
-                <a:spcPts val="1950"/>
-              </a:lnSpc>
-              <a:spcAft>
-                <a:spcPts val="0"/>
-              </a:spcAft>
-              <a:buNone/>
-            </a:pPr>
-            <a:r>
-              <a:rPr lang="en-US" sz="1500" b="0">
-                <a:solidFill>
-                  <a:srgbClr val="202B33"/>
-                </a:solidFill>
-                <a:latin typeface="Arial"/>
-                <a:ea typeface="Arial"/>
-                <a:cs typeface="Arial"/>
-              </a:rPr>
-              <a:t xml:space="preserve">on by the idea of vibe coding their own</a:t>
-            </a:r>
-            <a:endParaRPr lang="en-US" sz="1500"/>
-          </a:p>
-          <a:p>
-            <a:pPr marL="0" indent="0">
-              <a:lnSpc>
-                <a:spcPts val="1950"/>
-              </a:lnSpc>
-              <a:spcAft>
-                <a:spcPts val="0"/>
-              </a:spcAft>
-              <a:buNone/>
-            </a:pPr>
-            <a:r>
-              <a:rPr lang="en-US" sz="1500" b="0">
-                <a:solidFill>
-                  <a:srgbClr val="202B33"/>
-                </a:solidFill>
-                <a:latin typeface="Arial"/>
-                <a:ea typeface="Arial"/>
-                <a:cs typeface="Arial"/>
-              </a:rPr>
-              <a:t xml:space="preserve">recipe tracker, never mind a Slack</a:t>
-            </a:r>
-            <a:endParaRPr lang="en-US" sz="1500"/>
-          </a:p>
-          <a:p>
-            <a:pPr marL="0" indent="0">
-              <a:lnSpc>
-                <a:spcPts val="1950"/>
-              </a:lnSpc>
-              <a:spcAft>
-                <a:spcPts val="0"/>
-              </a:spcAft>
-              <a:buNone/>
-            </a:pPr>
-            <a:r>
-              <a:rPr lang="en-US" sz="1500" b="0">
-                <a:solidFill>
-                  <a:srgbClr val="202B33"/>
-                </a:solidFill>
-                <a:latin typeface="Arial"/>
-                <a:ea typeface="Arial"/>
-                <a:cs typeface="Arial"/>
-              </a:rPr>
-              <a:t xml:space="preserve">replacement. What they will accept is an</a:t>
-            </a:r>
-            <a:endParaRPr lang="en-US" sz="1500"/>
-          </a:p>
-          <a:p>
-            <a:pPr marL="0" indent="0">
-              <a:lnSpc>
-                <a:spcPts val="1950"/>
-              </a:lnSpc>
-              <a:spcAft>
-                <a:spcPts val="0"/>
-              </a:spcAft>
-              <a:buNone/>
-            </a:pPr>
-            <a:r>
-              <a:rPr lang="en-US" sz="1500" b="0">
-                <a:solidFill>
-                  <a:srgbClr val="202B33"/>
-                </a:solidFill>
-                <a:latin typeface="Arial"/>
-                <a:ea typeface="Arial"/>
-                <a:cs typeface="Arial"/>
-              </a:rPr>
-              <a:t xml:space="preserve">interface generated for them, adapting in</a:t>
-            </a:r>
-            <a:endParaRPr lang="en-US" sz="1500"/>
-          </a:p>
-          <a:p>
-            <a:pPr marL="0" indent="0">
-              <a:lnSpc>
-                <a:spcPts val="1950"/>
-              </a:lnSpc>
-              <a:spcAft>
-                <a:spcPts val="0"/>
-              </a:spcAft>
-              <a:buNone/>
-            </a:pPr>
-            <a:r>
-              <a:rPr lang="en-US" sz="1500" b="0">
-                <a:solidFill>
-                  <a:srgbClr val="202B33"/>
-                </a:solidFill>
-                <a:latin typeface="Arial"/>
-                <a:ea typeface="Arial"/>
-                <a:cs typeface="Arial"/>
-              </a:rPr>
-              <a:t xml:space="preserve">real time, that they never had to choose</a:t>
-            </a:r>
-            <a:endParaRPr lang="en-US" sz="1500"/>
-          </a:p>
-          <a:p>
-            <a:pPr marL="0" indent="0">
-              <a:lnSpc>
-                <a:spcPts val="1950"/>
-              </a:lnSpc>
-              <a:spcAft>
-                <a:spcPts val="0"/>
-              </a:spcAft>
-              <a:buNone/>
-            </a:pPr>
-            <a:r>
-              <a:rPr lang="en-US" sz="1500" b="0">
-                <a:solidFill>
-                  <a:srgbClr val="202B33"/>
-                </a:solidFill>
-                <a:latin typeface="Arial"/>
-                <a:ea typeface="Arial"/>
-                <a:cs typeface="Arial"/>
-              </a:rPr>
-              <a:t xml:space="preserve">from a menu of products.</a:t>
-            </a:r>
-            <a:endParaRPr lang="en-US" sz="1500"/>
+                <a:spcPts val="1575"/>
+              </a:lnSpc>
+              <a:spcAft>
+                <a:spcPts val="0"/>
+              </a:spcAft>
+              <a:buNone/>
+            </a:pPr>
+            <a:r>
+              <a:rPr lang="en-US" sz="1200" b="0">
+                <a:solidFill>
+                  <a:srgbClr val="202B33"/>
+                </a:solidFill>
+                <a:latin typeface="Arial"/>
+                <a:ea typeface="Arial"/>
+                <a:cs typeface="Arial"/>
+              </a:rPr>
+              <a:t xml:space="preserve">AI does not magically make software work.</a:t>
+            </a:r>
+            <a:endParaRPr lang="en-US" sz="1200"/>
+          </a:p>
+          <a:p>
+            <a:pPr marL="0" indent="0">
+              <a:lnSpc>
+                <a:spcPts val="1575"/>
+              </a:lnSpc>
+              <a:spcAft>
+                <a:spcPts val="0"/>
+              </a:spcAft>
+              <a:buNone/>
+            </a:pPr>
+            <a:r>
+              <a:rPr lang="en-US" sz="1200" b="0">
+                <a:solidFill>
+                  <a:srgbClr val="202B33"/>
+                </a:solidFill>
+                <a:latin typeface="Arial"/>
+                <a:ea typeface="Arial"/>
+                <a:cs typeface="Arial"/>
+              </a:rPr>
+              <a:t xml:space="preserve">Well-understood software still gets harder to operate</a:t>
+            </a:r>
+            <a:endParaRPr lang="en-US" sz="1200"/>
+          </a:p>
+          <a:p>
+            <a:pPr marL="0" indent="0">
+              <a:lnSpc>
+                <a:spcPts val="1575"/>
+              </a:lnSpc>
+              <a:spcAft>
+                <a:spcPts val="0"/>
+              </a:spcAft>
+              <a:buNone/>
+            </a:pPr>
+            <a:r>
+              <a:rPr lang="en-US" sz="1200" b="0">
+                <a:solidFill>
+                  <a:srgbClr val="202B33"/>
+                </a:solidFill>
+                <a:latin typeface="Arial"/>
+                <a:ea typeface="Arial"/>
+                <a:cs typeface="Arial"/>
+              </a:rPr>
+              <a:t xml:space="preserve">as the world moves under it: you outgrow a</a:t>
+            </a:r>
+            <a:endParaRPr lang="en-US" sz="1200"/>
+          </a:p>
+          <a:p>
+            <a:pPr marL="0" indent="0">
+              <a:lnSpc>
+                <a:spcPts val="1575"/>
+              </a:lnSpc>
+              <a:spcAft>
+                <a:spcPts val="0"/>
+              </a:spcAft>
+              <a:buNone/>
+            </a:pPr>
+            <a:r>
+              <a:rPr lang="en-US" sz="1200" b="0">
+                <a:solidFill>
+                  <a:srgbClr val="202B33"/>
+                </a:solidFill>
+                <a:latin typeface="Arial"/>
+                <a:ea typeface="Arial"/>
+                <a:cs typeface="Arial"/>
+              </a:rPr>
+              <a:t xml:space="preserve">performance envelope, you accumulate features,</a:t>
+            </a:r>
+            <a:endParaRPr lang="en-US" sz="1200"/>
+          </a:p>
+          <a:p>
+            <a:pPr marL="0" indent="0">
+              <a:lnSpc>
+                <a:spcPts val="1575"/>
+              </a:lnSpc>
+              <a:spcAft>
+                <a:spcPts val="0"/>
+              </a:spcAft>
+              <a:buNone/>
+            </a:pPr>
+            <a:r>
+              <a:rPr lang="en-US" sz="1200" b="0">
+                <a:solidFill>
+                  <a:srgbClr val="202B33"/>
+                </a:solidFill>
+                <a:latin typeface="Arial"/>
+                <a:ea typeface="Arial"/>
+                <a:cs typeface="Arial"/>
+              </a:rPr>
+              <a:t xml:space="preserve">somebody deprecates your dependency. Generation makes</a:t>
+            </a:r>
+            <a:endParaRPr lang="en-US" sz="1200"/>
+          </a:p>
+          <a:p>
+            <a:pPr marL="0" indent="0">
+              <a:lnSpc>
+                <a:spcPts val="1575"/>
+              </a:lnSpc>
+              <a:spcAft>
+                <a:spcPts val="0"/>
+              </a:spcAft>
+              <a:buNone/>
+            </a:pPr>
+            <a:r>
+              <a:rPr lang="en-US" sz="1200" b="0">
+                <a:solidFill>
+                  <a:srgbClr val="202B33"/>
+                </a:solidFill>
+                <a:latin typeface="Arial"/>
+                <a:ea typeface="Arial"/>
+                <a:cs typeface="Arial"/>
+              </a:rPr>
+              <a:t xml:space="preserve">the first version cheap. It does not make the tenth</a:t>
+            </a:r>
+            <a:endParaRPr lang="en-US" sz="1200"/>
+          </a:p>
+          <a:p>
+            <a:pPr marL="0" indent="0">
+              <a:lnSpc>
+                <a:spcPts val="1575"/>
+              </a:lnSpc>
+              <a:spcAft>
+                <a:spcPts val="0"/>
+              </a:spcAft>
+              <a:buNone/>
+            </a:pPr>
+            <a:r>
+              <a:rPr lang="en-US" sz="1200" b="0">
+                <a:solidFill>
+                  <a:srgbClr val="202B33"/>
+                </a:solidFill>
+                <a:latin typeface="Arial"/>
+                <a:ea typeface="Arial"/>
+                <a:cs typeface="Arial"/>
+              </a:rPr>
+              <a:t xml:space="preserve">year cheap.</a:t>
+            </a:r>
+            <a:endParaRPr lang="en-US" sz="1200"/>
           </a:p>
         </p:txBody>
       </p:sp>
       <p:sp>
         <p:nvSpPr>
-          <p:cNvPr id="6" name="Text 6"/>
+          <p:cNvPr id="8" name="Text 8"/>
           <p:cNvSpPr txBox="1"/>
           <p:nvPr/>
         </p:nvSpPr>
@@ -10280,7 +9921,7 @@
       </p:sp>
       <p:sp>
         <p:nvSpPr>
-          <p:cNvPr id="7" name="Text 7"/>
+          <p:cNvPr id="9" name="Text 9"/>
           <p:cNvSpPr txBox="1"/>
           <p:nvPr/>
         </p:nvSpPr>

--- a/artifacts/speaking-portfolio-expanded/decks/product-engineering-30min-handout.pptx
+++ b/artifacts/speaking-portfolio-expanded/decks/product-engineering-30min-handout.pptx
@@ -1504,7 +1504,7 @@
                 <a:ea typeface="Arial"/>
                 <a:cs typeface="Arial"/>
               </a:rPr>
-              <a:t xml:space="preserve">Which raises the question this room should actually be arguing about. Should OpenAI and Anthropic end up owning every software channel? Watch what happens when the assistants ship real-time collaboration: who spends less time in email, Slack and Google Docs then? I can already make and edit images and video in ways that make me less likely to open Photoshop or DaVinci. If I need a jingle for the company, I ask Suno and it is done. So is everything you spent a lifetime learning, mastering and fighting with about to be irrelevant? Yes. At least as you know it.</a:t>
+              <a:t xml:space="preserve">Which raises the question this room should be arguing about. Should OpenAI and Anthropic end up owning every software channel? Watch what happens when the assistants ship real-time collaboration: who spends less time in email, Slack and Docs then? I can already edit images and video in ways that make me less likely to open Photoshop or DaVinci, and if I need a jingle I ask Suno and it is done. So is everything you spent a lifetime mastering about to be irrelevant? Yes. At least as you know it.</a:t>
             </a:r>
             <a:endParaRPr lang="en-US" sz="1200"/>
           </a:p>
@@ -1596,7 +1596,7 @@
                 <a:ea typeface="Arial"/>
                 <a:cs typeface="Arial"/>
               </a:rPr>
-              <a:t xml:space="preserve">Here is the part I want you to leave with. That future is not spoken for. GPT image being pretty good does not mean the story of image creation belongs to the big players, and the same is true in whichever industry you work in. Those of us who do not work at a frontier lab, the organic agents in the room, get to rethink any and every app as an AI-native system from the boundary up. That is this whole talk one level higher: do not photocopy today's product categories onto tomorrow's substrate either.</a:t>
+              <a:t xml:space="preserve">Here is the part I want you to leave with. That future is not spoken for. GPT image being pretty good does not mean image creation belongs to the big players, and the same holds in whichever industry you work in. Those of us who do not work at a frontier lab — the organic agents in the room — get to rethink any and every app as an AI-native system, from the boundary up. That is this whole talk one level higher: do not photocopy today's product categories onto tomorrow's substrate either.</a:t>
             </a:r>
             <a:endParaRPr lang="en-US" sz="1200"/>
           </a:p>
@@ -2077,7 +2077,7 @@
                 <a:ea typeface="Arial"/>
                 <a:cs typeface="Arial"/>
               </a:rPr>
-              <a:t xml:space="preserve">Which raises the question this room should actually be arguing about. Should OpenAI and Anthropic end up owning every software channel? Watch what happens when the assistants ship real-time collaboration: who spends less time in email, Slack and Google Docs then? I can already make and edit images and video in ways that make me less likely to open Photoshop or DaVinci. If I need a jingle for the company, I ask Suno and it is done. So is everything you spent a lifetime learning, mastering and fighting with about to be irrelevant? Yes. At least as you know it.</a:t>
+              <a:t xml:space="preserve">Which raises the question this room should be arguing about. Should OpenAI and Anthropic end up owning every software channel? Watch what happens when the assistants ship real-time collaboration: who spends less time in email, Slack and Docs then? I can already edit images and video in ways that make me less likely to open Photoshop or DaVinci, and if I need a jingle I ask Suno and it is done. So is everything you spent a lifetime mastering about to be irrelevant? Yes. At least as you know it.</a:t>
             </a:r>
             <a:endParaRPr lang="en-US" sz="1200"/>
           </a:p>
@@ -2169,7 +2169,7 @@
                 <a:ea typeface="Arial"/>
                 <a:cs typeface="Arial"/>
               </a:rPr>
-              <a:t xml:space="preserve">Here is the part I want you to leave with. That future is not spoken for. GPT image being pretty good does not mean the story of image creation belongs to the big players, and the same is true in whichever industry you work in. Those of us who do not work at a frontier lab, the organic agents in the room, get to rethink any and every app as an AI-native system from the boundary up. That is this whole talk one level higher: do not photocopy today's product categories onto tomorrow's substrate either.</a:t>
+              <a:t xml:space="preserve">Here is the part I want you to leave with. That future is not spoken for. GPT image being pretty good does not mean image creation belongs to the big players, and the same holds in whichever industry you work in. Those of us who do not work at a frontier lab — the organic agents in the room — get to rethink any and every app as an AI-native system, from the boundary up. That is this whole talk one level higher: do not photocopy today's product categories onto tomorrow's substrate either.</a:t>
             </a:r>
             <a:endParaRPr lang="en-US" sz="1200"/>
           </a:p>
@@ -9681,6 +9681,121 @@
             </a:r>
             <a:endParaRPr lang="en-US" sz="1200"/>
           </a:p>
+          <a:p>
+            <a:pPr marL="0" indent="0">
+              <a:lnSpc>
+                <a:spcPts val="1575"/>
+              </a:lnSpc>
+              <a:spcAft>
+                <a:spcPts val="0"/>
+              </a:spcAft>
+              <a:buNone/>
+            </a:pPr>
+            <a:r>
+              <a:rPr lang="en-US" sz="1200" b="0">
+                <a:solidFill>
+                  <a:srgbClr val="202B33"/>
+                </a:solidFill>
+                <a:latin typeface="Arial"/>
+                <a:ea typeface="Arial"/>
+                <a:cs typeface="Arial"/>
+              </a:rPr>
+              <a:t xml:space="preserve">AI does not magically make software work.</a:t>
+            </a:r>
+            <a:endParaRPr lang="en-US" sz="1200"/>
+          </a:p>
+          <a:p>
+            <a:pPr marL="0" indent="0">
+              <a:lnSpc>
+                <a:spcPts val="1575"/>
+              </a:lnSpc>
+              <a:spcAft>
+                <a:spcPts val="0"/>
+              </a:spcAft>
+              <a:buNone/>
+            </a:pPr>
+            <a:r>
+              <a:rPr lang="en-US" sz="1200" b="0">
+                <a:solidFill>
+                  <a:srgbClr val="202B33"/>
+                </a:solidFill>
+                <a:latin typeface="Arial"/>
+                <a:ea typeface="Arial"/>
+                <a:cs typeface="Arial"/>
+              </a:rPr>
+              <a:t xml:space="preserve">Well-understood software still gets harder to operate</a:t>
+            </a:r>
+            <a:endParaRPr lang="en-US" sz="1200"/>
+          </a:p>
+          <a:p>
+            <a:pPr marL="0" indent="0">
+              <a:lnSpc>
+                <a:spcPts val="1575"/>
+              </a:lnSpc>
+              <a:spcAft>
+                <a:spcPts val="0"/>
+              </a:spcAft>
+              <a:buNone/>
+            </a:pPr>
+            <a:r>
+              <a:rPr lang="en-US" sz="1200" b="0">
+                <a:solidFill>
+                  <a:srgbClr val="202B33"/>
+                </a:solidFill>
+                <a:latin typeface="Arial"/>
+                <a:ea typeface="Arial"/>
+                <a:cs typeface="Arial"/>
+              </a:rPr>
+              <a:t xml:space="preserve">as the world moves under it: you outgrow a</a:t>
+            </a:r>
+            <a:endParaRPr lang="en-US" sz="1200"/>
+          </a:p>
+          <a:p>
+            <a:pPr marL="0" indent="0">
+              <a:lnSpc>
+                <a:spcPts val="1575"/>
+              </a:lnSpc>
+              <a:spcAft>
+                <a:spcPts val="0"/>
+              </a:spcAft>
+              <a:buNone/>
+            </a:pPr>
+            <a:r>
+              <a:rPr lang="en-US" sz="1200" b="0">
+                <a:solidFill>
+                  <a:srgbClr val="202B33"/>
+                </a:solidFill>
+                <a:latin typeface="Arial"/>
+                <a:ea typeface="Arial"/>
+                <a:cs typeface="Arial"/>
+              </a:rPr>
+              <a:t xml:space="preserve">performance envelope, you accumulate features,</a:t>
+            </a:r>
+            <a:endParaRPr lang="en-US" sz="1200"/>
+          </a:p>
+          <a:p>
+            <a:pPr marL="0" indent="0">
+              <a:lnSpc>
+                <a:spcPts val="1575"/>
+              </a:lnSpc>
+              <a:spcAft>
+                <a:spcPts val="0"/>
+              </a:spcAft>
+              <a:buNone/>
+            </a:pPr>
+            <a:r>
+              <a:rPr lang="en-US" sz="1200" b="0">
+                <a:solidFill>
+                  <a:srgbClr val="202B33"/>
+                </a:solidFill>
+                <a:latin typeface="Arial"/>
+                <a:ea typeface="Arial"/>
+                <a:cs typeface="Arial"/>
+              </a:rPr>
+              <a:t xml:space="preserve">somebody deprecates your dependency. Generation makes</a:t>
+            </a:r>
+            <a:endParaRPr lang="en-US" sz="1200"/>
+          </a:p>
         </p:txBody>
       </p:sp>
       <p:sp>
@@ -9726,7 +9841,7 @@
                 <a:ea typeface="Arial"/>
                 <a:cs typeface="Arial"/>
               </a:rPr>
-              <a:t xml:space="preserve">AI does not magically make software work.</a:t>
+              <a:t xml:space="preserve">the first version cheap. It does not make the tenth</a:t>
             </a:r>
             <a:endParaRPr lang="en-US" sz="1200"/>
           </a:p>
@@ -9749,7 +9864,7 @@
                 <a:ea typeface="Arial"/>
                 <a:cs typeface="Arial"/>
               </a:rPr>
-              <a:t xml:space="preserve">Well-understood software still gets harder to operate</a:t>
+              <a:t xml:space="preserve">year cheap.</a:t>
             </a:r>
             <a:endParaRPr lang="en-US" sz="1200"/>
           </a:p>
@@ -9772,7 +9887,7 @@
                 <a:ea typeface="Arial"/>
                 <a:cs typeface="Arial"/>
               </a:rPr>
-              <a:t xml:space="preserve">as the world moves under it: you outgrow a</a:t>
+              <a:t xml:space="preserve"/>
             </a:r>
             <a:endParaRPr lang="en-US" sz="1200"/>
           </a:p>
@@ -9795,7 +9910,7 @@
                 <a:ea typeface="Arial"/>
                 <a:cs typeface="Arial"/>
               </a:rPr>
-              <a:t xml:space="preserve">performance envelope, you accumulate features,</a:t>
+              <a:t xml:space="preserve">Which raises the question this room should be arguing</a:t>
             </a:r>
             <a:endParaRPr lang="en-US" sz="1200"/>
           </a:p>
@@ -9818,7 +9933,7 @@
                 <a:ea typeface="Arial"/>
                 <a:cs typeface="Arial"/>
               </a:rPr>
-              <a:t xml:space="preserve">somebody deprecates your dependency. Generation makes</a:t>
+              <a:t xml:space="preserve">about. Should OpenAI and Anthropic end up owning</a:t>
             </a:r>
             <a:endParaRPr lang="en-US" sz="1200"/>
           </a:p>
@@ -9841,7 +9956,7 @@
                 <a:ea typeface="Arial"/>
                 <a:cs typeface="Arial"/>
               </a:rPr>
-              <a:t xml:space="preserve">the first version cheap. It does not make the tenth</a:t>
+              <a:t xml:space="preserve">every software channel? Watch what happens when the</a:t>
             </a:r>
             <a:endParaRPr lang="en-US" sz="1200"/>
           </a:p>
@@ -9864,7 +9979,145 @@
                 <a:ea typeface="Arial"/>
                 <a:cs typeface="Arial"/>
               </a:rPr>
-              <a:t xml:space="preserve">year cheap.</a:t>
+              <a:t xml:space="preserve">assistants ship real-time collaboration: who spends</a:t>
+            </a:r>
+            <a:endParaRPr lang="en-US" sz="1200"/>
+          </a:p>
+          <a:p>
+            <a:pPr marL="0" indent="0">
+              <a:lnSpc>
+                <a:spcPts val="1575"/>
+              </a:lnSpc>
+              <a:spcAft>
+                <a:spcPts val="0"/>
+              </a:spcAft>
+              <a:buNone/>
+            </a:pPr>
+            <a:r>
+              <a:rPr lang="en-US" sz="1200" b="0">
+                <a:solidFill>
+                  <a:srgbClr val="202B33"/>
+                </a:solidFill>
+                <a:latin typeface="Arial"/>
+                <a:ea typeface="Arial"/>
+                <a:cs typeface="Arial"/>
+              </a:rPr>
+              <a:t xml:space="preserve">less time in email, Slack and Docs then? I can</a:t>
+            </a:r>
+            <a:endParaRPr lang="en-US" sz="1200"/>
+          </a:p>
+          <a:p>
+            <a:pPr marL="0" indent="0">
+              <a:lnSpc>
+                <a:spcPts val="1575"/>
+              </a:lnSpc>
+              <a:spcAft>
+                <a:spcPts val="0"/>
+              </a:spcAft>
+              <a:buNone/>
+            </a:pPr>
+            <a:r>
+              <a:rPr lang="en-US" sz="1200" b="0">
+                <a:solidFill>
+                  <a:srgbClr val="202B33"/>
+                </a:solidFill>
+                <a:latin typeface="Arial"/>
+                <a:ea typeface="Arial"/>
+                <a:cs typeface="Arial"/>
+              </a:rPr>
+              <a:t xml:space="preserve">already edit images and video in ways that make me</a:t>
+            </a:r>
+            <a:endParaRPr lang="en-US" sz="1200"/>
+          </a:p>
+          <a:p>
+            <a:pPr marL="0" indent="0">
+              <a:lnSpc>
+                <a:spcPts val="1575"/>
+              </a:lnSpc>
+              <a:spcAft>
+                <a:spcPts val="0"/>
+              </a:spcAft>
+              <a:buNone/>
+            </a:pPr>
+            <a:r>
+              <a:rPr lang="en-US" sz="1200" b="0">
+                <a:solidFill>
+                  <a:srgbClr val="202B33"/>
+                </a:solidFill>
+                <a:latin typeface="Arial"/>
+                <a:ea typeface="Arial"/>
+                <a:cs typeface="Arial"/>
+              </a:rPr>
+              <a:t xml:space="preserve">less likely to open Photoshop or DaVinci, and if I</a:t>
+            </a:r>
+            <a:endParaRPr lang="en-US" sz="1200"/>
+          </a:p>
+          <a:p>
+            <a:pPr marL="0" indent="0">
+              <a:lnSpc>
+                <a:spcPts val="1575"/>
+              </a:lnSpc>
+              <a:spcAft>
+                <a:spcPts val="0"/>
+              </a:spcAft>
+              <a:buNone/>
+            </a:pPr>
+            <a:r>
+              <a:rPr lang="en-US" sz="1200" b="0">
+                <a:solidFill>
+                  <a:srgbClr val="202B33"/>
+                </a:solidFill>
+                <a:latin typeface="Arial"/>
+                <a:ea typeface="Arial"/>
+                <a:cs typeface="Arial"/>
+              </a:rPr>
+              <a:t xml:space="preserve">need a jingle I ask Suno and it is done. So is</a:t>
+            </a:r>
+            <a:endParaRPr lang="en-US" sz="1200"/>
+          </a:p>
+          <a:p>
+            <a:pPr marL="0" indent="0">
+              <a:lnSpc>
+                <a:spcPts val="1575"/>
+              </a:lnSpc>
+              <a:spcAft>
+                <a:spcPts val="0"/>
+              </a:spcAft>
+              <a:buNone/>
+            </a:pPr>
+            <a:r>
+              <a:rPr lang="en-US" sz="1200" b="0">
+                <a:solidFill>
+                  <a:srgbClr val="202B33"/>
+                </a:solidFill>
+                <a:latin typeface="Arial"/>
+                <a:ea typeface="Arial"/>
+                <a:cs typeface="Arial"/>
+              </a:rPr>
+              <a:t xml:space="preserve">everything you spent a lifetime mastering about to be</a:t>
+            </a:r>
+            <a:endParaRPr lang="en-US" sz="1200"/>
+          </a:p>
+          <a:p>
+            <a:pPr marL="0" indent="0">
+              <a:lnSpc>
+                <a:spcPts val="1575"/>
+              </a:lnSpc>
+              <a:spcAft>
+                <a:spcPts val="0"/>
+              </a:spcAft>
+              <a:buNone/>
+            </a:pPr>
+            <a:r>
+              <a:rPr lang="en-US" sz="1200" b="0">
+                <a:solidFill>
+                  <a:srgbClr val="202B33"/>
+                </a:solidFill>
+                <a:latin typeface="Arial"/>
+                <a:ea typeface="Arial"/>
+                <a:cs typeface="Arial"/>
+              </a:rPr>
+              <a:t xml:space="preserve">irrelevant? Yes. At least as you know it.</a:t>
             </a:r>
             <a:endParaRPr lang="en-US" sz="1200"/>
           </a:p>
@@ -10142,351 +10395,6 @@
                 <a:ea typeface="Arial"/>
                 <a:cs typeface="Arial"/>
               </a:rPr>
-              <a:t xml:space="preserve">Which raises the question this room should</a:t>
-            </a:r>
-            <a:endParaRPr lang="en-US" sz="1500"/>
-          </a:p>
-          <a:p>
-            <a:pPr marL="0" indent="0">
-              <a:lnSpc>
-                <a:spcPts val="1950"/>
-              </a:lnSpc>
-              <a:spcAft>
-                <a:spcPts val="0"/>
-              </a:spcAft>
-              <a:buNone/>
-            </a:pPr>
-            <a:r>
-              <a:rPr lang="en-US" sz="1500" b="0">
-                <a:solidFill>
-                  <a:srgbClr val="202B33"/>
-                </a:solidFill>
-                <a:latin typeface="Arial"/>
-                <a:ea typeface="Arial"/>
-                <a:cs typeface="Arial"/>
-              </a:rPr>
-              <a:t xml:space="preserve">actually be arguing about. Should OpenAI</a:t>
-            </a:r>
-            <a:endParaRPr lang="en-US" sz="1500"/>
-          </a:p>
-          <a:p>
-            <a:pPr marL="0" indent="0">
-              <a:lnSpc>
-                <a:spcPts val="1950"/>
-              </a:lnSpc>
-              <a:spcAft>
-                <a:spcPts val="0"/>
-              </a:spcAft>
-              <a:buNone/>
-            </a:pPr>
-            <a:r>
-              <a:rPr lang="en-US" sz="1500" b="0">
-                <a:solidFill>
-                  <a:srgbClr val="202B33"/>
-                </a:solidFill>
-                <a:latin typeface="Arial"/>
-                <a:ea typeface="Arial"/>
-                <a:cs typeface="Arial"/>
-              </a:rPr>
-              <a:t xml:space="preserve">and Anthropic end up owning every software</a:t>
-            </a:r>
-            <a:endParaRPr lang="en-US" sz="1500"/>
-          </a:p>
-          <a:p>
-            <a:pPr marL="0" indent="0">
-              <a:lnSpc>
-                <a:spcPts val="1950"/>
-              </a:lnSpc>
-              <a:spcAft>
-                <a:spcPts val="0"/>
-              </a:spcAft>
-              <a:buNone/>
-            </a:pPr>
-            <a:r>
-              <a:rPr lang="en-US" sz="1500" b="0">
-                <a:solidFill>
-                  <a:srgbClr val="202B33"/>
-                </a:solidFill>
-                <a:latin typeface="Arial"/>
-                <a:ea typeface="Arial"/>
-                <a:cs typeface="Arial"/>
-              </a:rPr>
-              <a:t xml:space="preserve">channel? Watch what happens when the</a:t>
-            </a:r>
-            <a:endParaRPr lang="en-US" sz="1500"/>
-          </a:p>
-          <a:p>
-            <a:pPr marL="0" indent="0">
-              <a:lnSpc>
-                <a:spcPts val="1950"/>
-              </a:lnSpc>
-              <a:spcAft>
-                <a:spcPts val="0"/>
-              </a:spcAft>
-              <a:buNone/>
-            </a:pPr>
-            <a:r>
-              <a:rPr lang="en-US" sz="1500" b="0">
-                <a:solidFill>
-                  <a:srgbClr val="202B33"/>
-                </a:solidFill>
-                <a:latin typeface="Arial"/>
-                <a:ea typeface="Arial"/>
-                <a:cs typeface="Arial"/>
-              </a:rPr>
-              <a:t xml:space="preserve">assistants ship real-time collaboration:</a:t>
-            </a:r>
-            <a:endParaRPr lang="en-US" sz="1500"/>
-          </a:p>
-          <a:p>
-            <a:pPr marL="0" indent="0">
-              <a:lnSpc>
-                <a:spcPts val="1950"/>
-              </a:lnSpc>
-              <a:spcAft>
-                <a:spcPts val="0"/>
-              </a:spcAft>
-              <a:buNone/>
-            </a:pPr>
-            <a:r>
-              <a:rPr lang="en-US" sz="1500" b="0">
-                <a:solidFill>
-                  <a:srgbClr val="202B33"/>
-                </a:solidFill>
-                <a:latin typeface="Arial"/>
-                <a:ea typeface="Arial"/>
-                <a:cs typeface="Arial"/>
-              </a:rPr>
-              <a:t xml:space="preserve">who spends less time in email, Slack and</a:t>
-            </a:r>
-            <a:endParaRPr lang="en-US" sz="1500"/>
-          </a:p>
-          <a:p>
-            <a:pPr marL="0" indent="0">
-              <a:lnSpc>
-                <a:spcPts val="1950"/>
-              </a:lnSpc>
-              <a:spcAft>
-                <a:spcPts val="0"/>
-              </a:spcAft>
-              <a:buNone/>
-            </a:pPr>
-            <a:r>
-              <a:rPr lang="en-US" sz="1500" b="0">
-                <a:solidFill>
-                  <a:srgbClr val="202B33"/>
-                </a:solidFill>
-                <a:latin typeface="Arial"/>
-                <a:ea typeface="Arial"/>
-                <a:cs typeface="Arial"/>
-              </a:rPr>
-              <a:t xml:space="preserve">Google Docs then? I can already make and</a:t>
-            </a:r>
-            <a:endParaRPr lang="en-US" sz="1500"/>
-          </a:p>
-          <a:p>
-            <a:pPr marL="0" indent="0">
-              <a:lnSpc>
-                <a:spcPts val="1950"/>
-              </a:lnSpc>
-              <a:spcAft>
-                <a:spcPts val="0"/>
-              </a:spcAft>
-              <a:buNone/>
-            </a:pPr>
-            <a:r>
-              <a:rPr lang="en-US" sz="1500" b="0">
-                <a:solidFill>
-                  <a:srgbClr val="202B33"/>
-                </a:solidFill>
-                <a:latin typeface="Arial"/>
-                <a:ea typeface="Arial"/>
-                <a:cs typeface="Arial"/>
-              </a:rPr>
-              <a:t xml:space="preserve">edit images and video in ways that make me</a:t>
-            </a:r>
-            <a:endParaRPr lang="en-US" sz="1500"/>
-          </a:p>
-          <a:p>
-            <a:pPr marL="0" indent="0">
-              <a:lnSpc>
-                <a:spcPts val="1950"/>
-              </a:lnSpc>
-              <a:spcAft>
-                <a:spcPts val="0"/>
-              </a:spcAft>
-              <a:buNone/>
-            </a:pPr>
-            <a:r>
-              <a:rPr lang="en-US" sz="1500" b="0">
-                <a:solidFill>
-                  <a:srgbClr val="202B33"/>
-                </a:solidFill>
-                <a:latin typeface="Arial"/>
-                <a:ea typeface="Arial"/>
-                <a:cs typeface="Arial"/>
-              </a:rPr>
-              <a:t xml:space="preserve">less likely to open Photoshop or DaVinci.</a:t>
-            </a:r>
-            <a:endParaRPr lang="en-US" sz="1500"/>
-          </a:p>
-          <a:p>
-            <a:pPr marL="0" indent="0">
-              <a:lnSpc>
-                <a:spcPts val="1950"/>
-              </a:lnSpc>
-              <a:spcAft>
-                <a:spcPts val="0"/>
-              </a:spcAft>
-              <a:buNone/>
-            </a:pPr>
-            <a:r>
-              <a:rPr lang="en-US" sz="1500" b="0">
-                <a:solidFill>
-                  <a:srgbClr val="202B33"/>
-                </a:solidFill>
-                <a:latin typeface="Arial"/>
-                <a:ea typeface="Arial"/>
-                <a:cs typeface="Arial"/>
-              </a:rPr>
-              <a:t xml:space="preserve">If I need a jingle for the company, I ask</a:t>
-            </a:r>
-            <a:endParaRPr lang="en-US" sz="1500"/>
-          </a:p>
-          <a:p>
-            <a:pPr marL="0" indent="0">
-              <a:lnSpc>
-                <a:spcPts val="1950"/>
-              </a:lnSpc>
-              <a:spcAft>
-                <a:spcPts val="0"/>
-              </a:spcAft>
-              <a:buNone/>
-            </a:pPr>
-            <a:r>
-              <a:rPr lang="en-US" sz="1500" b="0">
-                <a:solidFill>
-                  <a:srgbClr val="202B33"/>
-                </a:solidFill>
-                <a:latin typeface="Arial"/>
-                <a:ea typeface="Arial"/>
-                <a:cs typeface="Arial"/>
-              </a:rPr>
-              <a:t xml:space="preserve">Suno and it is done. So is everything you</a:t>
-            </a:r>
-            <a:endParaRPr lang="en-US" sz="1500"/>
-          </a:p>
-          <a:p>
-            <a:pPr marL="0" indent="0">
-              <a:lnSpc>
-                <a:spcPts val="1950"/>
-              </a:lnSpc>
-              <a:spcAft>
-                <a:spcPts val="0"/>
-              </a:spcAft>
-              <a:buNone/>
-            </a:pPr>
-            <a:r>
-              <a:rPr lang="en-US" sz="1500" b="0">
-                <a:solidFill>
-                  <a:srgbClr val="202B33"/>
-                </a:solidFill>
-                <a:latin typeface="Arial"/>
-                <a:ea typeface="Arial"/>
-                <a:cs typeface="Arial"/>
-              </a:rPr>
-              <a:t xml:space="preserve">spent a lifetime learning, mastering and</a:t>
-            </a:r>
-            <a:endParaRPr lang="en-US" sz="1500"/>
-          </a:p>
-          <a:p>
-            <a:pPr marL="0" indent="0">
-              <a:lnSpc>
-                <a:spcPts val="1950"/>
-              </a:lnSpc>
-              <a:spcAft>
-                <a:spcPts val="0"/>
-              </a:spcAft>
-              <a:buNone/>
-            </a:pPr>
-            <a:r>
-              <a:rPr lang="en-US" sz="1500" b="0">
-                <a:solidFill>
-                  <a:srgbClr val="202B33"/>
-                </a:solidFill>
-                <a:latin typeface="Arial"/>
-                <a:ea typeface="Arial"/>
-                <a:cs typeface="Arial"/>
-              </a:rPr>
-              <a:t xml:space="preserve">fighting with about to be irrelevant? Yes.</a:t>
-            </a:r>
-            <a:endParaRPr lang="en-US" sz="1500"/>
-          </a:p>
-          <a:p>
-            <a:pPr marL="0" indent="0">
-              <a:lnSpc>
-                <a:spcPts val="1950"/>
-              </a:lnSpc>
-              <a:spcAft>
-                <a:spcPts val="0"/>
-              </a:spcAft>
-              <a:buNone/>
-            </a:pPr>
-            <a:r>
-              <a:rPr lang="en-US" sz="1500" b="0">
-                <a:solidFill>
-                  <a:srgbClr val="202B33"/>
-                </a:solidFill>
-                <a:latin typeface="Arial"/>
-                <a:ea typeface="Arial"/>
-                <a:cs typeface="Arial"/>
-              </a:rPr>
-              <a:t xml:space="preserve">At least as you know it.</a:t>
-            </a:r>
-            <a:endParaRPr lang="en-US" sz="1500"/>
-          </a:p>
-          <a:p>
-            <a:pPr marL="0" indent="0">
-              <a:lnSpc>
-                <a:spcPts val="1950"/>
-              </a:lnSpc>
-              <a:spcAft>
-                <a:spcPts val="0"/>
-              </a:spcAft>
-              <a:buNone/>
-            </a:pPr>
-            <a:r>
-              <a:rPr lang="en-US" sz="1500" b="0">
-                <a:solidFill>
-                  <a:srgbClr val="202B33"/>
-                </a:solidFill>
-                <a:latin typeface="Arial"/>
-                <a:ea typeface="Arial"/>
-                <a:cs typeface="Arial"/>
-              </a:rPr>
-              <a:t xml:space="preserve"/>
-            </a:r>
-            <a:endParaRPr lang="en-US" sz="1500"/>
-          </a:p>
-          <a:p>
-            <a:pPr marL="0" indent="0">
-              <a:lnSpc>
-                <a:spcPts val="1950"/>
-              </a:lnSpc>
-              <a:spcAft>
-                <a:spcPts val="0"/>
-              </a:spcAft>
-              <a:buNone/>
-            </a:pPr>
-            <a:r>
-              <a:rPr lang="en-US" sz="1500" b="0">
-                <a:solidFill>
-                  <a:srgbClr val="202B33"/>
-                </a:solidFill>
-                <a:latin typeface="Arial"/>
-                <a:ea typeface="Arial"/>
-                <a:cs typeface="Arial"/>
-              </a:rPr>
               <a:t xml:space="preserve">What replaces it looks less like a grid of</a:t>
             </a:r>
             <a:endParaRPr lang="en-US" sz="1500"/>
@@ -10534,6 +10442,167 @@
                 <a:cs typeface="Arial"/>
               </a:rPr>
               <a:t xml:space="preserve">surprise revival of the terminal. Which is</a:t>
+            </a:r>
+            <a:endParaRPr lang="en-US" sz="1500"/>
+          </a:p>
+          <a:p>
+            <a:pPr marL="0" indent="0">
+              <a:lnSpc>
+                <a:spcPts val="1950"/>
+              </a:lnSpc>
+              <a:spcAft>
+                <a:spcPts val="0"/>
+              </a:spcAft>
+              <a:buNone/>
+            </a:pPr>
+            <a:r>
+              <a:rPr lang="en-US" sz="1500" b="0">
+                <a:solidFill>
+                  <a:srgbClr val="202B33"/>
+                </a:solidFill>
+                <a:latin typeface="Arial"/>
+                <a:ea typeface="Arial"/>
+                <a:cs typeface="Arial"/>
+              </a:rPr>
+              <a:t xml:space="preserve">a Matrix ending when you think about it.</a:t>
+            </a:r>
+            <a:endParaRPr lang="en-US" sz="1500"/>
+          </a:p>
+          <a:p>
+            <a:pPr marL="0" indent="0">
+              <a:lnSpc>
+                <a:spcPts val="1950"/>
+              </a:lnSpc>
+              <a:spcAft>
+                <a:spcPts val="0"/>
+              </a:spcAft>
+              <a:buNone/>
+            </a:pPr>
+            <a:r>
+              <a:rPr lang="en-US" sz="1500" b="0">
+                <a:solidFill>
+                  <a:srgbClr val="202B33"/>
+                </a:solidFill>
+                <a:latin typeface="Arial"/>
+                <a:ea typeface="Arial"/>
+                <a:cs typeface="Arial"/>
+              </a:rPr>
+              <a:t xml:space="preserve">Thanks, AI. Skynet is not so bad if I get</a:t>
+            </a:r>
+            <a:endParaRPr lang="en-US" sz="1500"/>
+          </a:p>
+          <a:p>
+            <a:pPr marL="0" indent="0">
+              <a:lnSpc>
+                <a:spcPts val="1950"/>
+              </a:lnSpc>
+              <a:spcAft>
+                <a:spcPts val="0"/>
+              </a:spcAft>
+              <a:buNone/>
+            </a:pPr>
+            <a:r>
+              <a:rPr lang="en-US" sz="1500" b="0">
+                <a:solidFill>
+                  <a:srgbClr val="202B33"/>
+                </a:solidFill>
+                <a:latin typeface="Arial"/>
+                <a:ea typeface="Arial"/>
+                <a:cs typeface="Arial"/>
+              </a:rPr>
+              <a:t xml:space="preserve">to keep my CLIs.</a:t>
+            </a:r>
+            <a:endParaRPr lang="en-US" sz="1500"/>
+          </a:p>
+          <a:p>
+            <a:pPr marL="0" indent="0">
+              <a:lnSpc>
+                <a:spcPts val="1950"/>
+              </a:lnSpc>
+              <a:spcAft>
+                <a:spcPts val="0"/>
+              </a:spcAft>
+              <a:buNone/>
+            </a:pPr>
+            <a:r>
+              <a:rPr lang="en-US" sz="1500" b="0">
+                <a:solidFill>
+                  <a:srgbClr val="202B33"/>
+                </a:solidFill>
+                <a:latin typeface="Arial"/>
+                <a:ea typeface="Arial"/>
+                <a:cs typeface="Arial"/>
+              </a:rPr>
+              <a:t xml:space="preserve"/>
+            </a:r>
+            <a:endParaRPr lang="en-US" sz="1500"/>
+          </a:p>
+          <a:p>
+            <a:pPr marL="0" indent="0">
+              <a:lnSpc>
+                <a:spcPts val="1950"/>
+              </a:lnSpc>
+              <a:spcAft>
+                <a:spcPts val="0"/>
+              </a:spcAft>
+              <a:buNone/>
+            </a:pPr>
+            <a:r>
+              <a:rPr lang="en-US" sz="1500" b="0">
+                <a:solidFill>
+                  <a:srgbClr val="202B33"/>
+                </a:solidFill>
+                <a:latin typeface="Arial"/>
+                <a:ea typeface="Arial"/>
+                <a:cs typeface="Arial"/>
+              </a:rPr>
+              <a:t xml:space="preserve">Here is the part I want you to leave with.</a:t>
+            </a:r>
+            <a:endParaRPr lang="en-US" sz="1500"/>
+          </a:p>
+          <a:p>
+            <a:pPr marL="0" indent="0">
+              <a:lnSpc>
+                <a:spcPts val="1950"/>
+              </a:lnSpc>
+              <a:spcAft>
+                <a:spcPts val="0"/>
+              </a:spcAft>
+              <a:buNone/>
+            </a:pPr>
+            <a:r>
+              <a:rPr lang="en-US" sz="1500" b="0">
+                <a:solidFill>
+                  <a:srgbClr val="202B33"/>
+                </a:solidFill>
+                <a:latin typeface="Arial"/>
+                <a:ea typeface="Arial"/>
+                <a:cs typeface="Arial"/>
+              </a:rPr>
+              <a:t xml:space="preserve">That future is not spoken for. GPT image</a:t>
+            </a:r>
+            <a:endParaRPr lang="en-US" sz="1500"/>
+          </a:p>
+          <a:p>
+            <a:pPr marL="0" indent="0">
+              <a:lnSpc>
+                <a:spcPts val="1950"/>
+              </a:lnSpc>
+              <a:spcAft>
+                <a:spcPts val="0"/>
+              </a:spcAft>
+              <a:buNone/>
+            </a:pPr>
+            <a:r>
+              <a:rPr lang="en-US" sz="1500" b="0">
+                <a:solidFill>
+                  <a:srgbClr val="202B33"/>
+                </a:solidFill>
+                <a:latin typeface="Arial"/>
+                <a:ea typeface="Arial"/>
+                <a:cs typeface="Arial"/>
+              </a:rPr>
+              <a:t xml:space="preserve">being pretty good does not mean image</a:t>
             </a:r>
             <a:endParaRPr lang="en-US" sz="1500"/>
           </a:p>
@@ -10582,375 +10651,191 @@
                 <a:ea typeface="Arial"/>
                 <a:cs typeface="Arial"/>
               </a:rPr>
-              <a:t xml:space="preserve">a Matrix ending when you think about it.</a:t>
-            </a:r>
-            <a:endParaRPr lang="en-US" sz="1500"/>
-          </a:p>
-          <a:p>
-            <a:pPr marL="0" indent="0">
-              <a:lnSpc>
-                <a:spcPts val="1950"/>
-              </a:lnSpc>
-              <a:spcAft>
-                <a:spcPts val="0"/>
-              </a:spcAft>
-              <a:buNone/>
-            </a:pPr>
-            <a:r>
-              <a:rPr lang="en-US" sz="1500" b="0">
-                <a:solidFill>
-                  <a:srgbClr val="202B33"/>
-                </a:solidFill>
-                <a:latin typeface="Arial"/>
-                <a:ea typeface="Arial"/>
-                <a:cs typeface="Arial"/>
-              </a:rPr>
-              <a:t xml:space="preserve">Thanks, AI. Skynet is not so bad if I get</a:t>
-            </a:r>
-            <a:endParaRPr lang="en-US" sz="1500"/>
-          </a:p>
-          <a:p>
-            <a:pPr marL="0" indent="0">
-              <a:lnSpc>
-                <a:spcPts val="1950"/>
-              </a:lnSpc>
-              <a:spcAft>
-                <a:spcPts val="0"/>
-              </a:spcAft>
-              <a:buNone/>
-            </a:pPr>
-            <a:r>
-              <a:rPr lang="en-US" sz="1500" b="0">
-                <a:solidFill>
-                  <a:srgbClr val="202B33"/>
-                </a:solidFill>
-                <a:latin typeface="Arial"/>
-                <a:ea typeface="Arial"/>
-                <a:cs typeface="Arial"/>
-              </a:rPr>
-              <a:t xml:space="preserve">to keep my CLIs.</a:t>
-            </a:r>
-            <a:endParaRPr lang="en-US" sz="1500"/>
-          </a:p>
-          <a:p>
-            <a:pPr marL="0" indent="0">
-              <a:lnSpc>
-                <a:spcPts val="1950"/>
-              </a:lnSpc>
-              <a:spcAft>
-                <a:spcPts val="0"/>
-              </a:spcAft>
-              <a:buNone/>
-            </a:pPr>
-            <a:r>
-              <a:rPr lang="en-US" sz="1500" b="0">
-                <a:solidFill>
-                  <a:srgbClr val="202B33"/>
-                </a:solidFill>
-                <a:latin typeface="Arial"/>
-                <a:ea typeface="Arial"/>
-                <a:cs typeface="Arial"/>
-              </a:rPr>
-              <a:t xml:space="preserve"/>
-            </a:r>
-            <a:endParaRPr lang="en-US" sz="1500"/>
-          </a:p>
-          <a:p>
-            <a:pPr marL="0" indent="0">
-              <a:lnSpc>
-                <a:spcPts val="1950"/>
-              </a:lnSpc>
-              <a:spcAft>
-                <a:spcPts val="0"/>
-              </a:spcAft>
-              <a:buNone/>
-            </a:pPr>
-            <a:r>
-              <a:rPr lang="en-US" sz="1500" b="0">
-                <a:solidFill>
-                  <a:srgbClr val="202B33"/>
-                </a:solidFill>
-                <a:latin typeface="Arial"/>
-                <a:ea typeface="Arial"/>
-                <a:cs typeface="Arial"/>
-              </a:rPr>
-              <a:t xml:space="preserve">Here is the part I want you to leave with.</a:t>
-            </a:r>
-            <a:endParaRPr lang="en-US" sz="1500"/>
-          </a:p>
-          <a:p>
-            <a:pPr marL="0" indent="0">
-              <a:lnSpc>
-                <a:spcPts val="1950"/>
-              </a:lnSpc>
-              <a:spcAft>
-                <a:spcPts val="0"/>
-              </a:spcAft>
-              <a:buNone/>
-            </a:pPr>
-            <a:r>
-              <a:rPr lang="en-US" sz="1500" b="0">
-                <a:solidFill>
-                  <a:srgbClr val="202B33"/>
-                </a:solidFill>
-                <a:latin typeface="Arial"/>
-                <a:ea typeface="Arial"/>
-                <a:cs typeface="Arial"/>
-              </a:rPr>
-              <a:t xml:space="preserve">That future is not spoken for. GPT image</a:t>
-            </a:r>
-            <a:endParaRPr lang="en-US" sz="1500"/>
-          </a:p>
-          <a:p>
-            <a:pPr marL="0" indent="0">
-              <a:lnSpc>
-                <a:spcPts val="1950"/>
-              </a:lnSpc>
-              <a:spcAft>
-                <a:spcPts val="0"/>
-              </a:spcAft>
-              <a:buNone/>
-            </a:pPr>
-            <a:r>
-              <a:rPr lang="en-US" sz="1500" b="0">
-                <a:solidFill>
-                  <a:srgbClr val="202B33"/>
-                </a:solidFill>
-                <a:latin typeface="Arial"/>
-                <a:ea typeface="Arial"/>
-                <a:cs typeface="Arial"/>
-              </a:rPr>
-              <a:t xml:space="preserve">being pretty good does not mean the story</a:t>
-            </a:r>
-            <a:endParaRPr lang="en-US" sz="1500"/>
-          </a:p>
-          <a:p>
-            <a:pPr marL="0" indent="0">
-              <a:lnSpc>
-                <a:spcPts val="1950"/>
-              </a:lnSpc>
-              <a:spcAft>
-                <a:spcPts val="0"/>
-              </a:spcAft>
-              <a:buNone/>
-            </a:pPr>
-            <a:r>
-              <a:rPr lang="en-US" sz="1500" b="0">
-                <a:solidFill>
-                  <a:srgbClr val="202B33"/>
-                </a:solidFill>
-                <a:latin typeface="Arial"/>
-                <a:ea typeface="Arial"/>
-                <a:cs typeface="Arial"/>
-              </a:rPr>
-              <a:t xml:space="preserve">of image creation belongs to the big</a:t>
-            </a:r>
-            <a:endParaRPr lang="en-US" sz="1500"/>
-          </a:p>
-          <a:p>
-            <a:pPr marL="0" indent="0">
-              <a:lnSpc>
-                <a:spcPts val="1950"/>
-              </a:lnSpc>
-              <a:spcAft>
-                <a:spcPts val="0"/>
-              </a:spcAft>
-              <a:buNone/>
-            </a:pPr>
-            <a:r>
-              <a:rPr lang="en-US" sz="1500" b="0">
-                <a:solidFill>
-                  <a:srgbClr val="202B33"/>
-                </a:solidFill>
-                <a:latin typeface="Arial"/>
-                <a:ea typeface="Arial"/>
-                <a:cs typeface="Arial"/>
-              </a:rPr>
-              <a:t xml:space="preserve">players, and the same is true in whichever</a:t>
-            </a:r>
-            <a:endParaRPr lang="en-US" sz="1500"/>
-          </a:p>
-          <a:p>
-            <a:pPr marL="0" indent="0">
-              <a:lnSpc>
-                <a:spcPts val="1950"/>
-              </a:lnSpc>
-              <a:spcAft>
-                <a:spcPts val="0"/>
-              </a:spcAft>
-              <a:buNone/>
-            </a:pPr>
-            <a:r>
-              <a:rPr lang="en-US" sz="1500" b="0">
-                <a:solidFill>
-                  <a:srgbClr val="202B33"/>
-                </a:solidFill>
-                <a:latin typeface="Arial"/>
-                <a:ea typeface="Arial"/>
-                <a:cs typeface="Arial"/>
-              </a:rPr>
-              <a:t xml:space="preserve">industry you work in. Those of us who do</a:t>
-            </a:r>
-            <a:endParaRPr lang="en-US" sz="1500"/>
-          </a:p>
-          <a:p>
-            <a:pPr marL="0" indent="0">
-              <a:lnSpc>
-                <a:spcPts val="1950"/>
-              </a:lnSpc>
-              <a:spcAft>
-                <a:spcPts val="0"/>
-              </a:spcAft>
-              <a:buNone/>
-            </a:pPr>
-            <a:r>
-              <a:rPr lang="en-US" sz="1500" b="0">
-                <a:solidFill>
-                  <a:srgbClr val="202B33"/>
-                </a:solidFill>
-                <a:latin typeface="Arial"/>
-                <a:ea typeface="Arial"/>
-                <a:cs typeface="Arial"/>
-              </a:rPr>
-              <a:t xml:space="preserve">not work at a frontier lab, the organic</a:t>
-            </a:r>
-            <a:endParaRPr lang="en-US" sz="1500"/>
-          </a:p>
-          <a:p>
-            <a:pPr marL="0" indent="0">
-              <a:lnSpc>
-                <a:spcPts val="1950"/>
-              </a:lnSpc>
-              <a:spcAft>
-                <a:spcPts val="0"/>
-              </a:spcAft>
-              <a:buNone/>
-            </a:pPr>
-            <a:r>
-              <a:rPr lang="en-US" sz="1500" b="0">
-                <a:solidFill>
-                  <a:srgbClr val="202B33"/>
-                </a:solidFill>
-                <a:latin typeface="Arial"/>
-                <a:ea typeface="Arial"/>
-                <a:cs typeface="Arial"/>
-              </a:rPr>
-              <a:t xml:space="preserve">agents in the room, get to rethink any and</a:t>
-            </a:r>
-            <a:endParaRPr lang="en-US" sz="1500"/>
-          </a:p>
-          <a:p>
-            <a:pPr marL="0" indent="0">
-              <a:lnSpc>
-                <a:spcPts val="1950"/>
-              </a:lnSpc>
-              <a:spcAft>
-                <a:spcPts val="0"/>
-              </a:spcAft>
-              <a:buNone/>
-            </a:pPr>
-            <a:r>
-              <a:rPr lang="en-US" sz="1500" b="0">
-                <a:solidFill>
-                  <a:srgbClr val="202B33"/>
-                </a:solidFill>
-                <a:latin typeface="Arial"/>
-                <a:ea typeface="Arial"/>
-                <a:cs typeface="Arial"/>
-              </a:rPr>
-              <a:t xml:space="preserve">every app as an AI-native system from the</a:t>
-            </a:r>
-            <a:endParaRPr lang="en-US" sz="1500"/>
-          </a:p>
-          <a:p>
-            <a:pPr marL="0" indent="0">
-              <a:lnSpc>
-                <a:spcPts val="1950"/>
-              </a:lnSpc>
-              <a:spcAft>
-                <a:spcPts val="0"/>
-              </a:spcAft>
-              <a:buNone/>
-            </a:pPr>
-            <a:r>
-              <a:rPr lang="en-US" sz="1500" b="0">
-                <a:solidFill>
-                  <a:srgbClr val="202B33"/>
-                </a:solidFill>
-                <a:latin typeface="Arial"/>
-                <a:ea typeface="Arial"/>
-                <a:cs typeface="Arial"/>
-              </a:rPr>
-              <a:t xml:space="preserve">boundary up. That is this whole talk one</a:t>
-            </a:r>
-            <a:endParaRPr lang="en-US" sz="1500"/>
-          </a:p>
-          <a:p>
-            <a:pPr marL="0" indent="0">
-              <a:lnSpc>
-                <a:spcPts val="1950"/>
-              </a:lnSpc>
-              <a:spcAft>
-                <a:spcPts val="0"/>
-              </a:spcAft>
-              <a:buNone/>
-            </a:pPr>
-            <a:r>
-              <a:rPr lang="en-US" sz="1500" b="0">
-                <a:solidFill>
-                  <a:srgbClr val="202B33"/>
-                </a:solidFill>
-                <a:latin typeface="Arial"/>
-                <a:ea typeface="Arial"/>
-                <a:cs typeface="Arial"/>
-              </a:rPr>
-              <a:t xml:space="preserve">level higher: do not photocopy today's</a:t>
-            </a:r>
-            <a:endParaRPr lang="en-US" sz="1500"/>
-          </a:p>
-          <a:p>
-            <a:pPr marL="0" indent="0">
-              <a:lnSpc>
-                <a:spcPts val="1950"/>
-              </a:lnSpc>
-              <a:spcAft>
-                <a:spcPts val="0"/>
-              </a:spcAft>
-              <a:buNone/>
-            </a:pPr>
-            <a:r>
-              <a:rPr lang="en-US" sz="1500" b="0">
-                <a:solidFill>
-                  <a:srgbClr val="202B33"/>
-                </a:solidFill>
-                <a:latin typeface="Arial"/>
-                <a:ea typeface="Arial"/>
-                <a:cs typeface="Arial"/>
-              </a:rPr>
-              <a:t xml:space="preserve">product categories onto tomorrow's</a:t>
-            </a:r>
-            <a:endParaRPr lang="en-US" sz="1500"/>
-          </a:p>
-          <a:p>
-            <a:pPr marL="0" indent="0">
-              <a:lnSpc>
-                <a:spcPts val="1950"/>
-              </a:lnSpc>
-              <a:spcAft>
-                <a:spcPts val="0"/>
-              </a:spcAft>
-              <a:buNone/>
-            </a:pPr>
-            <a:r>
-              <a:rPr lang="en-US" sz="1500" b="0">
-                <a:solidFill>
-                  <a:srgbClr val="202B33"/>
-                </a:solidFill>
-                <a:latin typeface="Arial"/>
-                <a:ea typeface="Arial"/>
-                <a:cs typeface="Arial"/>
-              </a:rPr>
-              <a:t xml:space="preserve">substrate either.</a:t>
+              <a:t xml:space="preserve">creation belongs to the big players, and</a:t>
+            </a:r>
+            <a:endParaRPr lang="en-US" sz="1500"/>
+          </a:p>
+          <a:p>
+            <a:pPr marL="0" indent="0">
+              <a:lnSpc>
+                <a:spcPts val="1950"/>
+              </a:lnSpc>
+              <a:spcAft>
+                <a:spcPts val="0"/>
+              </a:spcAft>
+              <a:buNone/>
+            </a:pPr>
+            <a:r>
+              <a:rPr lang="en-US" sz="1500" b="0">
+                <a:solidFill>
+                  <a:srgbClr val="202B33"/>
+                </a:solidFill>
+                <a:latin typeface="Arial"/>
+                <a:ea typeface="Arial"/>
+                <a:cs typeface="Arial"/>
+              </a:rPr>
+              <a:t xml:space="preserve">the same holds in whichever industry you</a:t>
+            </a:r>
+            <a:endParaRPr lang="en-US" sz="1500"/>
+          </a:p>
+          <a:p>
+            <a:pPr marL="0" indent="0">
+              <a:lnSpc>
+                <a:spcPts val="1950"/>
+              </a:lnSpc>
+              <a:spcAft>
+                <a:spcPts val="0"/>
+              </a:spcAft>
+              <a:buNone/>
+            </a:pPr>
+            <a:r>
+              <a:rPr lang="en-US" sz="1500" b="0">
+                <a:solidFill>
+                  <a:srgbClr val="202B33"/>
+                </a:solidFill>
+                <a:latin typeface="Arial"/>
+                <a:ea typeface="Arial"/>
+                <a:cs typeface="Arial"/>
+              </a:rPr>
+              <a:t xml:space="preserve">work in. Those of us who do not work at a</a:t>
+            </a:r>
+            <a:endParaRPr lang="en-US" sz="1500"/>
+          </a:p>
+          <a:p>
+            <a:pPr marL="0" indent="0">
+              <a:lnSpc>
+                <a:spcPts val="1950"/>
+              </a:lnSpc>
+              <a:spcAft>
+                <a:spcPts val="0"/>
+              </a:spcAft>
+              <a:buNone/>
+            </a:pPr>
+            <a:r>
+              <a:rPr lang="en-US" sz="1500" b="0">
+                <a:solidFill>
+                  <a:srgbClr val="202B33"/>
+                </a:solidFill>
+                <a:latin typeface="Arial"/>
+                <a:ea typeface="Arial"/>
+                <a:cs typeface="Arial"/>
+              </a:rPr>
+              <a:t xml:space="preserve">frontier lab — the organic agents in the</a:t>
+            </a:r>
+            <a:endParaRPr lang="en-US" sz="1500"/>
+          </a:p>
+          <a:p>
+            <a:pPr marL="0" indent="0">
+              <a:lnSpc>
+                <a:spcPts val="1950"/>
+              </a:lnSpc>
+              <a:spcAft>
+                <a:spcPts val="0"/>
+              </a:spcAft>
+              <a:buNone/>
+            </a:pPr>
+            <a:r>
+              <a:rPr lang="en-US" sz="1500" b="0">
+                <a:solidFill>
+                  <a:srgbClr val="202B33"/>
+                </a:solidFill>
+                <a:latin typeface="Arial"/>
+                <a:ea typeface="Arial"/>
+                <a:cs typeface="Arial"/>
+              </a:rPr>
+              <a:t xml:space="preserve">room — get to rethink any and every app as</a:t>
+            </a:r>
+            <a:endParaRPr lang="en-US" sz="1500"/>
+          </a:p>
+          <a:p>
+            <a:pPr marL="0" indent="0">
+              <a:lnSpc>
+                <a:spcPts val="1950"/>
+              </a:lnSpc>
+              <a:spcAft>
+                <a:spcPts val="0"/>
+              </a:spcAft>
+              <a:buNone/>
+            </a:pPr>
+            <a:r>
+              <a:rPr lang="en-US" sz="1500" b="0">
+                <a:solidFill>
+                  <a:srgbClr val="202B33"/>
+                </a:solidFill>
+                <a:latin typeface="Arial"/>
+                <a:ea typeface="Arial"/>
+                <a:cs typeface="Arial"/>
+              </a:rPr>
+              <a:t xml:space="preserve">an AI-native system, from the boundary up.</a:t>
+            </a:r>
+            <a:endParaRPr lang="en-US" sz="1500"/>
+          </a:p>
+          <a:p>
+            <a:pPr marL="0" indent="0">
+              <a:lnSpc>
+                <a:spcPts val="1950"/>
+              </a:lnSpc>
+              <a:spcAft>
+                <a:spcPts val="0"/>
+              </a:spcAft>
+              <a:buNone/>
+            </a:pPr>
+            <a:r>
+              <a:rPr lang="en-US" sz="1500" b="0">
+                <a:solidFill>
+                  <a:srgbClr val="202B33"/>
+                </a:solidFill>
+                <a:latin typeface="Arial"/>
+                <a:ea typeface="Arial"/>
+                <a:cs typeface="Arial"/>
+              </a:rPr>
+              <a:t xml:space="preserve">That is this whole talk one level higher:</a:t>
+            </a:r>
+            <a:endParaRPr lang="en-US" sz="1500"/>
+          </a:p>
+          <a:p>
+            <a:pPr marL="0" indent="0">
+              <a:lnSpc>
+                <a:spcPts val="1950"/>
+              </a:lnSpc>
+              <a:spcAft>
+                <a:spcPts val="0"/>
+              </a:spcAft>
+              <a:buNone/>
+            </a:pPr>
+            <a:r>
+              <a:rPr lang="en-US" sz="1500" b="0">
+                <a:solidFill>
+                  <a:srgbClr val="202B33"/>
+                </a:solidFill>
+                <a:latin typeface="Arial"/>
+                <a:ea typeface="Arial"/>
+                <a:cs typeface="Arial"/>
+              </a:rPr>
+              <a:t xml:space="preserve">do not photocopy today's product categories</a:t>
+            </a:r>
+            <a:endParaRPr lang="en-US" sz="1500"/>
+          </a:p>
+          <a:p>
+            <a:pPr marL="0" indent="0">
+              <a:lnSpc>
+                <a:spcPts val="1950"/>
+              </a:lnSpc>
+              <a:spcAft>
+                <a:spcPts val="0"/>
+              </a:spcAft>
+              <a:buNone/>
+            </a:pPr>
+            <a:r>
+              <a:rPr lang="en-US" sz="1500" b="0">
+                <a:solidFill>
+                  <a:srgbClr val="202B33"/>
+                </a:solidFill>
+                <a:latin typeface="Arial"/>
+                <a:ea typeface="Arial"/>
+                <a:cs typeface="Arial"/>
+              </a:rPr>
+              <a:t xml:space="preserve">onto tomorrow's substrate either.</a:t>
             </a:r>
             <a:endParaRPr lang="en-US" sz="1500"/>
           </a:p>
